--- a/docs/Final_Presentation.pptx
+++ b/docs/Final_Presentation.pptx
@@ -5121,7 +5121,7 @@
                 </a:solidFill>
                 <a:latin typeface="Calibri"/>
               </a:rPr>
-              <a:t>Late Fusion: a weighted sum of output logits — no extra training needed</a:t>
+              <a:t>Late Fusion: a weighted sum of output logits - no extra training needed</a:t>
             </a:r>
           </a:p>
         </p:txBody>
@@ -5710,7 +5710,7 @@
                 </a:solidFill>
                 <a:latin typeface="Calibri"/>
               </a:rPr>
-              <a:t>One parameter α — found by systematic grid search from 0.0 to 1.0 (step 0.05)</a:t>
+              <a:t>One parameter α - found by systematic grid search from 0.0 to 1.0 (step 0.05)</a:t>
             </a:r>
           </a:p>
         </p:txBody>
@@ -5920,7 +5920,7 @@
                 </a:solidFill>
                 <a:latin typeface="Calibri"/>
               </a:rPr>
-              <a:t>The weight search shows text matters more — but both channels are essential</a:t>
+              <a:t>The weight search shows text matters more - but both channels are essential</a:t>
             </a:r>
           </a:p>
         </p:txBody>
@@ -6038,30 +6038,6 @@
           </a:p>
         </p:txBody>
       </p:sp>
-      <p:pic>
-        <p:nvPicPr>
-          <p:cNvPr id="7" name="Picture 6" descr="fig_weight_search_crop.png"/>
-          <p:cNvPicPr>
-            <a:picLocks noChangeAspect="1"/>
-          </p:cNvPicPr>
-          <p:nvPr/>
-        </p:nvPicPr>
-        <p:blipFill>
-          <a:blip r:embed="rId2"/>
-          <a:stretch>
-            <a:fillRect/>
-          </a:stretch>
-        </p:blipFill>
-        <p:spPr>
-          <a:xfrm>
-            <a:off x="3506724" y="1293876"/>
-            <a:ext cx="5174278" cy="3429000"/>
-          </a:xfrm>
-          <a:prstGeom prst="rect">
-            <a:avLst/>
-          </a:prstGeom>
-        </p:spPr>
-      </p:pic>
       <p:sp>
         <p:nvSpPr>
           <p:cNvPr id="8" name="Rectangle 7"/>
@@ -6111,8 +6087,8 @@
                 </a:solidFill>
                 <a:latin typeface="Calibri"/>
               </a:rPr>
-              <a:t>Best α = 0.60
-Text 60% · Audio 40%</a:t>
+              <a:t>Best α = 0.45
+Text 45% · Audio 55%</a:t>
             </a:r>
           </a:p>
         </p:txBody>
@@ -6167,7 +6143,7 @@
                 <a:latin typeface="Calibri"/>
               </a:rPr>
               <a:t>Plateau region
-Robust for α ∈ [0.5, 0.7]</a:t>
+Robust for α ∈ [0.35, 0.55]</a:t>
             </a:r>
           </a:p>
         </p:txBody>
@@ -6222,7 +6198,7 @@
                 <a:latin typeface="Calibri"/>
               </a:rPr>
               <a:t>Sanity check ✓
-α=0→0.6403  α=1→0.6519</a:t>
+α=0→0.6398  α=1→0.6475</a:t>
             </a:r>
           </a:p>
         </p:txBody>
@@ -6274,11 +6250,35 @@
                 </a:solidFill>
                 <a:latin typeface="Calibri"/>
               </a:rPr>
-              <a:t>Best α = 0.60  →  Macro F1 = 0.7104  (+0.059 over text-only, +0.070 over audio-only)</a:t>
-            </a:r>
-          </a:p>
-        </p:txBody>
-      </p:sp>
+              <a:t>Best α = 0.45  →  Macro F1 = 0.7108  (+0.063 over text-only, +0.071 over audio-only)</a:t>
+            </a:r>
+          </a:p>
+        </p:txBody>
+      </p:sp>
+      <p:pic>
+        <p:nvPicPr>
+          <p:cNvPr id="12" name="Picture 11" descr="slide11_new.png"/>
+          <p:cNvPicPr>
+            <a:picLocks noChangeAspect="1"/>
+          </p:cNvPicPr>
+          <p:nvPr/>
+        </p:nvPicPr>
+        <p:blipFill>
+          <a:blip r:embed="rId4"/>
+          <a:stretch>
+            <a:fillRect/>
+          </a:stretch>
+        </p:blipFill>
+        <p:spPr>
+          <a:xfrm>
+            <a:off x="3506724" y="1293876"/>
+            <a:ext cx="5174278" cy="3424879"/>
+          </a:xfrm>
+          <a:prstGeom prst="rect">
+            <a:avLst/>
+          </a:prstGeom>
+        </p:spPr>
+      </p:pic>
     </p:spTree>
   </p:cSld>
   <p:clrMapOvr>
@@ -6378,7 +6378,7 @@
                 </a:solidFill>
                 <a:latin typeface="Calibri"/>
               </a:rPr>
-              <a:t>Fusion achieves Macro F1 = 0.71 — a +0.06 improvement over text-only</a:t>
+              <a:t>Fusion achieves Macro F1 = 0.71 - a +0.06 improvement over text-only</a:t>
             </a:r>
           </a:p>
         </p:txBody>
@@ -6496,30 +6496,6 @@
           </a:p>
         </p:txBody>
       </p:sp>
-      <p:pic>
-        <p:nvPicPr>
-          <p:cNvPr id="7" name="Picture 6" descr="main_results.png"/>
-          <p:cNvPicPr>
-            <a:picLocks noChangeAspect="1"/>
-          </p:cNvPicPr>
-          <p:nvPr/>
-        </p:nvPicPr>
-        <p:blipFill>
-          <a:blip r:embed="rId2"/>
-          <a:stretch>
-            <a:fillRect/>
-          </a:stretch>
-        </p:blipFill>
-        <p:spPr>
-          <a:xfrm>
-            <a:off x="457200" y="1293876"/>
-            <a:ext cx="6196851" cy="3931920"/>
-          </a:xfrm>
-          <a:prstGeom prst="rect">
-            <a:avLst/>
-          </a:prstGeom>
-        </p:spPr>
-      </p:pic>
       <p:sp>
         <p:nvSpPr>
           <p:cNvPr id="8" name="TextBox 7"/>
@@ -6550,7 +6526,7 @@
                 </a:solidFill>
                 <a:latin typeface="Calibri"/>
               </a:rPr>
-              <a:t>0.7104</a:t>
+              <a:t>0.7108</a:t>
             </a:r>
           </a:p>
         </p:txBody>
@@ -6745,7 +6721,7 @@
                           </a:solidFill>
                           <a:latin typeface="Calibri"/>
                         </a:rPr>
-                        <a:t>0.6793</a:t>
+                        <a:t>0.6843</a:t>
                       </a:r>
                     </a:p>
                   </a:txBody>
@@ -6768,7 +6744,7 @@
                           </a:solidFill>
                           <a:latin typeface="Calibri"/>
                         </a:rPr>
-                        <a:t>0.6519</a:t>
+                        <a:t>0.6475</a:t>
                       </a:r>
                     </a:p>
                   </a:txBody>
@@ -6791,7 +6767,7 @@
                           </a:solidFill>
                           <a:latin typeface="Calibri"/>
                         </a:rPr>
-                        <a:t>0.6948</a:t>
+                        <a:t>0.6937</a:t>
                       </a:r>
                     </a:p>
                   </a:txBody>
@@ -6839,7 +6815,7 @@
                           </a:solidFill>
                           <a:latin typeface="Calibri"/>
                         </a:rPr>
-                        <a:t>0.6880</a:t>
+                        <a:t>0.6829</a:t>
                       </a:r>
                     </a:p>
                   </a:txBody>
@@ -6862,7 +6838,7 @@
                           </a:solidFill>
                           <a:latin typeface="Calibri"/>
                         </a:rPr>
-                        <a:t>0.6403</a:t>
+                        <a:t>0.6398</a:t>
                       </a:r>
                     </a:p>
                   </a:txBody>
@@ -6885,7 +6861,7 @@
                           </a:solidFill>
                           <a:latin typeface="Calibri"/>
                         </a:rPr>
-                        <a:t>0.6874</a:t>
+                        <a:t>0.6876</a:t>
                       </a:r>
                     </a:p>
                   </a:txBody>
@@ -6933,7 +6909,7 @@
                           </a:solidFill>
                           <a:latin typeface="Calibri"/>
                         </a:rPr>
-                        <a:t>—</a:t>
+                        <a:t>0.7502</a:t>
                       </a:r>
                     </a:p>
                   </a:txBody>
@@ -6956,7 +6932,7 @@
                           </a:solidFill>
                           <a:latin typeface="Calibri"/>
                         </a:rPr>
-                        <a:t>0.7104</a:t>
+                        <a:t>0.7108</a:t>
                       </a:r>
                     </a:p>
                   </a:txBody>
@@ -6979,7 +6955,7 @@
                           </a:solidFill>
                           <a:latin typeface="Calibri"/>
                         </a:rPr>
-                        <a:t>—</a:t>
+                        <a:t>0.7541</a:t>
                       </a:r>
                     </a:p>
                   </a:txBody>
@@ -7076,11 +7052,35 @@
                 </a:solidFill>
                 <a:latin typeface="Calibri"/>
               </a:rPr>
-              <a:t>+0.059 Macro F1 over text-only · No additional training · Fully speaker-independent</a:t>
-            </a:r>
-          </a:p>
-        </p:txBody>
-      </p:sp>
+              <a:t>+0.063 Macro F1 over text-only · No additional training · Fully speaker-independent</a:t>
+            </a:r>
+          </a:p>
+        </p:txBody>
+      </p:sp>
+      <p:pic>
+        <p:nvPicPr>
+          <p:cNvPr id="13" name="Picture 12" descr="slide12_new.png"/>
+          <p:cNvPicPr>
+            <a:picLocks noChangeAspect="1"/>
+          </p:cNvPicPr>
+          <p:nvPr/>
+        </p:nvPicPr>
+        <p:blipFill>
+          <a:blip r:embed="rId4"/>
+          <a:stretch>
+            <a:fillRect/>
+          </a:stretch>
+        </p:blipFill>
+        <p:spPr>
+          <a:xfrm>
+            <a:off x="457200" y="1293876"/>
+            <a:ext cx="6196851" cy="3936822"/>
+          </a:xfrm>
+          <a:prstGeom prst="rect">
+            <a:avLst/>
+          </a:prstGeom>
+        </p:spPr>
+      </p:pic>
     </p:spTree>
   </p:cSld>
   <p:clrMapOvr>
@@ -7180,7 +7180,7 @@
                 </a:solidFill>
                 <a:latin typeface="Calibri"/>
               </a:rPr>
-              <a:t>Neutral was the hardest class — fusion helped it most</a:t>
+              <a:t>Neutral was the hardest class - fusion helped it most</a:t>
             </a:r>
           </a:p>
         </p:txBody>
@@ -7298,30 +7298,6 @@
           </a:p>
         </p:txBody>
       </p:sp>
-      <p:pic>
-        <p:nvPicPr>
-          <p:cNvPr id="7" name="Picture 6" descr="perclass_comp.png"/>
-          <p:cNvPicPr>
-            <a:picLocks noChangeAspect="1"/>
-          </p:cNvPicPr>
-          <p:nvPr/>
-        </p:nvPicPr>
-        <p:blipFill>
-          <a:blip r:embed="rId2"/>
-          <a:stretch>
-            <a:fillRect/>
-          </a:stretch>
-        </p:blipFill>
-        <p:spPr>
-          <a:xfrm>
-            <a:off x="457200" y="1293876"/>
-            <a:ext cx="6937641" cy="3840480"/>
-          </a:xfrm>
-          <a:prstGeom prst="rect">
-            <a:avLst/>
-          </a:prstGeom>
-        </p:spPr>
-      </p:pic>
       <p:sp>
         <p:nvSpPr>
           <p:cNvPr id="8" name="Rectangle 7"/>
@@ -7383,7 +7359,7 @@
                 </a:solidFill>
                 <a:latin typeface="Calibri"/>
               </a:rPr>
-              <a:t>0.76 → 0.81</a:t>
+              <a:t>0.76 → 0.82</a:t>
             </a:r>
           </a:p>
           <a:p>
@@ -7461,7 +7437,7 @@
                 </a:solidFill>
                 <a:latin typeface="Calibri"/>
               </a:rPr>
-              <a:t>0.71 → 0.75</a:t>
+              <a:t>0.72 → 0.76</a:t>
             </a:r>
           </a:p>
           <a:p>
@@ -7473,7 +7449,7 @@
                 </a:solidFill>
                 <a:latin typeface="Calibri"/>
               </a:rPr>
-              <a:t>text 0.71  ·  audio 0.63</a:t>
+              <a:t>text 0.72  ·  audio 0.63</a:t>
             </a:r>
           </a:p>
         </p:txBody>
@@ -7527,7 +7503,7 @@
                 </a:solidFill>
                 <a:latin typeface="Calibri"/>
               </a:rPr>
-              <a:t>Neutral  ★ +0.07</a:t>
+              <a:t>Neutral  ★ +0.09</a:t>
             </a:r>
           </a:p>
           <a:p>
@@ -7539,7 +7515,7 @@
                 </a:solidFill>
                 <a:latin typeface="Calibri"/>
               </a:rPr>
-              <a:t>0.48 → 0.55</a:t>
+              <a:t>0.46 → 0.55</a:t>
             </a:r>
           </a:p>
           <a:p>
@@ -7551,7 +7527,7 @@
                 </a:solidFill>
                 <a:latin typeface="Calibri"/>
               </a:rPr>
-              <a:t>text 0.48  ·  audio 0.51</a:t>
+              <a:t>text 0.46  ·  audio 0.51</a:t>
             </a:r>
           </a:p>
         </p:txBody>
@@ -7608,6 +7584,30 @@
           </a:p>
         </p:txBody>
       </p:sp>
+      <p:pic>
+        <p:nvPicPr>
+          <p:cNvPr id="12" name="Picture 11" descr="slide13_new.png"/>
+          <p:cNvPicPr>
+            <a:picLocks noChangeAspect="1"/>
+          </p:cNvPicPr>
+          <p:nvPr/>
+        </p:nvPicPr>
+        <p:blipFill>
+          <a:blip r:embed="rId4"/>
+          <a:stretch>
+            <a:fillRect/>
+          </a:stretch>
+        </p:blipFill>
+        <p:spPr>
+          <a:xfrm>
+            <a:off x="457200" y="1293876"/>
+            <a:ext cx="6937641" cy="3854245"/>
+          </a:xfrm>
+          <a:prstGeom prst="rect">
+            <a:avLst/>
+          </a:prstGeom>
+        </p:spPr>
+      </p:pic>
     </p:spTree>
   </p:cSld>
   <p:clrMapOvr>
@@ -7855,7 +7855,7 @@
                 </a:solidFill>
                 <a:latin typeface="Calibri"/>
               </a:rPr>
-              <a:t>Part A — Re-scored against corrected labels (Sum-then-Argmax)</a:t>
+              <a:t>Part A - Re-scored against corrected labels (Sum-then-Argmax)</a:t>
             </a:r>
           </a:p>
         </p:txBody>
@@ -7890,7 +7890,7 @@
                 </a:solidFill>
                 <a:latin typeface="Calibri"/>
               </a:rPr>
-              <a:t>Only 4.24% of test labels changed (92 / 2,170). Δ across all models ≈ −0.004 — essentially zero.</a:t>
+              <a:t>Only 4.24% of test labels changed (92 / 2,170). Δ across all models is below 0.005 in magnitude - essentially zero.</a:t>
             </a:r>
           </a:p>
         </p:txBody>
@@ -8050,7 +8050,7 @@
                           </a:solidFill>
                           <a:latin typeface="Calibri"/>
                         </a:rPr>
-                        <a:t>0.6519</a:t>
+                        <a:t>0.6475</a:t>
                       </a:r>
                     </a:p>
                   </a:txBody>
@@ -8073,7 +8073,7 @@
                           </a:solidFill>
                           <a:latin typeface="Calibri"/>
                         </a:rPr>
-                        <a:t>0.6481</a:t>
+                        <a:t>0.6506</a:t>
                       </a:r>
                     </a:p>
                   </a:txBody>
@@ -8096,7 +8096,7 @@
                           </a:solidFill>
                           <a:latin typeface="Calibri"/>
                         </a:rPr>
-                        <a:t>−0.004</a:t>
+                        <a:t>+0.003</a:t>
                       </a:r>
                     </a:p>
                   </a:txBody>
@@ -8144,7 +8144,7 @@
                           </a:solidFill>
                           <a:latin typeface="Calibri"/>
                         </a:rPr>
-                        <a:t>0.6403</a:t>
+                        <a:t>0.6398</a:t>
                       </a:r>
                     </a:p>
                   </a:txBody>
@@ -8167,7 +8167,7 @@
                           </a:solidFill>
                           <a:latin typeface="Calibri"/>
                         </a:rPr>
-                        <a:t>0.6356</a:t>
+                        <a:t>0.6359</a:t>
                       </a:r>
                     </a:p>
                   </a:txBody>
@@ -8238,7 +8238,7 @@
                           </a:solidFill>
                           <a:latin typeface="Calibri"/>
                         </a:rPr>
-                        <a:t>0.7041</a:t>
+                        <a:t>0.7108</a:t>
                       </a:r>
                     </a:p>
                   </a:txBody>
@@ -8261,7 +8261,7 @@
                           </a:solidFill>
                           <a:latin typeface="Calibri"/>
                         </a:rPr>
-                        <a:t>0.6999</a:t>
+                        <a:t>0.7081</a:t>
                       </a:r>
                     </a:p>
                   </a:txBody>
@@ -8284,7 +8284,7 @@
                           </a:solidFill>
                           <a:latin typeface="Calibri"/>
                         </a:rPr>
-                        <a:t>−0.004</a:t>
+                        <a:t>−0.003</a:t>
                       </a:r>
                     </a:p>
                   </a:txBody>
@@ -8329,7 +8329,7 @@
                 </a:solidFill>
                 <a:latin typeface="Calibri"/>
               </a:rPr>
-              <a:t>Part B — Performance by human annotator agreement tier</a:t>
+              <a:t>Part B - Performance by human annotator agreement tier</a:t>
             </a:r>
           </a:p>
         </p:txBody>
@@ -8536,7 +8536,7 @@
                           </a:solidFill>
                           <a:latin typeface="Calibri"/>
                         </a:rPr>
-                        <a:t>0.233</a:t>
+                        <a:t>0.285</a:t>
                       </a:r>
                     </a:p>
                   </a:txBody>
@@ -8559,7 +8559,7 @@
                           </a:solidFill>
                           <a:latin typeface="Calibri"/>
                         </a:rPr>
-                        <a:t>0.363</a:t>
+                        <a:t>0.308</a:t>
                       </a:r>
                     </a:p>
                   </a:txBody>
@@ -8582,7 +8582,7 @@
                           </a:solidFill>
                           <a:latin typeface="Calibri"/>
                         </a:rPr>
-                        <a:t>0.318</a:t>
+                        <a:t>0.344</a:t>
                       </a:r>
                     </a:p>
                   </a:txBody>
@@ -8653,7 +8653,7 @@
                           </a:solidFill>
                           <a:latin typeface="Calibri"/>
                         </a:rPr>
-                        <a:t>0.581</a:t>
+                        <a:t>0.588</a:t>
                       </a:r>
                     </a:p>
                   </a:txBody>
@@ -8676,7 +8676,7 @@
                           </a:solidFill>
                           <a:latin typeface="Calibri"/>
                         </a:rPr>
-                        <a:t>0.574</a:t>
+                        <a:t>0.580</a:t>
                       </a:r>
                     </a:p>
                   </a:txBody>
@@ -8699,7 +8699,7 @@
                           </a:solidFill>
                           <a:latin typeface="Calibri"/>
                         </a:rPr>
-                        <a:t>0.631</a:t>
+                        <a:t>0.645</a:t>
                       </a:r>
                     </a:p>
                   </a:txBody>
@@ -8770,7 +8770,7 @@
                           </a:solidFill>
                           <a:latin typeface="Calibri"/>
                         </a:rPr>
-                        <a:t>0.694</a:t>
+                        <a:t>0.695</a:t>
                       </a:r>
                     </a:p>
                   </a:txBody>
@@ -8793,7 +8793,7 @@
                           </a:solidFill>
                           <a:latin typeface="Calibri"/>
                         </a:rPr>
-                        <a:t>0.674</a:t>
+                        <a:t>0.666</a:t>
                       </a:r>
                     </a:p>
                   </a:txBody>
@@ -8816,7 +8816,7 @@
                           </a:solidFill>
                           <a:latin typeface="Calibri"/>
                         </a:rPr>
-                        <a:t>0.754</a:t>
+                        <a:t>0.766</a:t>
                       </a:r>
                     </a:p>
                   </a:txBody>
@@ -8982,7 +8982,7 @@
                 </a:solidFill>
                 <a:latin typeface="Calibri"/>
               </a:rPr>
-              <a:t>"Yes — combining modalities substantially improves emotion recognition"</a:t>
+              <a:t>"Yes - combining modalities substantially improves emotion recognition"</a:t>
             </a:r>
           </a:p>
         </p:txBody>
@@ -9238,7 +9238,7 @@
                 </a:solidFill>
                 <a:latin typeface="Calibri"/>
               </a:rPr>
-              <a:t>Macro F1 = 0.7104   ·   +0.059 over text-only   ·   no additional training required</a:t>
+              <a:t>Macro F1 = 0.7108   ·   +0.063 over text-only   ·   no additional training required</a:t>
             </a:r>
           </a:p>
         </p:txBody>
@@ -9304,7 +9304,7 @@
                 </a:solidFill>
                 <a:latin typeface="Calibri"/>
               </a:rPr>
-              <a:t>Text and audio each reach ~0.64–0.65 Macro F1 alone — comparable, but limited.</a:t>
+              <a:t>Text and audio each reach ~0.64–0.65 Macro F1 alone - comparable, but limited.</a:t>
             </a:r>
           </a:p>
         </p:txBody>
@@ -9436,7 +9436,7 @@
                 </a:solidFill>
                 <a:latin typeface="Calibri"/>
               </a:rPr>
-              <a:t>Late fusion: Macro F1 = 0.71 — +0.06 gain, zero training overhead.</a:t>
+              <a:t>Late fusion: Macro F1 = 0.71 - +0.06 gain, zero training overhead.</a:t>
             </a:r>
           </a:p>
         </p:txBody>
@@ -9502,7 +9502,7 @@
                 </a:solidFill>
                 <a:latin typeface="Calibri"/>
               </a:rPr>
-              <a:t>Hardest class: 0.48/0.51 → 0.55. Absence of signal becomes a signal.</a:t>
+              <a:t>Hardest class: 0.46/0.51 → 0.55. Absence of signal becomes a signal.</a:t>
             </a:r>
           </a:p>
         </p:txBody>
@@ -9693,7 +9693,7 @@
                 </a:solidFill>
                 <a:latin typeface="Calibri"/>
               </a:rPr>
-              <a:t>Appendix A2 — Full Per-Class Breakdown  (show during Q&amp;A)</a:t>
+              <a:t>Appendix A2 - Full Per-Class Breakdown  (show during Q&amp;A)</a:t>
             </a:r>
           </a:p>
         </p:txBody>
@@ -9967,7 +9967,7 @@
                           </a:solidFill>
                           <a:latin typeface="Calibri"/>
                         </a:rPr>
-                        <a:t>RoBERTa — Negative</a:t>
+                        <a:t>RoBERTa - Negative</a:t>
                       </a:r>
                     </a:p>
                   </a:txBody>
@@ -9990,7 +9990,7 @@
                           </a:solidFill>
                           <a:latin typeface="Calibri"/>
                         </a:rPr>
-                        <a:t>0.80</a:t>
+                        <a:t>0.81</a:t>
                       </a:r>
                     </a:p>
                   </a:txBody>
@@ -10013,7 +10013,7 @@
                           </a:solidFill>
                           <a:latin typeface="Calibri"/>
                         </a:rPr>
-                        <a:t>0.73</a:t>
+                        <a:t>0.72</a:t>
                       </a:r>
                     </a:p>
                   </a:txBody>
@@ -10059,7 +10059,7 @@
                           </a:solidFill>
                           <a:latin typeface="Calibri"/>
                         </a:rPr>
-                        <a:t>1193</a:t>
+                        <a:t>1149</a:t>
                       </a:r>
                     </a:p>
                   </a:txBody>
@@ -10084,7 +10084,7 @@
                           </a:solidFill>
                           <a:latin typeface="Calibri"/>
                         </a:rPr>
-                        <a:t>RoBERTa — Positive</a:t>
+                        <a:t>RoBERTa - Positive</a:t>
                       </a:r>
                     </a:p>
                   </a:txBody>
@@ -10107,7 +10107,7 @@
                           </a:solidFill>
                           <a:latin typeface="Calibri"/>
                         </a:rPr>
-                        <a:t>0.75</a:t>
+                        <a:t>0.73</a:t>
                       </a:r>
                     </a:p>
                   </a:txBody>
@@ -10130,7 +10130,7 @@
                           </a:solidFill>
                           <a:latin typeface="Calibri"/>
                         </a:rPr>
-                        <a:t>0.68</a:t>
+                        <a:t>0.70</a:t>
                       </a:r>
                     </a:p>
                   </a:txBody>
@@ -10153,7 +10153,7 @@
                           </a:solidFill>
                           <a:latin typeface="Calibri"/>
                         </a:rPr>
-                        <a:t>0.71</a:t>
+                        <a:t>0.72</a:t>
                       </a:r>
                     </a:p>
                   </a:txBody>
@@ -10176,7 +10176,7 @@
                           </a:solidFill>
                           <a:latin typeface="Calibri"/>
                         </a:rPr>
-                        <a:t> 585</a:t>
+                        <a:t> 613</a:t>
                       </a:r>
                     </a:p>
                   </a:txBody>
@@ -10201,7 +10201,7 @@
                           </a:solidFill>
                           <a:latin typeface="Calibri"/>
                         </a:rPr>
-                        <a:t>RoBERTa — Neutral</a:t>
+                        <a:t>RoBERTa - Neutral</a:t>
                       </a:r>
                     </a:p>
                   </a:txBody>
@@ -10224,7 +10224,7 @@
                           </a:solidFill>
                           <a:latin typeface="Calibri"/>
                         </a:rPr>
-                        <a:t>0.39</a:t>
+                        <a:t>0.40</a:t>
                       </a:r>
                     </a:p>
                   </a:txBody>
@@ -10247,7 +10247,7 @@
                           </a:solidFill>
                           <a:latin typeface="Calibri"/>
                         </a:rPr>
-                        <a:t>0.66</a:t>
+                        <a:t>0.54</a:t>
                       </a:r>
                     </a:p>
                   </a:txBody>
@@ -10270,7 +10270,7 @@
                           </a:solidFill>
                           <a:latin typeface="Calibri"/>
                         </a:rPr>
-                        <a:t>0.48</a:t>
+                        <a:t>0.46</a:t>
                       </a:r>
                     </a:p>
                   </a:txBody>
@@ -10293,7 +10293,7 @@
                           </a:solidFill>
                           <a:latin typeface="Calibri"/>
                         </a:rPr>
-                        <a:t> 392</a:t>
+                        <a:t> 408</a:t>
                       </a:r>
                     </a:p>
                   </a:txBody>
@@ -10318,7 +10318,521 @@
                           </a:solidFill>
                           <a:latin typeface="Calibri"/>
                         </a:rPr>
-                        <a:t>Wav2Vec2 — Negative</a:t>
+                        <a:t>Wav2Vec2 - Negative</a:t>
+                      </a:r>
+                    </a:p>
+                  </a:txBody>
+                  <a:tcPr>
+                    <a:solidFill>
+                      <a:srgbClr val="E8EDF3"/>
+                    </a:solidFill>
+                  </a:tcPr>
+                </a:tc>
+                <a:tc>
+                  <a:txBody>
+                    <a:bodyPr/>
+                    <a:lstStyle/>
+                    <a:p>
+                      <a:pPr algn="ctr"/>
+                      <a:r>
+                        <a:rPr sz="1200">
+                          <a:solidFill>
+                            <a:srgbClr val="1A202C"/>
+                          </a:solidFill>
+                          <a:latin typeface="Calibri"/>
+                        </a:rPr>
+                        <a:t>0.80</a:t>
+                      </a:r>
+                    </a:p>
+                  </a:txBody>
+                  <a:tcPr>
+                    <a:solidFill>
+                      <a:srgbClr val="E8EDF3"/>
+                    </a:solidFill>
+                  </a:tcPr>
+                </a:tc>
+                <a:tc>
+                  <a:txBody>
+                    <a:bodyPr/>
+                    <a:lstStyle/>
+                    <a:p>
+                      <a:pPr algn="ctr"/>
+                      <a:r>
+                        <a:rPr sz="1200">
+                          <a:solidFill>
+                            <a:srgbClr val="1A202C"/>
+                          </a:solidFill>
+                          <a:latin typeface="Calibri"/>
+                        </a:rPr>
+                        <a:t>0.77</a:t>
+                      </a:r>
+                    </a:p>
+                  </a:txBody>
+                  <a:tcPr>
+                    <a:solidFill>
+                      <a:srgbClr val="E8EDF3"/>
+                    </a:solidFill>
+                  </a:tcPr>
+                </a:tc>
+                <a:tc>
+                  <a:txBody>
+                    <a:bodyPr/>
+                    <a:lstStyle/>
+                    <a:p>
+                      <a:pPr algn="ctr"/>
+                      <a:r>
+                        <a:rPr sz="1200">
+                          <a:solidFill>
+                            <a:srgbClr val="1A202C"/>
+                          </a:solidFill>
+                          <a:latin typeface="Calibri"/>
+                        </a:rPr>
+                        <a:t>0.78</a:t>
+                      </a:r>
+                    </a:p>
+                  </a:txBody>
+                  <a:tcPr>
+                    <a:solidFill>
+                      <a:srgbClr val="E8EDF3"/>
+                    </a:solidFill>
+                  </a:tcPr>
+                </a:tc>
+                <a:tc>
+                  <a:txBody>
+                    <a:bodyPr/>
+                    <a:lstStyle/>
+                    <a:p>
+                      <a:pPr algn="ctr"/>
+                      <a:r>
+                        <a:rPr sz="1200">
+                          <a:solidFill>
+                            <a:srgbClr val="1A202C"/>
+                          </a:solidFill>
+                          <a:latin typeface="Calibri"/>
+                        </a:rPr>
+                        <a:t>1149</a:t>
+                      </a:r>
+                    </a:p>
+                  </a:txBody>
+                  <a:tcPr>
+                    <a:solidFill>
+                      <a:srgbClr val="E8EDF3"/>
+                    </a:solidFill>
+                  </a:tcPr>
+                </a:tc>
+              </a:tr>
+              <a:tr h="420624">
+                <a:tc>
+                  <a:txBody>
+                    <a:bodyPr/>
+                    <a:lstStyle/>
+                    <a:p>
+                      <a:pPr algn="ctr"/>
+                      <a:r>
+                        <a:rPr sz="1200">
+                          <a:solidFill>
+                            <a:srgbClr val="1A202C"/>
+                          </a:solidFill>
+                          <a:latin typeface="Calibri"/>
+                        </a:rPr>
+                        <a:t>Wav2Vec2 - Positive</a:t>
+                      </a:r>
+                    </a:p>
+                  </a:txBody>
+                  <a:tcPr>
+                    <a:solidFill>
+                      <a:srgbClr val="F0F4F8"/>
+                    </a:solidFill>
+                  </a:tcPr>
+                </a:tc>
+                <a:tc>
+                  <a:txBody>
+                    <a:bodyPr/>
+                    <a:lstStyle/>
+                    <a:p>
+                      <a:pPr algn="ctr"/>
+                      <a:r>
+                        <a:rPr sz="1200">
+                          <a:solidFill>
+                            <a:srgbClr val="1A202C"/>
+                          </a:solidFill>
+                          <a:latin typeface="Calibri"/>
+                        </a:rPr>
+                        <a:t>0.68</a:t>
+                      </a:r>
+                    </a:p>
+                  </a:txBody>
+                  <a:tcPr>
+                    <a:solidFill>
+                      <a:srgbClr val="F0F4F8"/>
+                    </a:solidFill>
+                  </a:tcPr>
+                </a:tc>
+                <a:tc>
+                  <a:txBody>
+                    <a:bodyPr/>
+                    <a:lstStyle/>
+                    <a:p>
+                      <a:pPr algn="ctr"/>
+                      <a:r>
+                        <a:rPr sz="1200">
+                          <a:solidFill>
+                            <a:srgbClr val="1A202C"/>
+                          </a:solidFill>
+                          <a:latin typeface="Calibri"/>
+                        </a:rPr>
+                        <a:t>0.59</a:t>
+                      </a:r>
+                    </a:p>
+                  </a:txBody>
+                  <a:tcPr>
+                    <a:solidFill>
+                      <a:srgbClr val="F0F4F8"/>
+                    </a:solidFill>
+                  </a:tcPr>
+                </a:tc>
+                <a:tc>
+                  <a:txBody>
+                    <a:bodyPr/>
+                    <a:lstStyle/>
+                    <a:p>
+                      <a:pPr algn="ctr"/>
+                      <a:r>
+                        <a:rPr sz="1200">
+                          <a:solidFill>
+                            <a:srgbClr val="1A202C"/>
+                          </a:solidFill>
+                          <a:latin typeface="Calibri"/>
+                        </a:rPr>
+                        <a:t>0.63</a:t>
+                      </a:r>
+                    </a:p>
+                  </a:txBody>
+                  <a:tcPr>
+                    <a:solidFill>
+                      <a:srgbClr val="F0F4F8"/>
+                    </a:solidFill>
+                  </a:tcPr>
+                </a:tc>
+                <a:tc>
+                  <a:txBody>
+                    <a:bodyPr/>
+                    <a:lstStyle/>
+                    <a:p>
+                      <a:pPr algn="ctr"/>
+                      <a:r>
+                        <a:rPr sz="1200">
+                          <a:solidFill>
+                            <a:srgbClr val="1A202C"/>
+                          </a:solidFill>
+                          <a:latin typeface="Calibri"/>
+                        </a:rPr>
+                        <a:t> 613</a:t>
+                      </a:r>
+                    </a:p>
+                  </a:txBody>
+                  <a:tcPr>
+                    <a:solidFill>
+                      <a:srgbClr val="F0F4F8"/>
+                    </a:solidFill>
+                  </a:tcPr>
+                </a:tc>
+              </a:tr>
+              <a:tr h="420624">
+                <a:tc>
+                  <a:txBody>
+                    <a:bodyPr/>
+                    <a:lstStyle/>
+                    <a:p>
+                      <a:pPr algn="ctr"/>
+                      <a:r>
+                        <a:rPr sz="1200">
+                          <a:solidFill>
+                            <a:srgbClr val="1A202C"/>
+                          </a:solidFill>
+                          <a:latin typeface="Calibri"/>
+                        </a:rPr>
+                        <a:t>Wav2Vec2 - Neutral</a:t>
+                      </a:r>
+                    </a:p>
+                  </a:txBody>
+                  <a:tcPr>
+                    <a:solidFill>
+                      <a:srgbClr val="E8EDF3"/>
+                    </a:solidFill>
+                  </a:tcPr>
+                </a:tc>
+                <a:tc>
+                  <a:txBody>
+                    <a:bodyPr/>
+                    <a:lstStyle/>
+                    <a:p>
+                      <a:pPr algn="ctr"/>
+                      <a:r>
+                        <a:rPr sz="1200">
+                          <a:solidFill>
+                            <a:srgbClr val="1A202C"/>
+                          </a:solidFill>
+                          <a:latin typeface="Calibri"/>
+                        </a:rPr>
+                        <a:t>0.45</a:t>
+                      </a:r>
+                    </a:p>
+                  </a:txBody>
+                  <a:tcPr>
+                    <a:solidFill>
+                      <a:srgbClr val="E8EDF3"/>
+                    </a:solidFill>
+                  </a:tcPr>
+                </a:tc>
+                <a:tc>
+                  <a:txBody>
+                    <a:bodyPr/>
+                    <a:lstStyle/>
+                    <a:p>
+                      <a:pPr algn="ctr"/>
+                      <a:r>
+                        <a:rPr sz="1200">
+                          <a:solidFill>
+                            <a:srgbClr val="1A202C"/>
+                          </a:solidFill>
+                          <a:latin typeface="Calibri"/>
+                        </a:rPr>
+                        <a:t>0.58</a:t>
+                      </a:r>
+                    </a:p>
+                  </a:txBody>
+                  <a:tcPr>
+                    <a:solidFill>
+                      <a:srgbClr val="E8EDF3"/>
+                    </a:solidFill>
+                  </a:tcPr>
+                </a:tc>
+                <a:tc>
+                  <a:txBody>
+                    <a:bodyPr/>
+                    <a:lstStyle/>
+                    <a:p>
+                      <a:pPr algn="ctr"/>
+                      <a:r>
+                        <a:rPr sz="1200">
+                          <a:solidFill>
+                            <a:srgbClr val="1A202C"/>
+                          </a:solidFill>
+                          <a:latin typeface="Calibri"/>
+                        </a:rPr>
+                        <a:t>0.51</a:t>
+                      </a:r>
+                    </a:p>
+                  </a:txBody>
+                  <a:tcPr>
+                    <a:solidFill>
+                      <a:srgbClr val="E8EDF3"/>
+                    </a:solidFill>
+                  </a:tcPr>
+                </a:tc>
+                <a:tc>
+                  <a:txBody>
+                    <a:bodyPr/>
+                    <a:lstStyle/>
+                    <a:p>
+                      <a:pPr algn="ctr"/>
+                      <a:r>
+                        <a:rPr sz="1200">
+                          <a:solidFill>
+                            <a:srgbClr val="1A202C"/>
+                          </a:solidFill>
+                          <a:latin typeface="Calibri"/>
+                        </a:rPr>
+                        <a:t> 408</a:t>
+                      </a:r>
+                    </a:p>
+                  </a:txBody>
+                  <a:tcPr>
+                    <a:solidFill>
+                      <a:srgbClr val="E8EDF3"/>
+                    </a:solidFill>
+                  </a:tcPr>
+                </a:tc>
+              </a:tr>
+              <a:tr h="420624">
+                <a:tc>
+                  <a:txBody>
+                    <a:bodyPr/>
+                    <a:lstStyle/>
+                    <a:p>
+                      <a:pPr algn="ctr"/>
+                      <a:r>
+                        <a:rPr sz="1200">
+                          <a:solidFill>
+                            <a:srgbClr val="1A202C"/>
+                          </a:solidFill>
+                          <a:latin typeface="Calibri"/>
+                        </a:rPr>
+                        <a:t>Fusion (best α=0.45) - Negative</a:t>
+                      </a:r>
+                    </a:p>
+                  </a:txBody>
+                  <a:tcPr>
+                    <a:solidFill>
+                      <a:srgbClr val="F0F4F8"/>
+                    </a:solidFill>
+                  </a:tcPr>
+                </a:tc>
+                <a:tc>
+                  <a:txBody>
+                    <a:bodyPr/>
+                    <a:lstStyle/>
+                    <a:p>
+                      <a:pPr algn="ctr"/>
+                      <a:r>
+                        <a:rPr sz="1200">
+                          <a:solidFill>
+                            <a:srgbClr val="1A202C"/>
+                          </a:solidFill>
+                          <a:latin typeface="Calibri"/>
+                        </a:rPr>
+                        <a:t>0.84</a:t>
+                      </a:r>
+                    </a:p>
+                  </a:txBody>
+                  <a:tcPr>
+                    <a:solidFill>
+                      <a:srgbClr val="F0F4F8"/>
+                    </a:solidFill>
+                  </a:tcPr>
+                </a:tc>
+                <a:tc>
+                  <a:txBody>
+                    <a:bodyPr/>
+                    <a:lstStyle/>
+                    <a:p>
+                      <a:pPr algn="ctr"/>
+                      <a:r>
+                        <a:rPr sz="1200">
+                          <a:solidFill>
+                            <a:srgbClr val="1A202C"/>
+                          </a:solidFill>
+                          <a:latin typeface="Calibri"/>
+                        </a:rPr>
+                        <a:t>0.81</a:t>
+                      </a:r>
+                    </a:p>
+                  </a:txBody>
+                  <a:tcPr>
+                    <a:solidFill>
+                      <a:srgbClr val="F0F4F8"/>
+                    </a:solidFill>
+                  </a:tcPr>
+                </a:tc>
+                <a:tc>
+                  <a:txBody>
+                    <a:bodyPr/>
+                    <a:lstStyle/>
+                    <a:p>
+                      <a:pPr algn="ctr"/>
+                      <a:r>
+                        <a:rPr sz="1200">
+                          <a:solidFill>
+                            <a:srgbClr val="1A202C"/>
+                          </a:solidFill>
+                          <a:latin typeface="Calibri"/>
+                        </a:rPr>
+                        <a:t>0.82</a:t>
+                      </a:r>
+                    </a:p>
+                  </a:txBody>
+                  <a:tcPr>
+                    <a:solidFill>
+                      <a:srgbClr val="F0F4F8"/>
+                    </a:solidFill>
+                  </a:tcPr>
+                </a:tc>
+                <a:tc>
+                  <a:txBody>
+                    <a:bodyPr/>
+                    <a:lstStyle/>
+                    <a:p>
+                      <a:pPr algn="ctr"/>
+                      <a:r>
+                        <a:rPr sz="1200">
+                          <a:solidFill>
+                            <a:srgbClr val="1A202C"/>
+                          </a:solidFill>
+                          <a:latin typeface="Calibri"/>
+                        </a:rPr>
+                        <a:t>1149</a:t>
+                      </a:r>
+                    </a:p>
+                  </a:txBody>
+                  <a:tcPr>
+                    <a:solidFill>
+                      <a:srgbClr val="F0F4F8"/>
+                    </a:solidFill>
+                  </a:tcPr>
+                </a:tc>
+              </a:tr>
+              <a:tr h="420624">
+                <a:tc>
+                  <a:txBody>
+                    <a:bodyPr/>
+                    <a:lstStyle/>
+                    <a:p>
+                      <a:pPr algn="ctr"/>
+                      <a:r>
+                        <a:rPr sz="1200">
+                          <a:solidFill>
+                            <a:srgbClr val="1A202C"/>
+                          </a:solidFill>
+                          <a:latin typeface="Calibri"/>
+                        </a:rPr>
+                        <a:t>Fusion (best α=0.45) - Positive</a:t>
+                      </a:r>
+                    </a:p>
+                  </a:txBody>
+                  <a:tcPr>
+                    <a:solidFill>
+                      <a:srgbClr val="E8EDF3"/>
+                    </a:solidFill>
+                  </a:tcPr>
+                </a:tc>
+                <a:tc>
+                  <a:txBody>
+                    <a:bodyPr/>
+                    <a:lstStyle/>
+                    <a:p>
+                      <a:pPr algn="ctr"/>
+                      <a:r>
+                        <a:rPr sz="1200">
+                          <a:solidFill>
+                            <a:srgbClr val="1A202C"/>
+                          </a:solidFill>
+                          <a:latin typeface="Calibri"/>
+                        </a:rPr>
+                        <a:t>0.78</a:t>
+                      </a:r>
+                    </a:p>
+                  </a:txBody>
+                  <a:tcPr>
+                    <a:solidFill>
+                      <a:srgbClr val="E8EDF3"/>
+                    </a:solidFill>
+                  </a:tcPr>
+                </a:tc>
+                <a:tc>
+                  <a:txBody>
+                    <a:bodyPr/>
+                    <a:lstStyle/>
+                    <a:p>
+                      <a:pPr algn="ctr"/>
+                      <a:r>
+                        <a:rPr sz="1200">
+                          <a:solidFill>
+                            <a:srgbClr val="1A202C"/>
+                          </a:solidFill>
+                          <a:latin typeface="Calibri"/>
+                        </a:rPr>
+                        <a:t>0.74</a:t>
                       </a:r>
                     </a:p>
                   </a:txBody>
@@ -10364,53 +10878,7 @@
                           </a:solidFill>
                           <a:latin typeface="Calibri"/>
                         </a:rPr>
-                        <a:t>0.80</a:t>
-                      </a:r>
-                    </a:p>
-                  </a:txBody>
-                  <a:tcPr>
-                    <a:solidFill>
-                      <a:srgbClr val="E8EDF3"/>
-                    </a:solidFill>
-                  </a:tcPr>
-                </a:tc>
-                <a:tc>
-                  <a:txBody>
-                    <a:bodyPr/>
-                    <a:lstStyle/>
-                    <a:p>
-                      <a:pPr algn="ctr"/>
-                      <a:r>
-                        <a:rPr sz="1200">
-                          <a:solidFill>
-                            <a:srgbClr val="1A202C"/>
-                          </a:solidFill>
-                          <a:latin typeface="Calibri"/>
-                        </a:rPr>
-                        <a:t>0.78</a:t>
-                      </a:r>
-                    </a:p>
-                  </a:txBody>
-                  <a:tcPr>
-                    <a:solidFill>
-                      <a:srgbClr val="E8EDF3"/>
-                    </a:solidFill>
-                  </a:tcPr>
-                </a:tc>
-                <a:tc>
-                  <a:txBody>
-                    <a:bodyPr/>
-                    <a:lstStyle/>
-                    <a:p>
-                      <a:pPr algn="ctr"/>
-                      <a:r>
-                        <a:rPr sz="1200">
-                          <a:solidFill>
-                            <a:srgbClr val="1A202C"/>
-                          </a:solidFill>
-                          <a:latin typeface="Calibri"/>
-                        </a:rPr>
-                        <a:t>1193</a:t>
+                        <a:t> 613</a:t>
                       </a:r>
                     </a:p>
                   </a:txBody>
@@ -10435,7 +10903,7 @@
                           </a:solidFill>
                           <a:latin typeface="Calibri"/>
                         </a:rPr>
-                        <a:t>Wav2Vec2 — Positive</a:t>
+                        <a:t>Fusion (best α=0.45) - Neutral</a:t>
                       </a:r>
                     </a:p>
                   </a:txBody>
@@ -10458,7 +10926,7 @@
                           </a:solidFill>
                           <a:latin typeface="Calibri"/>
                         </a:rPr>
-                        <a:t>0.72</a:t>
+                        <a:t>0.51</a:t>
                       </a:r>
                     </a:p>
                   </a:txBody>
@@ -10481,475 +10949,7 @@
                           </a:solidFill>
                           <a:latin typeface="Calibri"/>
                         </a:rPr>
-                        <a:t>0.56</a:t>
-                      </a:r>
-                    </a:p>
-                  </a:txBody>
-                  <a:tcPr>
-                    <a:solidFill>
-                      <a:srgbClr val="F0F4F8"/>
-                    </a:solidFill>
-                  </a:tcPr>
-                </a:tc>
-                <a:tc>
-                  <a:txBody>
-                    <a:bodyPr/>
-                    <a:lstStyle/>
-                    <a:p>
-                      <a:pPr algn="ctr"/>
-                      <a:r>
-                        <a:rPr sz="1200">
-                          <a:solidFill>
-                            <a:srgbClr val="1A202C"/>
-                          </a:solidFill>
-                          <a:latin typeface="Calibri"/>
-                        </a:rPr>
-                        <a:t>0.63</a:t>
-                      </a:r>
-                    </a:p>
-                  </a:txBody>
-                  <a:tcPr>
-                    <a:solidFill>
-                      <a:srgbClr val="F0F4F8"/>
-                    </a:solidFill>
-                  </a:tcPr>
-                </a:tc>
-                <a:tc>
-                  <a:txBody>
-                    <a:bodyPr/>
-                    <a:lstStyle/>
-                    <a:p>
-                      <a:pPr algn="ctr"/>
-                      <a:r>
-                        <a:rPr sz="1200">
-                          <a:solidFill>
-                            <a:srgbClr val="1A202C"/>
-                          </a:solidFill>
-                          <a:latin typeface="Calibri"/>
-                        </a:rPr>
-                        <a:t> 585</a:t>
-                      </a:r>
-                    </a:p>
-                  </a:txBody>
-                  <a:tcPr>
-                    <a:solidFill>
-                      <a:srgbClr val="F0F4F8"/>
-                    </a:solidFill>
-                  </a:tcPr>
-                </a:tc>
-              </a:tr>
-              <a:tr h="420624">
-                <a:tc>
-                  <a:txBody>
-                    <a:bodyPr/>
-                    <a:lstStyle/>
-                    <a:p>
-                      <a:pPr algn="ctr"/>
-                      <a:r>
-                        <a:rPr sz="1200">
-                          <a:solidFill>
-                            <a:srgbClr val="1A202C"/>
-                          </a:solidFill>
-                          <a:latin typeface="Calibri"/>
-                        </a:rPr>
-                        <a:t>Wav2Vec2 — Neutral</a:t>
-                      </a:r>
-                    </a:p>
-                  </a:txBody>
-                  <a:tcPr>
-                    <a:solidFill>
-                      <a:srgbClr val="E8EDF3"/>
-                    </a:solidFill>
-                  </a:tcPr>
-                </a:tc>
-                <a:tc>
-                  <a:txBody>
-                    <a:bodyPr/>
-                    <a:lstStyle/>
-                    <a:p>
-                      <a:pPr algn="ctr"/>
-                      <a:r>
-                        <a:rPr sz="1200">
-                          <a:solidFill>
-                            <a:srgbClr val="1A202C"/>
-                          </a:solidFill>
-                          <a:latin typeface="Calibri"/>
-                        </a:rPr>
-                        <a:t>0.50</a:t>
-                      </a:r>
-                    </a:p>
-                  </a:txBody>
-                  <a:tcPr>
-                    <a:solidFill>
-                      <a:srgbClr val="E8EDF3"/>
-                    </a:solidFill>
-                  </a:tcPr>
-                </a:tc>
-                <a:tc>
-                  <a:txBody>
-                    <a:bodyPr/>
-                    <a:lstStyle/>
-                    <a:p>
-                      <a:pPr algn="ctr"/>
-                      <a:r>
-                        <a:rPr sz="1200">
-                          <a:solidFill>
-                            <a:srgbClr val="1A202C"/>
-                          </a:solidFill>
-                          <a:latin typeface="Calibri"/>
-                        </a:rPr>
-                        <a:t>0.53</a:t>
-                      </a:r>
-                    </a:p>
-                  </a:txBody>
-                  <a:tcPr>
-                    <a:solidFill>
-                      <a:srgbClr val="E8EDF3"/>
-                    </a:solidFill>
-                  </a:tcPr>
-                </a:tc>
-                <a:tc>
-                  <a:txBody>
-                    <a:bodyPr/>
-                    <a:lstStyle/>
-                    <a:p>
-                      <a:pPr algn="ctr"/>
-                      <a:r>
-                        <a:rPr sz="1200">
-                          <a:solidFill>
-                            <a:srgbClr val="1A202C"/>
-                          </a:solidFill>
-                          <a:latin typeface="Calibri"/>
-                        </a:rPr>
-                        <a:t>0.51</a:t>
-                      </a:r>
-                    </a:p>
-                  </a:txBody>
-                  <a:tcPr>
-                    <a:solidFill>
-                      <a:srgbClr val="E8EDF3"/>
-                    </a:solidFill>
-                  </a:tcPr>
-                </a:tc>
-                <a:tc>
-                  <a:txBody>
-                    <a:bodyPr/>
-                    <a:lstStyle/>
-                    <a:p>
-                      <a:pPr algn="ctr"/>
-                      <a:r>
-                        <a:rPr sz="1200">
-                          <a:solidFill>
-                            <a:srgbClr val="1A202C"/>
-                          </a:solidFill>
-                          <a:latin typeface="Calibri"/>
-                        </a:rPr>
-                        <a:t> 392</a:t>
-                      </a:r>
-                    </a:p>
-                  </a:txBody>
-                  <a:tcPr>
-                    <a:solidFill>
-                      <a:srgbClr val="E8EDF3"/>
-                    </a:solidFill>
-                  </a:tcPr>
-                </a:tc>
-              </a:tr>
-              <a:tr h="420624">
-                <a:tc>
-                  <a:txBody>
-                    <a:bodyPr/>
-                    <a:lstStyle/>
-                    <a:p>
-                      <a:pPr algn="ctr"/>
-                      <a:r>
-                        <a:rPr sz="1200">
-                          <a:solidFill>
-                            <a:srgbClr val="1A202C"/>
-                          </a:solidFill>
-                          <a:latin typeface="Calibri"/>
-                        </a:rPr>
-                        <a:t>Fusion — Negative</a:t>
-                      </a:r>
-                    </a:p>
-                  </a:txBody>
-                  <a:tcPr>
-                    <a:solidFill>
-                      <a:srgbClr val="F0F4F8"/>
-                    </a:solidFill>
-                  </a:tcPr>
-                </a:tc>
-                <a:tc>
-                  <a:txBody>
-                    <a:bodyPr/>
-                    <a:lstStyle/>
-                    <a:p>
-                      <a:pPr algn="ctr"/>
-                      <a:r>
-                        <a:rPr sz="1200">
-                          <a:solidFill>
-                            <a:srgbClr val="1A202C"/>
-                          </a:solidFill>
-                          <a:latin typeface="Calibri"/>
-                        </a:rPr>
-                        <a:t>0.83</a:t>
-                      </a:r>
-                    </a:p>
-                  </a:txBody>
-                  <a:tcPr>
-                    <a:solidFill>
-                      <a:srgbClr val="F0F4F8"/>
-                    </a:solidFill>
-                  </a:tcPr>
-                </a:tc>
-                <a:tc>
-                  <a:txBody>
-                    <a:bodyPr/>
-                    <a:lstStyle/>
-                    <a:p>
-                      <a:pPr algn="ctr"/>
-                      <a:r>
-                        <a:rPr sz="1200">
-                          <a:solidFill>
-                            <a:srgbClr val="1A202C"/>
-                          </a:solidFill>
-                          <a:latin typeface="Calibri"/>
-                        </a:rPr>
-                        <a:t>0.80</a:t>
-                      </a:r>
-                    </a:p>
-                  </a:txBody>
-                  <a:tcPr>
-                    <a:solidFill>
-                      <a:srgbClr val="F0F4F8"/>
-                    </a:solidFill>
-                  </a:tcPr>
-                </a:tc>
-                <a:tc>
-                  <a:txBody>
-                    <a:bodyPr/>
-                    <a:lstStyle/>
-                    <a:p>
-                      <a:pPr algn="ctr"/>
-                      <a:r>
-                        <a:rPr sz="1200">
-                          <a:solidFill>
-                            <a:srgbClr val="1A202C"/>
-                          </a:solidFill>
-                          <a:latin typeface="Calibri"/>
-                        </a:rPr>
-                        <a:t>0.81</a:t>
-                      </a:r>
-                    </a:p>
-                  </a:txBody>
-                  <a:tcPr>
-                    <a:solidFill>
-                      <a:srgbClr val="F0F4F8"/>
-                    </a:solidFill>
-                  </a:tcPr>
-                </a:tc>
-                <a:tc>
-                  <a:txBody>
-                    <a:bodyPr/>
-                    <a:lstStyle/>
-                    <a:p>
-                      <a:pPr algn="ctr"/>
-                      <a:r>
-                        <a:rPr sz="1200">
-                          <a:solidFill>
-                            <a:srgbClr val="1A202C"/>
-                          </a:solidFill>
-                          <a:latin typeface="Calibri"/>
-                        </a:rPr>
-                        <a:t>1193</a:t>
-                      </a:r>
-                    </a:p>
-                  </a:txBody>
-                  <a:tcPr>
-                    <a:solidFill>
-                      <a:srgbClr val="F0F4F8"/>
-                    </a:solidFill>
-                  </a:tcPr>
-                </a:tc>
-              </a:tr>
-              <a:tr h="420624">
-                <a:tc>
-                  <a:txBody>
-                    <a:bodyPr/>
-                    <a:lstStyle/>
-                    <a:p>
-                      <a:pPr algn="ctr"/>
-                      <a:r>
-                        <a:rPr sz="1200">
-                          <a:solidFill>
-                            <a:srgbClr val="1A202C"/>
-                          </a:solidFill>
-                          <a:latin typeface="Calibri"/>
-                        </a:rPr>
-                        <a:t>Fusion — Positive</a:t>
-                      </a:r>
-                    </a:p>
-                  </a:txBody>
-                  <a:tcPr>
-                    <a:solidFill>
-                      <a:srgbClr val="E8EDF3"/>
-                    </a:solidFill>
-                  </a:tcPr>
-                </a:tc>
-                <a:tc>
-                  <a:txBody>
-                    <a:bodyPr/>
-                    <a:lstStyle/>
-                    <a:p>
-                      <a:pPr algn="ctr"/>
-                      <a:r>
-                        <a:rPr sz="1200">
-                          <a:solidFill>
-                            <a:srgbClr val="1A202C"/>
-                          </a:solidFill>
-                          <a:latin typeface="Calibri"/>
-                        </a:rPr>
-                        <a:t>0.79</a:t>
-                      </a:r>
-                    </a:p>
-                  </a:txBody>
-                  <a:tcPr>
-                    <a:solidFill>
-                      <a:srgbClr val="E8EDF3"/>
-                    </a:solidFill>
-                  </a:tcPr>
-                </a:tc>
-                <a:tc>
-                  <a:txBody>
-                    <a:bodyPr/>
-                    <a:lstStyle/>
-                    <a:p>
-                      <a:pPr algn="ctr"/>
-                      <a:r>
-                        <a:rPr sz="1200">
-                          <a:solidFill>
-                            <a:srgbClr val="1A202C"/>
-                          </a:solidFill>
-                          <a:latin typeface="Calibri"/>
-                        </a:rPr>
-                        <a:t>0.71</a:t>
-                      </a:r>
-                    </a:p>
-                  </a:txBody>
-                  <a:tcPr>
-                    <a:solidFill>
-                      <a:srgbClr val="E8EDF3"/>
-                    </a:solidFill>
-                  </a:tcPr>
-                </a:tc>
-                <a:tc>
-                  <a:txBody>
-                    <a:bodyPr/>
-                    <a:lstStyle/>
-                    <a:p>
-                      <a:pPr algn="ctr"/>
-                      <a:r>
-                        <a:rPr sz="1200">
-                          <a:solidFill>
-                            <a:srgbClr val="1A202C"/>
-                          </a:solidFill>
-                          <a:latin typeface="Calibri"/>
-                        </a:rPr>
-                        <a:t>0.75</a:t>
-                      </a:r>
-                    </a:p>
-                  </a:txBody>
-                  <a:tcPr>
-                    <a:solidFill>
-                      <a:srgbClr val="E8EDF3"/>
-                    </a:solidFill>
-                  </a:tcPr>
-                </a:tc>
-                <a:tc>
-                  <a:txBody>
-                    <a:bodyPr/>
-                    <a:lstStyle/>
-                    <a:p>
-                      <a:pPr algn="ctr"/>
-                      <a:r>
-                        <a:rPr sz="1200">
-                          <a:solidFill>
-                            <a:srgbClr val="1A202C"/>
-                          </a:solidFill>
-                          <a:latin typeface="Calibri"/>
-                        </a:rPr>
-                        <a:t> 585</a:t>
-                      </a:r>
-                    </a:p>
-                  </a:txBody>
-                  <a:tcPr>
-                    <a:solidFill>
-                      <a:srgbClr val="E8EDF3"/>
-                    </a:solidFill>
-                  </a:tcPr>
-                </a:tc>
-              </a:tr>
-              <a:tr h="420624">
-                <a:tc>
-                  <a:txBody>
-                    <a:bodyPr/>
-                    <a:lstStyle/>
-                    <a:p>
-                      <a:pPr algn="ctr"/>
-                      <a:r>
-                        <a:rPr sz="1200">
-                          <a:solidFill>
-                            <a:srgbClr val="1A202C"/>
-                          </a:solidFill>
-                          <a:latin typeface="Calibri"/>
-                        </a:rPr>
-                        <a:t>Fusion — Neutral</a:t>
-                      </a:r>
-                    </a:p>
-                  </a:txBody>
-                  <a:tcPr>
-                    <a:solidFill>
-                      <a:srgbClr val="F0F4F8"/>
-                    </a:solidFill>
-                  </a:tcPr>
-                </a:tc>
-                <a:tc>
-                  <a:txBody>
-                    <a:bodyPr/>
-                    <a:lstStyle/>
-                    <a:p>
-                      <a:pPr algn="ctr"/>
-                      <a:r>
-                        <a:rPr sz="1200">
-                          <a:solidFill>
-                            <a:srgbClr val="1A202C"/>
-                          </a:solidFill>
-                          <a:latin typeface="Calibri"/>
-                        </a:rPr>
-                        <a:t>0.52</a:t>
-                      </a:r>
-                    </a:p>
-                  </a:txBody>
-                  <a:tcPr>
-                    <a:solidFill>
-                      <a:srgbClr val="F0F4F8"/>
-                    </a:solidFill>
-                  </a:tcPr>
-                </a:tc>
-                <a:tc>
-                  <a:txBody>
-                    <a:bodyPr/>
-                    <a:lstStyle/>
-                    <a:p>
-                      <a:pPr algn="ctr"/>
-                      <a:r>
-                        <a:rPr sz="1200">
-                          <a:solidFill>
-                            <a:srgbClr val="1A202C"/>
-                          </a:solidFill>
-                          <a:latin typeface="Calibri"/>
-                        </a:rPr>
-                        <a:t>0.58</a:t>
+                        <a:t>0.60</a:t>
                       </a:r>
                     </a:p>
                   </a:txBody>
@@ -10995,7 +10995,7 @@
                           </a:solidFill>
                           <a:latin typeface="Calibri"/>
                         </a:rPr>
-                        <a:t> 392</a:t>
+                        <a:t> 408</a:t>
                       </a:r>
                     </a:p>
                   </a:txBody>
@@ -11109,7 +11109,7 @@
                 </a:solidFill>
                 <a:latin typeface="Calibri"/>
               </a:rPr>
-              <a:t>Appendix A3 — Hyperparameter Summary  (show during Q&amp;A)</a:t>
+              <a:t>Appendix A3 - Hyperparameter Summary  (show during Q&amp;A)</a:t>
             </a:r>
           </a:p>
         </p:txBody>
@@ -11642,7 +11642,7 @@
                           </a:solidFill>
                           <a:latin typeface="Calibri"/>
                         </a:rPr>
-                        <a:t>7</a:t>
+                        <a:t>10</a:t>
                       </a:r>
                     </a:p>
                   </a:txBody>
@@ -11665,7 +11665,7 @@
                           </a:solidFill>
                           <a:latin typeface="Calibri"/>
                         </a:rPr>
-                        <a:t>10</a:t>
+                        <a:t>8</a:t>
                       </a:r>
                     </a:p>
                   </a:txBody>
@@ -13095,7 +13095,7 @@
                 </a:solidFill>
                 <a:latin typeface="Calibri"/>
               </a:rPr>
-              <a:t>Every sample has both modalities — ideal for comparing text-only, audio-only, and combined.</a:t>
+              <a:t>Every sample has both modalities - ideal for comparing text-only, audio-only, and combined.</a:t>
             </a:r>
           </a:p>
         </p:txBody>
@@ -13199,7 +13199,7 @@
                 </a:solidFill>
                 <a:latin typeface="Calibri"/>
               </a:rPr>
-              <a:t>We grouped 10 emotions into 3 classes — and found severe class imbalance</a:t>
+              <a:t>We grouped 10 emotions into 3 classes - and found severe class imbalance</a:t>
             </a:r>
           </a:p>
         </p:txBody>
@@ -13875,7 +13875,7 @@
                 </a:solidFill>
                 <a:latin typeface="Calibri"/>
               </a:rPr>
-              <a:t>Audio captures AROUSAL — angry &amp; excited speech has clearly higher pitch and energy</a:t>
+              <a:t>Audio captures AROUSAL - angry &amp; excited speech has clearly higher pitch and energy</a:t>
             </a:r>
           </a:p>
         </p:txBody>
@@ -13929,7 +13929,7 @@
                 </a:solidFill>
                 <a:latin typeface="Calibri"/>
               </a:rPr>
-              <a:t>Text captures VALENCE — distinguishing happy vs. angry requires understanding the words</a:t>
+              <a:t>Text captures VALENCE - distinguishing happy vs. angry requires understanding the words</a:t>
             </a:r>
           </a:p>
         </p:txBody>
@@ -14276,7 +14276,7 @@
                 </a:solidFill>
                 <a:latin typeface="Calibri"/>
               </a:rPr>
-              <a:t>No missing values — no cleaning needed</a:t>
+              <a:t>No missing values - no cleaning needed</a:t>
             </a:r>
           </a:p>
           <a:p>
@@ -14587,7 +14587,7 @@
                 </a:solidFill>
                 <a:latin typeface="Calibri"/>
               </a:rPr>
-              <a:t>TEST  — Session 5  ✦</a:t>
+              <a:t>TEST  - Session 5  ✦</a:t>
             </a:r>
           </a:p>
           <a:p>
@@ -14706,7 +14706,7 @@
                 </a:solidFill>
                 <a:latin typeface="Calibri"/>
               </a:rPr>
-              <a:t>✦  Speaker-independent evaluation — the hardest and most honest test of generalization.</a:t>
+              <a:t>✦  Speaker-independent evaluation - the hardest and most honest test of generalization.</a:t>
             </a:r>
           </a:p>
         </p:txBody>
@@ -14810,7 +14810,7 @@
                 </a:solidFill>
                 <a:latin typeface="Calibri"/>
               </a:rPr>
-              <a:t>Model 1: RoBERTa reads the words and achieves Macro F1 = 0.6519</a:t>
+              <a:t>Model 1: RoBERTa reads the words and achieves Macro F1 = 0.6475</a:t>
             </a:r>
           </a:p>
         </p:txBody>
@@ -15025,7 +15025,7 @@
                 </a:solidFill>
                 <a:latin typeface="Calibri"/>
               </a:rPr>
-              <a:t>Pre-training:  MLM on 160 GB text — already understands that 'infuriating' is negative</a:t>
+              <a:t>Pre-training:  MLM on 160 GB text - already understands that 'infuriating' is negative</a:t>
             </a:r>
           </a:p>
           <a:p>
@@ -15097,7 +15097,7 @@
                 </a:solidFill>
                 <a:latin typeface="Calibri"/>
               </a:rPr>
-              <a:t>Best checkpoint:  epoch 4 of 7  (early stopping on val Macro F1)</a:t>
+              <a:t>Best checkpoint:  epoch 7 of 10  (early stopping on val Macro F1)</a:t>
             </a:r>
           </a:p>
           <a:p>
@@ -15122,20 +15122,72 @@
                 <a:latin typeface="Calibri"/>
               </a:rPr>
               <a:t>Weakness:  Neutral has no distinctive words → text alone struggles</a:t>
+            </a:r>
+          </a:p>
+        </p:txBody>
+      </p:sp>
+      <p:sp>
+        <p:nvSpPr>
+          <p:cNvPr id="9" name="Rectangle 8"/>
+          <p:cNvSpPr/>
+          <p:nvPr/>
+        </p:nvSpPr>
+        <p:spPr>
+          <a:xfrm>
+            <a:off x="457200" y="5596128"/>
+            <a:ext cx="11274552" cy="621792"/>
+          </a:xfrm>
+          <a:prstGeom prst="rect">
+            <a:avLst/>
+          </a:prstGeom>
+          <a:solidFill>
+            <a:srgbClr val="1E3659"/>
+          </a:solidFill>
+          <a:ln>
+            <a:noFill/>
+          </a:ln>
+        </p:spPr>
+        <p:style>
+          <a:lnRef idx="1">
+            <a:schemeClr val="accent1"/>
+          </a:lnRef>
+          <a:fillRef idx="3">
+            <a:schemeClr val="accent1"/>
+          </a:fillRef>
+          <a:effectRef idx="2">
+            <a:schemeClr val="accent1"/>
+          </a:effectRef>
+          <a:fontRef idx="minor">
+            <a:schemeClr val="lt1"/>
+          </a:fontRef>
+        </p:style>
+        <p:txBody>
+          <a:bodyPr rtlCol="0" anchor="ctr" wrap="square" lIns="109728" rIns="109728" tIns="73152" bIns="73152"/>
+          <a:lstStyle/>
+          <a:p>
+            <a:pPr algn="ctr"/>
+            <a:r>
+              <a:rPr sz="1400" b="1">
+                <a:solidFill>
+                  <a:srgbClr val="FFFFFF"/>
+                </a:solidFill>
+                <a:latin typeface="Calibri"/>
+              </a:rPr>
+              <a:t>RoBERTa:  Accuracy = 0.6843  ·  Macro F1 = 0.6475  ·  Neutral F1 = 0.46 (weakest class)</a:t>
             </a:r>
           </a:p>
         </p:txBody>
       </p:sp>
       <p:pic>
         <p:nvPicPr>
-          <p:cNvPr id="8" name="Picture 7" descr="roberta_f1.png"/>
+          <p:cNvPr id="10" name="Picture 9" descr="slide7_new.png"/>
           <p:cNvPicPr>
             <a:picLocks noChangeAspect="1"/>
           </p:cNvPicPr>
           <p:nvPr/>
         </p:nvPicPr>
         <p:blipFill>
-          <a:blip r:embed="rId2"/>
+          <a:blip r:embed="rId4"/>
           <a:stretch>
             <a:fillRect/>
           </a:stretch>
@@ -15143,65 +15195,13 @@
         <p:spPr>
           <a:xfrm>
             <a:off x="7040880" y="1293876"/>
-            <a:ext cx="4955858" cy="3931920"/>
+            <a:ext cx="4955858" cy="4002808"/>
           </a:xfrm>
           <a:prstGeom prst="rect">
             <a:avLst/>
           </a:prstGeom>
         </p:spPr>
       </p:pic>
-      <p:sp>
-        <p:nvSpPr>
-          <p:cNvPr id="9" name="Rectangle 8"/>
-          <p:cNvSpPr/>
-          <p:nvPr/>
-        </p:nvSpPr>
-        <p:spPr>
-          <a:xfrm>
-            <a:off x="457200" y="5596128"/>
-            <a:ext cx="11274552" cy="621792"/>
-          </a:xfrm>
-          <a:prstGeom prst="rect">
-            <a:avLst/>
-          </a:prstGeom>
-          <a:solidFill>
-            <a:srgbClr val="1E3659"/>
-          </a:solidFill>
-          <a:ln>
-            <a:noFill/>
-          </a:ln>
-        </p:spPr>
-        <p:style>
-          <a:lnRef idx="1">
-            <a:schemeClr val="accent1"/>
-          </a:lnRef>
-          <a:fillRef idx="3">
-            <a:schemeClr val="accent1"/>
-          </a:fillRef>
-          <a:effectRef idx="2">
-            <a:schemeClr val="accent1"/>
-          </a:effectRef>
-          <a:fontRef idx="minor">
-            <a:schemeClr val="lt1"/>
-          </a:fontRef>
-        </p:style>
-        <p:txBody>
-          <a:bodyPr rtlCol="0" anchor="ctr" wrap="square" lIns="109728" rIns="109728" tIns="73152" bIns="73152"/>
-          <a:lstStyle/>
-          <a:p>
-            <a:pPr algn="ctr"/>
-            <a:r>
-              <a:rPr sz="1400" b="1">
-                <a:solidFill>
-                  <a:srgbClr val="FFFFFF"/>
-                </a:solidFill>
-                <a:latin typeface="Calibri"/>
-              </a:rPr>
-              <a:t>RoBERTa:  Accuracy = 0.6793  ·  Macro F1 = 0.6519  ·  Neutral F1 = 0.48 (weakest class)</a:t>
-            </a:r>
-          </a:p>
-        </p:txBody>
-      </p:sp>
     </p:spTree>
   </p:cSld>
   <p:clrMapOvr>
@@ -15301,7 +15301,7 @@
                 </a:solidFill>
                 <a:latin typeface="Calibri"/>
               </a:rPr>
-              <a:t>Model 2: Wav2Vec2 listens to the audio and achieves Macro F1 = 0.6403</a:t>
+              <a:t>Model 2: Wav2Vec2 listens to the audio and achieves Macro F1 = 0.6398</a:t>
             </a:r>
           </a:p>
         </p:txBody>
@@ -15588,21 +15588,73 @@
                 </a:solidFill>
                 <a:latin typeface="Calibri"/>
               </a:rPr>
-              <a:t>Key finding:  Negative F1 = 0.78 (&gt; RoBERTa's 0.76) — audio is stronger at detecting high-arousal angry/frustrated speech</a:t>
+              <a:t>Key finding:  Negative F1 = 0.78 (&gt; RoBERTa's 0.76) - audio is stronger at detecting high-arousal angry/frustrated speech</a:t>
+            </a:r>
+          </a:p>
+        </p:txBody>
+      </p:sp>
+      <p:sp>
+        <p:nvSpPr>
+          <p:cNvPr id="9" name="Rectangle 8"/>
+          <p:cNvSpPr/>
+          <p:nvPr/>
+        </p:nvSpPr>
+        <p:spPr>
+          <a:xfrm>
+            <a:off x="457200" y="5596128"/>
+            <a:ext cx="11274552" cy="621792"/>
+          </a:xfrm>
+          <a:prstGeom prst="rect">
+            <a:avLst/>
+          </a:prstGeom>
+          <a:solidFill>
+            <a:srgbClr val="1E3659"/>
+          </a:solidFill>
+          <a:ln>
+            <a:noFill/>
+          </a:ln>
+        </p:spPr>
+        <p:style>
+          <a:lnRef idx="1">
+            <a:schemeClr val="accent1"/>
+          </a:lnRef>
+          <a:fillRef idx="3">
+            <a:schemeClr val="accent1"/>
+          </a:fillRef>
+          <a:effectRef idx="2">
+            <a:schemeClr val="accent1"/>
+          </a:effectRef>
+          <a:fontRef idx="minor">
+            <a:schemeClr val="lt1"/>
+          </a:fontRef>
+        </p:style>
+        <p:txBody>
+          <a:bodyPr rtlCol="0" anchor="ctr" wrap="square" lIns="109728" rIns="109728" tIns="73152" bIns="73152"/>
+          <a:lstStyle/>
+          <a:p>
+            <a:pPr algn="ctr"/>
+            <a:r>
+              <a:rPr sz="1400" b="1">
+                <a:solidFill>
+                  <a:srgbClr val="FFFFFF"/>
+                </a:solidFill>
+                <a:latin typeface="Calibri"/>
+              </a:rPr>
+              <a:t>Wav2Vec2:  Accuracy = 0.6829  ·  Macro F1 = 0.6398  ·  Different per-class strengths than text</a:t>
             </a:r>
           </a:p>
         </p:txBody>
       </p:sp>
       <p:pic>
         <p:nvPicPr>
-          <p:cNvPr id="8" name="Picture 7" descr="wav2vec2_f1.png"/>
+          <p:cNvPr id="10" name="Picture 9" descr="slide8_new.png"/>
           <p:cNvPicPr>
             <a:picLocks noChangeAspect="1"/>
           </p:cNvPicPr>
           <p:nvPr/>
         </p:nvPicPr>
         <p:blipFill>
-          <a:blip r:embed="rId2"/>
+          <a:blip r:embed="rId4"/>
           <a:stretch>
             <a:fillRect/>
           </a:stretch>
@@ -15610,65 +15662,13 @@
         <p:spPr>
           <a:xfrm>
             <a:off x="7040880" y="1293876"/>
-            <a:ext cx="4955858" cy="3931920"/>
+            <a:ext cx="4955858" cy="4002808"/>
           </a:xfrm>
           <a:prstGeom prst="rect">
             <a:avLst/>
           </a:prstGeom>
         </p:spPr>
       </p:pic>
-      <p:sp>
-        <p:nvSpPr>
-          <p:cNvPr id="9" name="Rectangle 8"/>
-          <p:cNvSpPr/>
-          <p:nvPr/>
-        </p:nvSpPr>
-        <p:spPr>
-          <a:xfrm>
-            <a:off x="457200" y="5596128"/>
-            <a:ext cx="11274552" cy="621792"/>
-          </a:xfrm>
-          <a:prstGeom prst="rect">
-            <a:avLst/>
-          </a:prstGeom>
-          <a:solidFill>
-            <a:srgbClr val="1E3659"/>
-          </a:solidFill>
-          <a:ln>
-            <a:noFill/>
-          </a:ln>
-        </p:spPr>
-        <p:style>
-          <a:lnRef idx="1">
-            <a:schemeClr val="accent1"/>
-          </a:lnRef>
-          <a:fillRef idx="3">
-            <a:schemeClr val="accent1"/>
-          </a:fillRef>
-          <a:effectRef idx="2">
-            <a:schemeClr val="accent1"/>
-          </a:effectRef>
-          <a:fontRef idx="minor">
-            <a:schemeClr val="lt1"/>
-          </a:fontRef>
-        </p:style>
-        <p:txBody>
-          <a:bodyPr rtlCol="0" anchor="ctr" wrap="square" lIns="109728" rIns="109728" tIns="73152" bIns="73152"/>
-          <a:lstStyle/>
-          <a:p>
-            <a:pPr algn="ctr"/>
-            <a:r>
-              <a:rPr sz="1400" b="1">
-                <a:solidFill>
-                  <a:srgbClr val="FFFFFF"/>
-                </a:solidFill>
-                <a:latin typeface="Calibri"/>
-              </a:rPr>
-              <a:t>Wav2Vec2:  Accuracy = 0.6880  ·  Macro F1 = 0.6403  ·  Different per-class strengths than text</a:t>
-            </a:r>
-          </a:p>
-        </p:txBody>
-      </p:sp>
     </p:spTree>
   </p:cSld>
   <p:clrMapOvr>
@@ -15768,7 +15768,7 @@
                 </a:solidFill>
                 <a:latin typeface="Calibri"/>
               </a:rPr>
-              <a:t>The two models make different mistakes — that is why combining them helps</a:t>
+              <a:t>The two models make different mistakes - that is why combining them helps</a:t>
             </a:r>
           </a:p>
         </p:txBody>
@@ -15947,7 +15947,7 @@
                 </a:solidFill>
                 <a:latin typeface="Calibri"/>
               </a:rPr>
-              <a:t>"I hate everything about this" — said flatly.</a:t>
+              <a:t>"I hate everything about this" - said flatly.</a:t>
             </a:r>
           </a:p>
           <a:p>
@@ -16025,7 +16025,7 @@
                 </a:solidFill>
                 <a:latin typeface="Calibri"/>
               </a:rPr>
-              <a:t>"Fine, whatever." — said with sharp rising anger.</a:t>
+              <a:t>"Fine, whatever." - said with sharp rising anger.</a:t>
             </a:r>
           </a:p>
           <a:p>
@@ -16091,7 +16091,7 @@
                 </a:solidFill>
                 <a:latin typeface="Calibri"/>
               </a:rPr>
-              <a:t>Both ✓ — high confidence</a:t>
+              <a:t>Both ✓ - high confidence</a:t>
             </a:r>
           </a:p>
           <a:p>
@@ -16169,7 +16169,7 @@
                 </a:solidFill>
                 <a:latin typeface="Calibri"/>
               </a:rPr>
-              <a:t>Both ✗ — genuinely ambiguous</a:t>
+              <a:t>Both ✗ - genuinely ambiguous</a:t>
             </a:r>
           </a:p>
           <a:p>
@@ -16193,7 +16193,7 @@
                 </a:solidFill>
                 <a:latin typeface="Calibri"/>
               </a:rPr>
-              <a:t>Not fixable by fusion — an honest failure case.</a:t>
+              <a:t>Not fixable by fusion - an honest failure case.</a:t>
             </a:r>
           </a:p>
         </p:txBody>
@@ -16245,7 +16245,7 @@
                 </a:solidFill>
                 <a:latin typeface="Calibri"/>
               </a:rPr>
-              <a:t>Non-overlapping errors are the condition for fusion to help — and the data shows they are.</a:t>
+              <a:t>Non-overlapping errors are the condition for fusion to help - and the data shows they are.</a:t>
             </a:r>
           </a:p>
         </p:txBody>

--- a/docs/Final_Presentation.pptx
+++ b/docs/Final_Presentation.pptx
@@ -4,26 +4,29 @@
   <p:sldMasterIdLst>
     <p:sldMasterId id="2147483648" r:id="rId1"/>
   </p:sldMasterIdLst>
+  <p:notesMasterIdLst>
+    <p:notesMasterId r:id="rId19"/>
+  </p:notesMasterIdLst>
   <p:sldIdLst>
-    <p:sldId id="256" r:id="rId7"/>
-    <p:sldId id="257" r:id="rId9"/>
-    <p:sldId id="258" r:id="rId10"/>
-    <p:sldId id="259" r:id="rId11"/>
-    <p:sldId id="260" r:id="rId12"/>
-    <p:sldId id="261" r:id="rId13"/>
-    <p:sldId id="262" r:id="rId14"/>
-    <p:sldId id="263" r:id="rId15"/>
-    <p:sldId id="264" r:id="rId16"/>
-    <p:sldId id="265" r:id="rId17"/>
-    <p:sldId id="266" r:id="rId18"/>
-    <p:sldId id="267" r:id="rId19"/>
-    <p:sldId id="268" r:id="rId20"/>
-    <p:sldId id="269" r:id="rId21"/>
-    <p:sldId id="270" r:id="rId22"/>
-    <p:sldId id="271" r:id="rId23"/>
-    <p:sldId id="272" r:id="rId24"/>
+    <p:sldId id="256" r:id="rId2"/>
+    <p:sldId id="257" r:id="rId3"/>
+    <p:sldId id="258" r:id="rId4"/>
+    <p:sldId id="259" r:id="rId5"/>
+    <p:sldId id="260" r:id="rId6"/>
+    <p:sldId id="261" r:id="rId7"/>
+    <p:sldId id="262" r:id="rId8"/>
+    <p:sldId id="263" r:id="rId9"/>
+    <p:sldId id="264" r:id="rId10"/>
+    <p:sldId id="265" r:id="rId11"/>
+    <p:sldId id="266" r:id="rId12"/>
+    <p:sldId id="267" r:id="rId13"/>
+    <p:sldId id="268" r:id="rId14"/>
+    <p:sldId id="269" r:id="rId15"/>
+    <p:sldId id="270" r:id="rId16"/>
+    <p:sldId id="271" r:id="rId17"/>
+    <p:sldId id="272" r:id="rId18"/>
   </p:sldIdLst>
-  <p:sldSz cx="12188952" cy="6858000" type="screen4x3"/>
+  <p:sldSz cx="12188825" cy="6858000"/>
   <p:notesSz cx="6858000" cy="9144000"/>
   <p:defaultTextStyle>
     <a:defPPr>
@@ -120,11 +123,27 @@
       </a:defRPr>
     </a:lvl9pPr>
   </p:defaultTextStyle>
+  <p:extLst>
+    <p:ext uri="{EFAFB233-063F-42B5-8137-9DF3F51BA10A}">
+      <p15:sldGuideLst xmlns:p15="http://schemas.microsoft.com/office/powerpoint/2012/main">
+        <p15:guide id="1" orient="horz" pos="2160">
+          <p15:clr>
+            <a:srgbClr val="A4A3A4"/>
+          </p15:clr>
+        </p15:guide>
+        <p15:guide id="2" pos="2880">
+          <p15:clr>
+            <a:srgbClr val="A4A3A4"/>
+          </p15:clr>
+        </p15:guide>
+      </p15:sldGuideLst>
+    </p:ext>
+  </p:extLst>
 </p:presentation>
 </file>
 
 <file path=ppt/notesMasters/notesMaster1.xml><?xml version="1.0" encoding="utf-8"?>
-<p:notesMaster xmlns:a="http://schemas.openxmlformats.org/drawingml/2006/main" xmlns:p="http://schemas.openxmlformats.org/presentationml/2006/main" xmlns:r="http://schemas.openxmlformats.org/officeDocument/2006/relationships">
+<p:notesMaster xmlns:a="http://schemas.openxmlformats.org/drawingml/2006/main" xmlns:r="http://schemas.openxmlformats.org/officeDocument/2006/relationships" xmlns:p="http://schemas.openxmlformats.org/presentationml/2006/main">
   <p:cSld>
     <p:bg>
       <p:bgRef idx="1001">
@@ -145,241 +164,16 @@
           <a:chExt cx="0" cy="0"/>
         </a:xfrm>
       </p:grpSpPr>
-      <p:sp>
-        <p:nvSpPr>
-          <p:cNvPr id="2" name="Header Placeholder 1"/>
-          <p:cNvSpPr>
-            <a:spLocks noGrp="1"/>
-          </p:cNvSpPr>
-          <p:nvPr>
-            <p:ph type="hdr" sz="quarter"/>
-          </p:nvPr>
-        </p:nvSpPr>
-        <p:spPr>
-          <a:xfrm>
-            <a:off x="0" y="0"/>
-            <a:ext cx="2971800" cy="457200"/>
-          </a:xfrm>
-          <a:prstGeom prst="rect">
-            <a:avLst/>
-          </a:prstGeom>
-        </p:spPr>
-        <p:txBody>
-          <a:bodyPr vert="horz" lIns="91440" tIns="45720" rIns="91440" bIns="45720" rtlCol="0"/>
-          <a:lstStyle>
-            <a:lvl1pPr algn="l">
-              <a:defRPr sz="1200"/>
-            </a:lvl1pPr>
-          </a:lstStyle>
-          <a:p>
-            <a:endParaRPr lang="en-US"/>
-          </a:p>
-        </p:txBody>
-      </p:sp>
-      <p:sp>
-        <p:nvSpPr>
-          <p:cNvPr id="3" name="Date Placeholder 2"/>
-          <p:cNvSpPr>
-            <a:spLocks noGrp="1"/>
-          </p:cNvSpPr>
-          <p:nvPr>
-            <p:ph type="dt" idx="1"/>
-          </p:nvPr>
-        </p:nvSpPr>
-        <p:spPr>
-          <a:xfrm>
-            <a:off x="3884613" y="0"/>
-            <a:ext cx="2971800" cy="457200"/>
-          </a:xfrm>
-          <a:prstGeom prst="rect">
-            <a:avLst/>
-          </a:prstGeom>
-        </p:spPr>
-        <p:txBody>
-          <a:bodyPr vert="horz" lIns="91440" tIns="45720" rIns="91440" bIns="45720" rtlCol="0"/>
-          <a:lstStyle>
-            <a:lvl1pPr algn="r">
-              <a:defRPr sz="1200"/>
-            </a:lvl1pPr>
-          </a:lstStyle>
-          <a:p>
-            <a:fld id="{0F89C1C7-3DCD-1040-A9CF-14679D8B5DDD}" type="datetimeFigureOut">
-              <a:rPr lang="en-US" smtClean="0"/>
-              <a:t>10/17/16</a:t>
-            </a:fld>
-            <a:endParaRPr lang="en-US"/>
-          </a:p>
-        </p:txBody>
-      </p:sp>
-      <p:sp>
-        <p:nvSpPr>
-          <p:cNvPr id="4" name="Slide Image Placeholder 3"/>
-          <p:cNvSpPr>
-            <a:spLocks noGrp="1" noRot="1" noChangeAspect="1"/>
-          </p:cNvSpPr>
-          <p:nvPr>
-            <p:ph type="sldImg" idx="2"/>
-          </p:nvPr>
-        </p:nvSpPr>
-        <p:spPr>
-          <a:xfrm>
-            <a:off x="1143000" y="685800"/>
-            <a:ext cx="4572000" cy="3429000"/>
-          </a:xfrm>
-          <a:prstGeom prst="rect">
-            <a:avLst/>
-          </a:prstGeom>
-          <a:noFill/>
-          <a:ln w="12700">
-            <a:solidFill>
-              <a:prstClr val="black"/>
-            </a:solidFill>
-          </a:ln>
-        </p:spPr>
-        <p:txBody>
-          <a:bodyPr vert="horz" lIns="91440" tIns="45720" rIns="91440" bIns="45720" rtlCol="0" anchor="ctr"/>
-          <a:lstStyle/>
-          <a:p>
-            <a:endParaRPr lang="en-US"/>
-          </a:p>
-        </p:txBody>
-      </p:sp>
-      <p:sp>
-        <p:nvSpPr>
-          <p:cNvPr id="5" name="Notes Placeholder 4"/>
-          <p:cNvSpPr>
-            <a:spLocks noGrp="1"/>
-          </p:cNvSpPr>
-          <p:nvPr>
-            <p:ph type="body" sz="quarter" idx="3"/>
-          </p:nvPr>
-        </p:nvSpPr>
-        <p:spPr>
-          <a:xfrm>
-            <a:off x="685800" y="4343400"/>
-            <a:ext cx="5486400" cy="4114800"/>
-          </a:xfrm>
-          <a:prstGeom prst="rect">
-            <a:avLst/>
-          </a:prstGeom>
-        </p:spPr>
-        <p:txBody>
-          <a:bodyPr vert="horz" lIns="91440" tIns="45720" rIns="91440" bIns="45720" rtlCol="0"/>
-          <a:lstStyle/>
-          <a:p>
-            <a:pPr lvl="0"/>
-            <a:r>
-              <a:rPr lang="en-US" smtClean="0"/>
-              <a:t>Click to edit Master text styles</a:t>
-            </a:r>
-          </a:p>
-          <a:p>
-            <a:pPr lvl="1"/>
-            <a:r>
-              <a:rPr lang="en-US" smtClean="0"/>
-              <a:t>Second level</a:t>
-            </a:r>
-          </a:p>
-          <a:p>
-            <a:pPr lvl="2"/>
-            <a:r>
-              <a:rPr lang="en-US" smtClean="0"/>
-              <a:t>Third level</a:t>
-            </a:r>
-          </a:p>
-          <a:p>
-            <a:pPr lvl="3"/>
-            <a:r>
-              <a:rPr lang="en-US" smtClean="0"/>
-              <a:t>Fourth level</a:t>
-            </a:r>
-          </a:p>
-          <a:p>
-            <a:pPr lvl="4"/>
-            <a:r>
-              <a:rPr lang="en-US" smtClean="0"/>
-              <a:t>Fifth level</a:t>
-            </a:r>
-            <a:endParaRPr lang="en-US"/>
-          </a:p>
-        </p:txBody>
-      </p:sp>
-      <p:sp>
-        <p:nvSpPr>
-          <p:cNvPr id="6" name="Footer Placeholder 5"/>
-          <p:cNvSpPr>
-            <a:spLocks noGrp="1"/>
-          </p:cNvSpPr>
-          <p:nvPr>
-            <p:ph type="ftr" sz="quarter" idx="4"/>
-          </p:nvPr>
-        </p:nvSpPr>
-        <p:spPr>
-          <a:xfrm>
-            <a:off x="0" y="8685213"/>
-            <a:ext cx="2971800" cy="457200"/>
-          </a:xfrm>
-          <a:prstGeom prst="rect">
-            <a:avLst/>
-          </a:prstGeom>
-        </p:spPr>
-        <p:txBody>
-          <a:bodyPr vert="horz" lIns="91440" tIns="45720" rIns="91440" bIns="45720" rtlCol="0" anchor="b"/>
-          <a:lstStyle>
-            <a:lvl1pPr algn="l">
-              <a:defRPr sz="1200"/>
-            </a:lvl1pPr>
-          </a:lstStyle>
-          <a:p>
-            <a:endParaRPr lang="en-US"/>
-          </a:p>
-        </p:txBody>
-      </p:sp>
-      <p:sp>
-        <p:nvSpPr>
-          <p:cNvPr id="7" name="Slide Number Placeholder 6"/>
-          <p:cNvSpPr>
-            <a:spLocks noGrp="1"/>
-          </p:cNvSpPr>
-          <p:nvPr>
-            <p:ph type="sldNum" sz="quarter" idx="5"/>
-          </p:nvPr>
-        </p:nvSpPr>
-        <p:spPr>
-          <a:xfrm>
-            <a:off x="3884613" y="8685213"/>
-            <a:ext cx="2971800" cy="457200"/>
-          </a:xfrm>
-          <a:prstGeom prst="rect">
-            <a:avLst/>
-          </a:prstGeom>
-        </p:spPr>
-        <p:txBody>
-          <a:bodyPr vert="horz" lIns="91440" tIns="45720" rIns="91440" bIns="45720" rtlCol="0" anchor="b"/>
-          <a:lstStyle>
-            <a:lvl1pPr algn="r">
-              <a:defRPr sz="1200"/>
-            </a:lvl1pPr>
-          </a:lstStyle>
-          <a:p>
-            <a:fld id="{BB5E49A5-4136-284D-997B-48E1D791AD67}" type="slidenum">
-              <a:rPr lang="en-US" smtClean="0"/>
-              <a:t>‹#›</a:t>
-            </a:fld>
-            <a:endParaRPr lang="en-US"/>
-          </a:p>
-        </p:txBody>
-      </p:sp>
     </p:spTree>
     <p:extLst>
       <p:ext uri="{BB962C8B-B14F-4D97-AF65-F5344CB8AC3E}">
-        <p14:creationId xmlns:p14="http://schemas.microsoft.com/office/powerpoint/2010/main" val="2623252185"/>
+        <p14:creationId xmlns:p14="http://schemas.microsoft.com/office/powerpoint/2010/main" val="1185054653"/>
       </p:ext>
     </p:extLst>
   </p:cSld>
   <p:clrMap bg1="lt1" tx1="dk1" bg2="lt2" tx2="dk2" accent1="accent1" accent2="accent2" accent3="accent3" accent4="accent4" accent5="accent5" accent6="accent6" hlink="hlink" folHlink="folHlink"/>
   <p:notesStyle>
-    <a:lvl1pPr marL="0" algn="l" defTabSz="457200" rtl="0" eaLnBrk="1" latinLnBrk="0" hangingPunct="1">
+    <a:lvl1pPr marL="0" algn="r" defTabSz="914400" rtl="1" eaLnBrk="1" latinLnBrk="0" hangingPunct="1">
       <a:defRPr sz="1200" kern="1200">
         <a:solidFill>
           <a:schemeClr val="tx1"/>
@@ -389,7 +183,7 @@
         <a:cs typeface="+mn-cs"/>
       </a:defRPr>
     </a:lvl1pPr>
-    <a:lvl2pPr marL="457200" algn="l" defTabSz="457200" rtl="0" eaLnBrk="1" latinLnBrk="0" hangingPunct="1">
+    <a:lvl2pPr marL="457200" algn="r" defTabSz="914400" rtl="1" eaLnBrk="1" latinLnBrk="0" hangingPunct="1">
       <a:defRPr sz="1200" kern="1200">
         <a:solidFill>
           <a:schemeClr val="tx1"/>
@@ -399,7 +193,7 @@
         <a:cs typeface="+mn-cs"/>
       </a:defRPr>
     </a:lvl2pPr>
-    <a:lvl3pPr marL="914400" algn="l" defTabSz="457200" rtl="0" eaLnBrk="1" latinLnBrk="0" hangingPunct="1">
+    <a:lvl3pPr marL="914400" algn="r" defTabSz="914400" rtl="1" eaLnBrk="1" latinLnBrk="0" hangingPunct="1">
       <a:defRPr sz="1200" kern="1200">
         <a:solidFill>
           <a:schemeClr val="tx1"/>
@@ -409,7 +203,7 @@
         <a:cs typeface="+mn-cs"/>
       </a:defRPr>
     </a:lvl3pPr>
-    <a:lvl4pPr marL="1371600" algn="l" defTabSz="457200" rtl="0" eaLnBrk="1" latinLnBrk="0" hangingPunct="1">
+    <a:lvl4pPr marL="1371600" algn="r" defTabSz="914400" rtl="1" eaLnBrk="1" latinLnBrk="0" hangingPunct="1">
       <a:defRPr sz="1200" kern="1200">
         <a:solidFill>
           <a:schemeClr val="tx1"/>
@@ -419,7 +213,7 @@
         <a:cs typeface="+mn-cs"/>
       </a:defRPr>
     </a:lvl4pPr>
-    <a:lvl5pPr marL="1828800" algn="l" defTabSz="457200" rtl="0" eaLnBrk="1" latinLnBrk="0" hangingPunct="1">
+    <a:lvl5pPr marL="1828800" algn="r" defTabSz="914400" rtl="1" eaLnBrk="1" latinLnBrk="0" hangingPunct="1">
       <a:defRPr sz="1200" kern="1200">
         <a:solidFill>
           <a:schemeClr val="tx1"/>
@@ -429,7 +223,7 @@
         <a:cs typeface="+mn-cs"/>
       </a:defRPr>
     </a:lvl5pPr>
-    <a:lvl6pPr marL="2286000" algn="l" defTabSz="457200" rtl="0" eaLnBrk="1" latinLnBrk="0" hangingPunct="1">
+    <a:lvl6pPr marL="2286000" algn="r" defTabSz="914400" rtl="1" eaLnBrk="1" latinLnBrk="0" hangingPunct="1">
       <a:defRPr sz="1200" kern="1200">
         <a:solidFill>
           <a:schemeClr val="tx1"/>
@@ -439,7 +233,7 @@
         <a:cs typeface="+mn-cs"/>
       </a:defRPr>
     </a:lvl6pPr>
-    <a:lvl7pPr marL="2743200" algn="l" defTabSz="457200" rtl="0" eaLnBrk="1" latinLnBrk="0" hangingPunct="1">
+    <a:lvl7pPr marL="2743200" algn="r" defTabSz="914400" rtl="1" eaLnBrk="1" latinLnBrk="0" hangingPunct="1">
       <a:defRPr sz="1200" kern="1200">
         <a:solidFill>
           <a:schemeClr val="tx1"/>
@@ -449,7 +243,7 @@
         <a:cs typeface="+mn-cs"/>
       </a:defRPr>
     </a:lvl7pPr>
-    <a:lvl8pPr marL="3200400" algn="l" defTabSz="457200" rtl="0" eaLnBrk="1" latinLnBrk="0" hangingPunct="1">
+    <a:lvl8pPr marL="3200400" algn="r" defTabSz="914400" rtl="1" eaLnBrk="1" latinLnBrk="0" hangingPunct="1">
       <a:defRPr sz="1200" kern="1200">
         <a:solidFill>
           <a:schemeClr val="tx1"/>
@@ -459,7 +253,7 @@
         <a:cs typeface="+mn-cs"/>
       </a:defRPr>
     </a:lvl8pPr>
-    <a:lvl9pPr marL="3657600" algn="l" defTabSz="457200" rtl="0" eaLnBrk="1" latinLnBrk="0" hangingPunct="1">
+    <a:lvl9pPr marL="3657600" algn="r" defTabSz="914400" rtl="1" eaLnBrk="1" latinLnBrk="0" hangingPunct="1">
       <a:defRPr sz="1200" kern="1200">
         <a:solidFill>
           <a:schemeClr val="tx1"/>
@@ -474,7 +268,7 @@
 </file>
 
 <file path=ppt/notesSlides/notesSlide1.xml><?xml version="1.0" encoding="utf-8"?>
-<p:notes xmlns:a="http://schemas.openxmlformats.org/drawingml/2006/main" xmlns:p="http://schemas.openxmlformats.org/presentationml/2006/main" xmlns:r="http://schemas.openxmlformats.org/officeDocument/2006/relationships">
+<p:notes xmlns:a="http://schemas.openxmlformats.org/drawingml/2006/main" xmlns:r="http://schemas.openxmlformats.org/officeDocument/2006/relationships" xmlns:p="http://schemas.openxmlformats.org/presentationml/2006/main">
   <p:cSld>
     <p:spTree>
       <p:nvGrpSpPr>
@@ -494,7 +288,7 @@
         <p:nvSpPr>
           <p:cNvPr id="2" name="Slide Image Placeholder 1"/>
           <p:cNvSpPr>
-            <a:spLocks noGrp="1"/>
+            <a:spLocks noGrp="1" noRot="1" noChangeAspect="1"/>
           </p:cNvSpPr>
           <p:nvPr>
             <p:ph type="sldImg" idx="2"/>
@@ -509,7 +303,7 @@
             <a:spLocks noGrp="1"/>
           </p:cNvSpPr>
           <p:nvPr>
-            <p:ph type="body" idx="3" sz="quarter"/>
+            <p:ph type="body" sz="quarter" idx="3"/>
           </p:nvPr>
         </p:nvSpPr>
         <p:spPr/>
@@ -530,7 +324,7 @@
             <a:spLocks noGrp="1"/>
           </p:cNvSpPr>
           <p:nvPr>
-            <p:ph type="sldNum" idx="5" sz="quarter"/>
+            <p:ph type="sldNum" sz="quarter" idx="5"/>
           </p:nvPr>
         </p:nvSpPr>
         <p:spPr/>
@@ -544,7 +338,7 @@
 </file>
 
 <file path=ppt/notesSlides/notesSlide10.xml><?xml version="1.0" encoding="utf-8"?>
-<p:notes xmlns:a="http://schemas.openxmlformats.org/drawingml/2006/main" xmlns:p="http://schemas.openxmlformats.org/presentationml/2006/main" xmlns:r="http://schemas.openxmlformats.org/officeDocument/2006/relationships">
+<p:notes xmlns:a="http://schemas.openxmlformats.org/drawingml/2006/main" xmlns:r="http://schemas.openxmlformats.org/officeDocument/2006/relationships" xmlns:p="http://schemas.openxmlformats.org/presentationml/2006/main">
   <p:cSld>
     <p:spTree>
       <p:nvGrpSpPr>
@@ -564,7 +358,7 @@
         <p:nvSpPr>
           <p:cNvPr id="2" name="Slide Image Placeholder 1"/>
           <p:cNvSpPr>
-            <a:spLocks noGrp="1"/>
+            <a:spLocks noGrp="1" noRot="1" noChangeAspect="1"/>
           </p:cNvSpPr>
           <p:nvPr>
             <p:ph type="sldImg" idx="2"/>
@@ -579,7 +373,7 @@
             <a:spLocks noGrp="1"/>
           </p:cNvSpPr>
           <p:nvPr>
-            <p:ph type="body" idx="3" sz="quarter"/>
+            <p:ph type="body" sz="quarter" idx="3"/>
           </p:nvPr>
         </p:nvSpPr>
         <p:spPr/>
@@ -600,7 +394,7 @@
             <a:spLocks noGrp="1"/>
           </p:cNvSpPr>
           <p:nvPr>
-            <p:ph type="sldNum" idx="5" sz="quarter"/>
+            <p:ph type="sldNum" sz="quarter" idx="5"/>
           </p:nvPr>
         </p:nvSpPr>
         <p:spPr/>
@@ -614,7 +408,7 @@
 </file>
 
 <file path=ppt/notesSlides/notesSlide11.xml><?xml version="1.0" encoding="utf-8"?>
-<p:notes xmlns:a="http://schemas.openxmlformats.org/drawingml/2006/main" xmlns:p="http://schemas.openxmlformats.org/presentationml/2006/main" xmlns:r="http://schemas.openxmlformats.org/officeDocument/2006/relationships">
+<p:notes xmlns:a="http://schemas.openxmlformats.org/drawingml/2006/main" xmlns:r="http://schemas.openxmlformats.org/officeDocument/2006/relationships" xmlns:p="http://schemas.openxmlformats.org/presentationml/2006/main">
   <p:cSld>
     <p:spTree>
       <p:nvGrpSpPr>
@@ -634,7 +428,7 @@
         <p:nvSpPr>
           <p:cNvPr id="2" name="Slide Image Placeholder 1"/>
           <p:cNvSpPr>
-            <a:spLocks noGrp="1"/>
+            <a:spLocks noGrp="1" noRot="1" noChangeAspect="1"/>
           </p:cNvSpPr>
           <p:nvPr>
             <p:ph type="sldImg" idx="2"/>
@@ -649,7 +443,7 @@
             <a:spLocks noGrp="1"/>
           </p:cNvSpPr>
           <p:nvPr>
-            <p:ph type="body" idx="3" sz="quarter"/>
+            <p:ph type="body" sz="quarter" idx="3"/>
           </p:nvPr>
         </p:nvSpPr>
         <p:spPr/>
@@ -670,7 +464,7 @@
             <a:spLocks noGrp="1"/>
           </p:cNvSpPr>
           <p:nvPr>
-            <p:ph type="sldNum" idx="5" sz="quarter"/>
+            <p:ph type="sldNum" sz="quarter" idx="5"/>
           </p:nvPr>
         </p:nvSpPr>
         <p:spPr/>
@@ -684,7 +478,7 @@
 </file>
 
 <file path=ppt/notesSlides/notesSlide12.xml><?xml version="1.0" encoding="utf-8"?>
-<p:notes xmlns:a="http://schemas.openxmlformats.org/drawingml/2006/main" xmlns:p="http://schemas.openxmlformats.org/presentationml/2006/main" xmlns:r="http://schemas.openxmlformats.org/officeDocument/2006/relationships">
+<p:notes xmlns:a="http://schemas.openxmlformats.org/drawingml/2006/main" xmlns:r="http://schemas.openxmlformats.org/officeDocument/2006/relationships" xmlns:p="http://schemas.openxmlformats.org/presentationml/2006/main">
   <p:cSld>
     <p:spTree>
       <p:nvGrpSpPr>
@@ -704,7 +498,7 @@
         <p:nvSpPr>
           <p:cNvPr id="2" name="Slide Image Placeholder 1"/>
           <p:cNvSpPr>
-            <a:spLocks noGrp="1"/>
+            <a:spLocks noGrp="1" noRot="1" noChangeAspect="1"/>
           </p:cNvSpPr>
           <p:nvPr>
             <p:ph type="sldImg" idx="2"/>
@@ -719,7 +513,7 @@
             <a:spLocks noGrp="1"/>
           </p:cNvSpPr>
           <p:nvPr>
-            <p:ph type="body" idx="3" sz="quarter"/>
+            <p:ph type="body" sz="quarter" idx="3"/>
           </p:nvPr>
         </p:nvSpPr>
         <p:spPr/>
@@ -740,7 +534,7 @@
             <a:spLocks noGrp="1"/>
           </p:cNvSpPr>
           <p:nvPr>
-            <p:ph type="sldNum" idx="5" sz="quarter"/>
+            <p:ph type="sldNum" sz="quarter" idx="5"/>
           </p:nvPr>
         </p:nvSpPr>
         <p:spPr/>
@@ -754,7 +548,7 @@
 </file>
 
 <file path=ppt/notesSlides/notesSlide13.xml><?xml version="1.0" encoding="utf-8"?>
-<p:notes xmlns:a="http://schemas.openxmlformats.org/drawingml/2006/main" xmlns:p="http://schemas.openxmlformats.org/presentationml/2006/main" xmlns:r="http://schemas.openxmlformats.org/officeDocument/2006/relationships">
+<p:notes xmlns:a="http://schemas.openxmlformats.org/drawingml/2006/main" xmlns:r="http://schemas.openxmlformats.org/officeDocument/2006/relationships" xmlns:p="http://schemas.openxmlformats.org/presentationml/2006/main">
   <p:cSld>
     <p:spTree>
       <p:nvGrpSpPr>
@@ -774,7 +568,7 @@
         <p:nvSpPr>
           <p:cNvPr id="2" name="Slide Image Placeholder 1"/>
           <p:cNvSpPr>
-            <a:spLocks noGrp="1"/>
+            <a:spLocks noGrp="1" noRot="1" noChangeAspect="1"/>
           </p:cNvSpPr>
           <p:nvPr>
             <p:ph type="sldImg" idx="2"/>
@@ -789,7 +583,7 @@
             <a:spLocks noGrp="1"/>
           </p:cNvSpPr>
           <p:nvPr>
-            <p:ph type="body" idx="3" sz="quarter"/>
+            <p:ph type="body" sz="quarter" idx="3"/>
           </p:nvPr>
         </p:nvSpPr>
         <p:spPr/>
@@ -810,7 +604,7 @@
             <a:spLocks noGrp="1"/>
           </p:cNvSpPr>
           <p:nvPr>
-            <p:ph type="sldNum" idx="5" sz="quarter"/>
+            <p:ph type="sldNum" sz="quarter" idx="5"/>
           </p:nvPr>
         </p:nvSpPr>
         <p:spPr/>
@@ -824,7 +618,7 @@
 </file>
 
 <file path=ppt/notesSlides/notesSlide14.xml><?xml version="1.0" encoding="utf-8"?>
-<p:notes xmlns:a="http://schemas.openxmlformats.org/drawingml/2006/main" xmlns:p="http://schemas.openxmlformats.org/presentationml/2006/main" xmlns:r="http://schemas.openxmlformats.org/officeDocument/2006/relationships">
+<p:notes xmlns:a="http://schemas.openxmlformats.org/drawingml/2006/main" xmlns:r="http://schemas.openxmlformats.org/officeDocument/2006/relationships" xmlns:p="http://schemas.openxmlformats.org/presentationml/2006/main">
   <p:cSld>
     <p:spTree>
       <p:nvGrpSpPr>
@@ -844,7 +638,7 @@
         <p:nvSpPr>
           <p:cNvPr id="2" name="Slide Image Placeholder 1"/>
           <p:cNvSpPr>
-            <a:spLocks noGrp="1"/>
+            <a:spLocks noGrp="1" noRot="1" noChangeAspect="1"/>
           </p:cNvSpPr>
           <p:nvPr>
             <p:ph type="sldImg" idx="2"/>
@@ -859,7 +653,7 @@
             <a:spLocks noGrp="1"/>
           </p:cNvSpPr>
           <p:nvPr>
-            <p:ph type="body" idx="3" sz="quarter"/>
+            <p:ph type="body" sz="quarter" idx="3"/>
           </p:nvPr>
         </p:nvSpPr>
         <p:spPr/>
@@ -880,7 +674,7 @@
             <a:spLocks noGrp="1"/>
           </p:cNvSpPr>
           <p:nvPr>
-            <p:ph type="sldNum" idx="5" sz="quarter"/>
+            <p:ph type="sldNum" sz="quarter" idx="5"/>
           </p:nvPr>
         </p:nvSpPr>
         <p:spPr/>
@@ -894,7 +688,7 @@
 </file>
 
 <file path=ppt/notesSlides/notesSlide15.xml><?xml version="1.0" encoding="utf-8"?>
-<p:notes xmlns:a="http://schemas.openxmlformats.org/drawingml/2006/main" xmlns:p="http://schemas.openxmlformats.org/presentationml/2006/main" xmlns:r="http://schemas.openxmlformats.org/officeDocument/2006/relationships">
+<p:notes xmlns:a="http://schemas.openxmlformats.org/drawingml/2006/main" xmlns:r="http://schemas.openxmlformats.org/officeDocument/2006/relationships" xmlns:p="http://schemas.openxmlformats.org/presentationml/2006/main">
   <p:cSld>
     <p:spTree>
       <p:nvGrpSpPr>
@@ -914,7 +708,7 @@
         <p:nvSpPr>
           <p:cNvPr id="2" name="Slide Image Placeholder 1"/>
           <p:cNvSpPr>
-            <a:spLocks noGrp="1"/>
+            <a:spLocks noGrp="1" noRot="1" noChangeAspect="1"/>
           </p:cNvSpPr>
           <p:nvPr>
             <p:ph type="sldImg" idx="2"/>
@@ -929,7 +723,7 @@
             <a:spLocks noGrp="1"/>
           </p:cNvSpPr>
           <p:nvPr>
-            <p:ph type="body" idx="3" sz="quarter"/>
+            <p:ph type="body" sz="quarter" idx="3"/>
           </p:nvPr>
         </p:nvSpPr>
         <p:spPr/>
@@ -950,7 +744,7 @@
             <a:spLocks noGrp="1"/>
           </p:cNvSpPr>
           <p:nvPr>
-            <p:ph type="sldNum" idx="5" sz="quarter"/>
+            <p:ph type="sldNum" sz="quarter" idx="5"/>
           </p:nvPr>
         </p:nvSpPr>
         <p:spPr/>
@@ -964,7 +758,7 @@
 </file>
 
 <file path=ppt/notesSlides/notesSlide16.xml><?xml version="1.0" encoding="utf-8"?>
-<p:notes xmlns:a="http://schemas.openxmlformats.org/drawingml/2006/main" xmlns:p="http://schemas.openxmlformats.org/presentationml/2006/main" xmlns:r="http://schemas.openxmlformats.org/officeDocument/2006/relationships">
+<p:notes xmlns:a="http://schemas.openxmlformats.org/drawingml/2006/main" xmlns:r="http://schemas.openxmlformats.org/officeDocument/2006/relationships" xmlns:p="http://schemas.openxmlformats.org/presentationml/2006/main">
   <p:cSld>
     <p:spTree>
       <p:nvGrpSpPr>
@@ -984,7 +778,7 @@
         <p:nvSpPr>
           <p:cNvPr id="2" name="Slide Image Placeholder 1"/>
           <p:cNvSpPr>
-            <a:spLocks noGrp="1"/>
+            <a:spLocks noGrp="1" noRot="1" noChangeAspect="1"/>
           </p:cNvSpPr>
           <p:nvPr>
             <p:ph type="sldImg" idx="2"/>
@@ -999,7 +793,7 @@
             <a:spLocks noGrp="1"/>
           </p:cNvSpPr>
           <p:nvPr>
-            <p:ph type="body" idx="3" sz="quarter"/>
+            <p:ph type="body" sz="quarter" idx="3"/>
           </p:nvPr>
         </p:nvSpPr>
         <p:spPr/>
@@ -1020,7 +814,7 @@
             <a:spLocks noGrp="1"/>
           </p:cNvSpPr>
           <p:nvPr>
-            <p:ph type="sldNum" idx="5" sz="quarter"/>
+            <p:ph type="sldNum" sz="quarter" idx="5"/>
           </p:nvPr>
         </p:nvSpPr>
         <p:spPr/>
@@ -1034,7 +828,7 @@
 </file>
 
 <file path=ppt/notesSlides/notesSlide17.xml><?xml version="1.0" encoding="utf-8"?>
-<p:notes xmlns:a="http://schemas.openxmlformats.org/drawingml/2006/main" xmlns:p="http://schemas.openxmlformats.org/presentationml/2006/main" xmlns:r="http://schemas.openxmlformats.org/officeDocument/2006/relationships">
+<p:notes xmlns:a="http://schemas.openxmlformats.org/drawingml/2006/main" xmlns:r="http://schemas.openxmlformats.org/officeDocument/2006/relationships" xmlns:p="http://schemas.openxmlformats.org/presentationml/2006/main">
   <p:cSld>
     <p:spTree>
       <p:nvGrpSpPr>
@@ -1054,7 +848,7 @@
         <p:nvSpPr>
           <p:cNvPr id="2" name="Slide Image Placeholder 1"/>
           <p:cNvSpPr>
-            <a:spLocks noGrp="1"/>
+            <a:spLocks noGrp="1" noRot="1" noChangeAspect="1"/>
           </p:cNvSpPr>
           <p:nvPr>
             <p:ph type="sldImg" idx="2"/>
@@ -1069,7 +863,7 @@
             <a:spLocks noGrp="1"/>
           </p:cNvSpPr>
           <p:nvPr>
-            <p:ph type="body" idx="3" sz="quarter"/>
+            <p:ph type="body" sz="quarter" idx="3"/>
           </p:nvPr>
         </p:nvSpPr>
         <p:spPr/>
@@ -1090,7 +884,7 @@
             <a:spLocks noGrp="1"/>
           </p:cNvSpPr>
           <p:nvPr>
-            <p:ph type="sldNum" idx="5" sz="quarter"/>
+            <p:ph type="sldNum" sz="quarter" idx="5"/>
           </p:nvPr>
         </p:nvSpPr>
         <p:spPr/>
@@ -1104,7 +898,7 @@
 </file>
 
 <file path=ppt/notesSlides/notesSlide2.xml><?xml version="1.0" encoding="utf-8"?>
-<p:notes xmlns:a="http://schemas.openxmlformats.org/drawingml/2006/main" xmlns:p="http://schemas.openxmlformats.org/presentationml/2006/main" xmlns:r="http://schemas.openxmlformats.org/officeDocument/2006/relationships">
+<p:notes xmlns:a="http://schemas.openxmlformats.org/drawingml/2006/main" xmlns:r="http://schemas.openxmlformats.org/officeDocument/2006/relationships" xmlns:p="http://schemas.openxmlformats.org/presentationml/2006/main">
   <p:cSld>
     <p:spTree>
       <p:nvGrpSpPr>
@@ -1124,7 +918,7 @@
         <p:nvSpPr>
           <p:cNvPr id="2" name="Slide Image Placeholder 1"/>
           <p:cNvSpPr>
-            <a:spLocks noGrp="1"/>
+            <a:spLocks noGrp="1" noRot="1" noChangeAspect="1"/>
           </p:cNvSpPr>
           <p:nvPr>
             <p:ph type="sldImg" idx="2"/>
@@ -1139,7 +933,7 @@
             <a:spLocks noGrp="1"/>
           </p:cNvSpPr>
           <p:nvPr>
-            <p:ph type="body" idx="3" sz="quarter"/>
+            <p:ph type="body" sz="quarter" idx="3"/>
           </p:nvPr>
         </p:nvSpPr>
         <p:spPr/>
@@ -1160,7 +954,7 @@
             <a:spLocks noGrp="1"/>
           </p:cNvSpPr>
           <p:nvPr>
-            <p:ph type="sldNum" idx="5" sz="quarter"/>
+            <p:ph type="sldNum" sz="quarter" idx="5"/>
           </p:nvPr>
         </p:nvSpPr>
         <p:spPr/>
@@ -1174,7 +968,7 @@
 </file>
 
 <file path=ppt/notesSlides/notesSlide3.xml><?xml version="1.0" encoding="utf-8"?>
-<p:notes xmlns:a="http://schemas.openxmlformats.org/drawingml/2006/main" xmlns:p="http://schemas.openxmlformats.org/presentationml/2006/main" xmlns:r="http://schemas.openxmlformats.org/officeDocument/2006/relationships">
+<p:notes xmlns:a="http://schemas.openxmlformats.org/drawingml/2006/main" xmlns:r="http://schemas.openxmlformats.org/officeDocument/2006/relationships" xmlns:p="http://schemas.openxmlformats.org/presentationml/2006/main">
   <p:cSld>
     <p:spTree>
       <p:nvGrpSpPr>
@@ -1194,7 +988,7 @@
         <p:nvSpPr>
           <p:cNvPr id="2" name="Slide Image Placeholder 1"/>
           <p:cNvSpPr>
-            <a:spLocks noGrp="1"/>
+            <a:spLocks noGrp="1" noRot="1" noChangeAspect="1"/>
           </p:cNvSpPr>
           <p:nvPr>
             <p:ph type="sldImg" idx="2"/>
@@ -1209,7 +1003,7 @@
             <a:spLocks noGrp="1"/>
           </p:cNvSpPr>
           <p:nvPr>
-            <p:ph type="body" idx="3" sz="quarter"/>
+            <p:ph type="body" sz="quarter" idx="3"/>
           </p:nvPr>
         </p:nvSpPr>
         <p:spPr/>
@@ -1230,7 +1024,7 @@
             <a:spLocks noGrp="1"/>
           </p:cNvSpPr>
           <p:nvPr>
-            <p:ph type="sldNum" idx="5" sz="quarter"/>
+            <p:ph type="sldNum" sz="quarter" idx="5"/>
           </p:nvPr>
         </p:nvSpPr>
         <p:spPr/>
@@ -1244,7 +1038,7 @@
 </file>
 
 <file path=ppt/notesSlides/notesSlide4.xml><?xml version="1.0" encoding="utf-8"?>
-<p:notes xmlns:a="http://schemas.openxmlformats.org/drawingml/2006/main" xmlns:p="http://schemas.openxmlformats.org/presentationml/2006/main" xmlns:r="http://schemas.openxmlformats.org/officeDocument/2006/relationships">
+<p:notes xmlns:a="http://schemas.openxmlformats.org/drawingml/2006/main" xmlns:r="http://schemas.openxmlformats.org/officeDocument/2006/relationships" xmlns:p="http://schemas.openxmlformats.org/presentationml/2006/main">
   <p:cSld>
     <p:spTree>
       <p:nvGrpSpPr>
@@ -1264,7 +1058,7 @@
         <p:nvSpPr>
           <p:cNvPr id="2" name="Slide Image Placeholder 1"/>
           <p:cNvSpPr>
-            <a:spLocks noGrp="1"/>
+            <a:spLocks noGrp="1" noRot="1" noChangeAspect="1"/>
           </p:cNvSpPr>
           <p:nvPr>
             <p:ph type="sldImg" idx="2"/>
@@ -1279,7 +1073,7 @@
             <a:spLocks noGrp="1"/>
           </p:cNvSpPr>
           <p:nvPr>
-            <p:ph type="body" idx="3" sz="quarter"/>
+            <p:ph type="body" sz="quarter" idx="3"/>
           </p:nvPr>
         </p:nvSpPr>
         <p:spPr/>
@@ -1300,7 +1094,7 @@
             <a:spLocks noGrp="1"/>
           </p:cNvSpPr>
           <p:nvPr>
-            <p:ph type="sldNum" idx="5" sz="quarter"/>
+            <p:ph type="sldNum" sz="quarter" idx="5"/>
           </p:nvPr>
         </p:nvSpPr>
         <p:spPr/>
@@ -1314,7 +1108,7 @@
 </file>
 
 <file path=ppt/notesSlides/notesSlide5.xml><?xml version="1.0" encoding="utf-8"?>
-<p:notes xmlns:a="http://schemas.openxmlformats.org/drawingml/2006/main" xmlns:p="http://schemas.openxmlformats.org/presentationml/2006/main" xmlns:r="http://schemas.openxmlformats.org/officeDocument/2006/relationships">
+<p:notes xmlns:a="http://schemas.openxmlformats.org/drawingml/2006/main" xmlns:r="http://schemas.openxmlformats.org/officeDocument/2006/relationships" xmlns:p="http://schemas.openxmlformats.org/presentationml/2006/main">
   <p:cSld>
     <p:spTree>
       <p:nvGrpSpPr>
@@ -1334,7 +1128,7 @@
         <p:nvSpPr>
           <p:cNvPr id="2" name="Slide Image Placeholder 1"/>
           <p:cNvSpPr>
-            <a:spLocks noGrp="1"/>
+            <a:spLocks noGrp="1" noRot="1" noChangeAspect="1"/>
           </p:cNvSpPr>
           <p:nvPr>
             <p:ph type="sldImg" idx="2"/>
@@ -1349,7 +1143,7 @@
             <a:spLocks noGrp="1"/>
           </p:cNvSpPr>
           <p:nvPr>
-            <p:ph type="body" idx="3" sz="quarter"/>
+            <p:ph type="body" sz="quarter" idx="3"/>
           </p:nvPr>
         </p:nvSpPr>
         <p:spPr/>
@@ -1370,7 +1164,7 @@
             <a:spLocks noGrp="1"/>
           </p:cNvSpPr>
           <p:nvPr>
-            <p:ph type="sldNum" idx="5" sz="quarter"/>
+            <p:ph type="sldNum" sz="quarter" idx="5"/>
           </p:nvPr>
         </p:nvSpPr>
         <p:spPr/>
@@ -1384,7 +1178,7 @@
 </file>
 
 <file path=ppt/notesSlides/notesSlide6.xml><?xml version="1.0" encoding="utf-8"?>
-<p:notes xmlns:a="http://schemas.openxmlformats.org/drawingml/2006/main" xmlns:p="http://schemas.openxmlformats.org/presentationml/2006/main" xmlns:r="http://schemas.openxmlformats.org/officeDocument/2006/relationships">
+<p:notes xmlns:a="http://schemas.openxmlformats.org/drawingml/2006/main" xmlns:r="http://schemas.openxmlformats.org/officeDocument/2006/relationships" xmlns:p="http://schemas.openxmlformats.org/presentationml/2006/main">
   <p:cSld>
     <p:spTree>
       <p:nvGrpSpPr>
@@ -1404,7 +1198,7 @@
         <p:nvSpPr>
           <p:cNvPr id="2" name="Slide Image Placeholder 1"/>
           <p:cNvSpPr>
-            <a:spLocks noGrp="1"/>
+            <a:spLocks noGrp="1" noRot="1" noChangeAspect="1"/>
           </p:cNvSpPr>
           <p:nvPr>
             <p:ph type="sldImg" idx="2"/>
@@ -1419,7 +1213,7 @@
             <a:spLocks noGrp="1"/>
           </p:cNvSpPr>
           <p:nvPr>
-            <p:ph type="body" idx="3" sz="quarter"/>
+            <p:ph type="body" sz="quarter" idx="3"/>
           </p:nvPr>
         </p:nvSpPr>
         <p:spPr/>
@@ -1440,7 +1234,7 @@
             <a:spLocks noGrp="1"/>
           </p:cNvSpPr>
           <p:nvPr>
-            <p:ph type="sldNum" idx="5" sz="quarter"/>
+            <p:ph type="sldNum" sz="quarter" idx="5"/>
           </p:nvPr>
         </p:nvSpPr>
         <p:spPr/>
@@ -1454,7 +1248,7 @@
 </file>
 
 <file path=ppt/notesSlides/notesSlide7.xml><?xml version="1.0" encoding="utf-8"?>
-<p:notes xmlns:a="http://schemas.openxmlformats.org/drawingml/2006/main" xmlns:p="http://schemas.openxmlformats.org/presentationml/2006/main" xmlns:r="http://schemas.openxmlformats.org/officeDocument/2006/relationships">
+<p:notes xmlns:a="http://schemas.openxmlformats.org/drawingml/2006/main" xmlns:r="http://schemas.openxmlformats.org/officeDocument/2006/relationships" xmlns:p="http://schemas.openxmlformats.org/presentationml/2006/main">
   <p:cSld>
     <p:spTree>
       <p:nvGrpSpPr>
@@ -1474,7 +1268,7 @@
         <p:nvSpPr>
           <p:cNvPr id="2" name="Slide Image Placeholder 1"/>
           <p:cNvSpPr>
-            <a:spLocks noGrp="1"/>
+            <a:spLocks noGrp="1" noRot="1" noChangeAspect="1"/>
           </p:cNvSpPr>
           <p:nvPr>
             <p:ph type="sldImg" idx="2"/>
@@ -1489,7 +1283,7 @@
             <a:spLocks noGrp="1"/>
           </p:cNvSpPr>
           <p:nvPr>
-            <p:ph type="body" idx="3" sz="quarter"/>
+            <p:ph type="body" sz="quarter" idx="3"/>
           </p:nvPr>
         </p:nvSpPr>
         <p:spPr/>
@@ -1510,7 +1304,7 @@
             <a:spLocks noGrp="1"/>
           </p:cNvSpPr>
           <p:nvPr>
-            <p:ph type="sldNum" idx="5" sz="quarter"/>
+            <p:ph type="sldNum" sz="quarter" idx="5"/>
           </p:nvPr>
         </p:nvSpPr>
         <p:spPr/>
@@ -1524,7 +1318,7 @@
 </file>
 
 <file path=ppt/notesSlides/notesSlide8.xml><?xml version="1.0" encoding="utf-8"?>
-<p:notes xmlns:a="http://schemas.openxmlformats.org/drawingml/2006/main" xmlns:p="http://schemas.openxmlformats.org/presentationml/2006/main" xmlns:r="http://schemas.openxmlformats.org/officeDocument/2006/relationships">
+<p:notes xmlns:a="http://schemas.openxmlformats.org/drawingml/2006/main" xmlns:r="http://schemas.openxmlformats.org/officeDocument/2006/relationships" xmlns:p="http://schemas.openxmlformats.org/presentationml/2006/main">
   <p:cSld>
     <p:spTree>
       <p:nvGrpSpPr>
@@ -1544,7 +1338,7 @@
         <p:nvSpPr>
           <p:cNvPr id="2" name="Slide Image Placeholder 1"/>
           <p:cNvSpPr>
-            <a:spLocks noGrp="1"/>
+            <a:spLocks noGrp="1" noRot="1" noChangeAspect="1"/>
           </p:cNvSpPr>
           <p:nvPr>
             <p:ph type="sldImg" idx="2"/>
@@ -1559,7 +1353,7 @@
             <a:spLocks noGrp="1"/>
           </p:cNvSpPr>
           <p:nvPr>
-            <p:ph type="body" idx="3" sz="quarter"/>
+            <p:ph type="body" sz="quarter" idx="3"/>
           </p:nvPr>
         </p:nvSpPr>
         <p:spPr/>
@@ -1580,7 +1374,7 @@
             <a:spLocks noGrp="1"/>
           </p:cNvSpPr>
           <p:nvPr>
-            <p:ph type="sldNum" idx="5" sz="quarter"/>
+            <p:ph type="sldNum" sz="quarter" idx="5"/>
           </p:nvPr>
         </p:nvSpPr>
         <p:spPr/>
@@ -1594,7 +1388,7 @@
 </file>
 
 <file path=ppt/notesSlides/notesSlide9.xml><?xml version="1.0" encoding="utf-8"?>
-<p:notes xmlns:a="http://schemas.openxmlformats.org/drawingml/2006/main" xmlns:p="http://schemas.openxmlformats.org/presentationml/2006/main" xmlns:r="http://schemas.openxmlformats.org/officeDocument/2006/relationships">
+<p:notes xmlns:a="http://schemas.openxmlformats.org/drawingml/2006/main" xmlns:r="http://schemas.openxmlformats.org/officeDocument/2006/relationships" xmlns:p="http://schemas.openxmlformats.org/presentationml/2006/main">
   <p:cSld>
     <p:spTree>
       <p:nvGrpSpPr>
@@ -1614,7 +1408,7 @@
         <p:nvSpPr>
           <p:cNvPr id="2" name="Slide Image Placeholder 1"/>
           <p:cNvSpPr>
-            <a:spLocks noGrp="1"/>
+            <a:spLocks noGrp="1" noRot="1" noChangeAspect="1"/>
           </p:cNvSpPr>
           <p:nvPr>
             <p:ph type="sldImg" idx="2"/>
@@ -1629,7 +1423,7 @@
             <a:spLocks noGrp="1"/>
           </p:cNvSpPr>
           <p:nvPr>
-            <p:ph type="body" idx="3" sz="quarter"/>
+            <p:ph type="body" sz="quarter" idx="3"/>
           </p:nvPr>
         </p:nvSpPr>
         <p:spPr/>
@@ -1650,7 +1444,7 @@
             <a:spLocks noGrp="1"/>
           </p:cNvSpPr>
           <p:nvPr>
-            <p:ph type="sldNum" idx="5" sz="quarter"/>
+            <p:ph type="sldNum" sz="quarter" idx="5"/>
           </p:nvPr>
         </p:nvSpPr>
         <p:spPr/>
@@ -1701,10 +1495,9 @@
           <a:lstStyle/>
           <a:p>
             <a:r>
-              <a:rPr lang="en-US" smtClean="0"/>
+              <a:rPr lang="en-US"/>
               <a:t>Click to edit Master title style</a:t>
             </a:r>
-            <a:endParaRPr lang="en-US"/>
           </a:p>
         </p:txBody>
       </p:sp>
@@ -1820,10 +1613,9 @@
           </a:lstStyle>
           <a:p>
             <a:r>
-              <a:rPr lang="en-US" smtClean="0"/>
+              <a:rPr lang="en-US"/>
               <a:t>Click to edit Master subtitle style</a:t>
             </a:r>
-            <a:endParaRPr lang="en-US"/>
           </a:p>
         </p:txBody>
       </p:sp>
@@ -1844,7 +1636,7 @@
           <a:p>
             <a:fld id="{5BCAD085-E8A6-8845-BD4E-CB4CCA059FC4}" type="datetimeFigureOut">
               <a:rPr lang="en-US" smtClean="0"/>
-              <a:t>1/27/13</a:t>
+              <a:t>6/22/2026</a:t>
             </a:fld>
             <a:endParaRPr lang="en-US"/>
           </a:p>
@@ -1938,10 +1730,9 @@
           <a:lstStyle/>
           <a:p>
             <a:r>
-              <a:rPr lang="en-US" smtClean="0"/>
+              <a:rPr lang="en-US"/>
               <a:t>Click to edit Master title style</a:t>
             </a:r>
-            <a:endParaRPr lang="en-US"/>
           </a:p>
         </p:txBody>
       </p:sp>
@@ -1962,38 +1753,37 @@
           <a:p>
             <a:pPr lvl="0"/>
             <a:r>
-              <a:rPr lang="en-US" smtClean="0"/>
+              <a:rPr lang="en-US"/>
               <a:t>Click to edit Master text styles</a:t>
             </a:r>
           </a:p>
           <a:p>
             <a:pPr lvl="1"/>
             <a:r>
-              <a:rPr lang="en-US" smtClean="0"/>
+              <a:rPr lang="en-US"/>
               <a:t>Second level</a:t>
             </a:r>
           </a:p>
           <a:p>
             <a:pPr lvl="2"/>
             <a:r>
-              <a:rPr lang="en-US" smtClean="0"/>
+              <a:rPr lang="en-US"/>
               <a:t>Third level</a:t>
             </a:r>
           </a:p>
           <a:p>
             <a:pPr lvl="3"/>
             <a:r>
-              <a:rPr lang="en-US" smtClean="0"/>
+              <a:rPr lang="en-US"/>
               <a:t>Fourth level</a:t>
             </a:r>
           </a:p>
           <a:p>
             <a:pPr lvl="4"/>
             <a:r>
-              <a:rPr lang="en-US" smtClean="0"/>
+              <a:rPr lang="en-US"/>
               <a:t>Fifth level</a:t>
             </a:r>
-            <a:endParaRPr lang="en-US"/>
           </a:p>
         </p:txBody>
       </p:sp>
@@ -2014,7 +1804,7 @@
           <a:p>
             <a:fld id="{5BCAD085-E8A6-8845-BD4E-CB4CCA059FC4}" type="datetimeFigureOut">
               <a:rPr lang="en-US" smtClean="0"/>
-              <a:t>1/27/13</a:t>
+              <a:t>6/22/2026</a:t>
             </a:fld>
             <a:endParaRPr lang="en-US"/>
           </a:p>
@@ -2113,10 +1903,9 @@
           <a:lstStyle/>
           <a:p>
             <a:r>
-              <a:rPr lang="en-US" smtClean="0"/>
+              <a:rPr lang="en-US"/>
               <a:t>Click to edit Master title style</a:t>
             </a:r>
-            <a:endParaRPr lang="en-US"/>
           </a:p>
         </p:txBody>
       </p:sp>
@@ -2142,38 +1931,37 @@
           <a:p>
             <a:pPr lvl="0"/>
             <a:r>
-              <a:rPr lang="en-US" smtClean="0"/>
+              <a:rPr lang="en-US"/>
               <a:t>Click to edit Master text styles</a:t>
             </a:r>
           </a:p>
           <a:p>
             <a:pPr lvl="1"/>
             <a:r>
-              <a:rPr lang="en-US" smtClean="0"/>
+              <a:rPr lang="en-US"/>
               <a:t>Second level</a:t>
             </a:r>
           </a:p>
           <a:p>
             <a:pPr lvl="2"/>
             <a:r>
-              <a:rPr lang="en-US" smtClean="0"/>
+              <a:rPr lang="en-US"/>
               <a:t>Third level</a:t>
             </a:r>
           </a:p>
           <a:p>
             <a:pPr lvl="3"/>
             <a:r>
-              <a:rPr lang="en-US" smtClean="0"/>
+              <a:rPr lang="en-US"/>
               <a:t>Fourth level</a:t>
             </a:r>
           </a:p>
           <a:p>
             <a:pPr lvl="4"/>
             <a:r>
-              <a:rPr lang="en-US" smtClean="0"/>
+              <a:rPr lang="en-US"/>
               <a:t>Fifth level</a:t>
             </a:r>
-            <a:endParaRPr lang="en-US"/>
           </a:p>
         </p:txBody>
       </p:sp>
@@ -2194,7 +1982,7 @@
           <a:p>
             <a:fld id="{5BCAD085-E8A6-8845-BD4E-CB4CCA059FC4}" type="datetimeFigureOut">
               <a:rPr lang="en-US" smtClean="0"/>
-              <a:t>1/27/13</a:t>
+              <a:t>6/22/2026</a:t>
             </a:fld>
             <a:endParaRPr lang="en-US"/>
           </a:p>
@@ -2288,10 +2076,9 @@
           <a:lstStyle/>
           <a:p>
             <a:r>
-              <a:rPr lang="en-US" smtClean="0"/>
+              <a:rPr lang="en-US"/>
               <a:t>Click to edit Master title style</a:t>
             </a:r>
-            <a:endParaRPr lang="en-US"/>
           </a:p>
         </p:txBody>
       </p:sp>
@@ -2312,38 +2099,37 @@
           <a:p>
             <a:pPr lvl="0"/>
             <a:r>
-              <a:rPr lang="en-US" smtClean="0"/>
+              <a:rPr lang="en-US"/>
               <a:t>Click to edit Master text styles</a:t>
             </a:r>
           </a:p>
           <a:p>
             <a:pPr lvl="1"/>
             <a:r>
-              <a:rPr lang="en-US" smtClean="0"/>
+              <a:rPr lang="en-US"/>
               <a:t>Second level</a:t>
             </a:r>
           </a:p>
           <a:p>
             <a:pPr lvl="2"/>
             <a:r>
-              <a:rPr lang="en-US" smtClean="0"/>
+              <a:rPr lang="en-US"/>
               <a:t>Third level</a:t>
             </a:r>
           </a:p>
           <a:p>
             <a:pPr lvl="3"/>
             <a:r>
-              <a:rPr lang="en-US" smtClean="0"/>
+              <a:rPr lang="en-US"/>
               <a:t>Fourth level</a:t>
             </a:r>
           </a:p>
           <a:p>
             <a:pPr lvl="4"/>
             <a:r>
-              <a:rPr lang="en-US" smtClean="0"/>
+              <a:rPr lang="en-US"/>
               <a:t>Fifth level</a:t>
             </a:r>
-            <a:endParaRPr lang="en-US"/>
           </a:p>
         </p:txBody>
       </p:sp>
@@ -2364,7 +2150,7 @@
           <a:p>
             <a:fld id="{5BCAD085-E8A6-8845-BD4E-CB4CCA059FC4}" type="datetimeFigureOut">
               <a:rPr lang="en-US" smtClean="0"/>
-              <a:t>1/27/13</a:t>
+              <a:t>6/22/2026</a:t>
             </a:fld>
             <a:endParaRPr lang="en-US"/>
           </a:p>
@@ -2467,10 +2253,9 @@
           </a:lstStyle>
           <a:p>
             <a:r>
-              <a:rPr lang="en-US" smtClean="0"/>
+              <a:rPr lang="en-US"/>
               <a:t>Click to edit Master title style</a:t>
             </a:r>
-            <a:endParaRPr lang="en-US"/>
           </a:p>
         </p:txBody>
       </p:sp>
@@ -2587,7 +2372,7 @@
           <a:p>
             <a:pPr lvl="0"/>
             <a:r>
-              <a:rPr lang="en-US" smtClean="0"/>
+              <a:rPr lang="en-US"/>
               <a:t>Click to edit Master text styles</a:t>
             </a:r>
           </a:p>
@@ -2610,7 +2395,7 @@
           <a:p>
             <a:fld id="{5BCAD085-E8A6-8845-BD4E-CB4CCA059FC4}" type="datetimeFigureOut">
               <a:rPr lang="en-US" smtClean="0"/>
-              <a:t>1/27/13</a:t>
+              <a:t>6/22/2026</a:t>
             </a:fld>
             <a:endParaRPr lang="en-US"/>
           </a:p>
@@ -2704,10 +2489,9 @@
           <a:lstStyle/>
           <a:p>
             <a:r>
-              <a:rPr lang="en-US" smtClean="0"/>
+              <a:rPr lang="en-US"/>
               <a:t>Click to edit Master title style</a:t>
             </a:r>
-            <a:endParaRPr lang="en-US"/>
           </a:p>
         </p:txBody>
       </p:sp>
@@ -2761,38 +2545,37 @@
           <a:p>
             <a:pPr lvl="0"/>
             <a:r>
-              <a:rPr lang="en-US" smtClean="0"/>
+              <a:rPr lang="en-US"/>
               <a:t>Click to edit Master text styles</a:t>
             </a:r>
           </a:p>
           <a:p>
             <a:pPr lvl="1"/>
             <a:r>
-              <a:rPr lang="en-US" smtClean="0"/>
+              <a:rPr lang="en-US"/>
               <a:t>Second level</a:t>
             </a:r>
           </a:p>
           <a:p>
             <a:pPr lvl="2"/>
             <a:r>
-              <a:rPr lang="en-US" smtClean="0"/>
+              <a:rPr lang="en-US"/>
               <a:t>Third level</a:t>
             </a:r>
           </a:p>
           <a:p>
             <a:pPr lvl="3"/>
             <a:r>
-              <a:rPr lang="en-US" smtClean="0"/>
+              <a:rPr lang="en-US"/>
               <a:t>Fourth level</a:t>
             </a:r>
           </a:p>
           <a:p>
             <a:pPr lvl="4"/>
             <a:r>
-              <a:rPr lang="en-US" smtClean="0"/>
+              <a:rPr lang="en-US"/>
               <a:t>Fifth level</a:t>
             </a:r>
-            <a:endParaRPr lang="en-US"/>
           </a:p>
         </p:txBody>
       </p:sp>
@@ -2846,38 +2629,37 @@
           <a:p>
             <a:pPr lvl="0"/>
             <a:r>
-              <a:rPr lang="en-US" smtClean="0"/>
+              <a:rPr lang="en-US"/>
               <a:t>Click to edit Master text styles</a:t>
             </a:r>
           </a:p>
           <a:p>
             <a:pPr lvl="1"/>
             <a:r>
-              <a:rPr lang="en-US" smtClean="0"/>
+              <a:rPr lang="en-US"/>
               <a:t>Second level</a:t>
             </a:r>
           </a:p>
           <a:p>
             <a:pPr lvl="2"/>
             <a:r>
-              <a:rPr lang="en-US" smtClean="0"/>
+              <a:rPr lang="en-US"/>
               <a:t>Third level</a:t>
             </a:r>
           </a:p>
           <a:p>
             <a:pPr lvl="3"/>
             <a:r>
-              <a:rPr lang="en-US" smtClean="0"/>
+              <a:rPr lang="en-US"/>
               <a:t>Fourth level</a:t>
             </a:r>
           </a:p>
           <a:p>
             <a:pPr lvl="4"/>
             <a:r>
-              <a:rPr lang="en-US" smtClean="0"/>
+              <a:rPr lang="en-US"/>
               <a:t>Fifth level</a:t>
             </a:r>
-            <a:endParaRPr lang="en-US"/>
           </a:p>
         </p:txBody>
       </p:sp>
@@ -2898,7 +2680,7 @@
           <a:p>
             <a:fld id="{5BCAD085-E8A6-8845-BD4E-CB4CCA059FC4}" type="datetimeFigureOut">
               <a:rPr lang="en-US" smtClean="0"/>
-              <a:t>1/27/13</a:t>
+              <a:t>6/22/2026</a:t>
             </a:fld>
             <a:endParaRPr lang="en-US"/>
           </a:p>
@@ -2996,10 +2778,9 @@
           </a:lstStyle>
           <a:p>
             <a:r>
-              <a:rPr lang="en-US" smtClean="0"/>
+              <a:rPr lang="en-US"/>
               <a:t>Click to edit Master title style</a:t>
             </a:r>
-            <a:endParaRPr lang="en-US"/>
           </a:p>
         </p:txBody>
       </p:sp>
@@ -3062,7 +2843,7 @@
           <a:p>
             <a:pPr lvl="0"/>
             <a:r>
-              <a:rPr lang="en-US" smtClean="0"/>
+              <a:rPr lang="en-US"/>
               <a:t>Click to edit Master text styles</a:t>
             </a:r>
           </a:p>
@@ -3118,38 +2899,37 @@
           <a:p>
             <a:pPr lvl="0"/>
             <a:r>
-              <a:rPr lang="en-US" smtClean="0"/>
+              <a:rPr lang="en-US"/>
               <a:t>Click to edit Master text styles</a:t>
             </a:r>
           </a:p>
           <a:p>
             <a:pPr lvl="1"/>
             <a:r>
-              <a:rPr lang="en-US" smtClean="0"/>
+              <a:rPr lang="en-US"/>
               <a:t>Second level</a:t>
             </a:r>
           </a:p>
           <a:p>
             <a:pPr lvl="2"/>
             <a:r>
-              <a:rPr lang="en-US" smtClean="0"/>
+              <a:rPr lang="en-US"/>
               <a:t>Third level</a:t>
             </a:r>
           </a:p>
           <a:p>
             <a:pPr lvl="3"/>
             <a:r>
-              <a:rPr lang="en-US" smtClean="0"/>
+              <a:rPr lang="en-US"/>
               <a:t>Fourth level</a:t>
             </a:r>
           </a:p>
           <a:p>
             <a:pPr lvl="4"/>
             <a:r>
-              <a:rPr lang="en-US" smtClean="0"/>
+              <a:rPr lang="en-US"/>
               <a:t>Fifth level</a:t>
             </a:r>
-            <a:endParaRPr lang="en-US"/>
           </a:p>
         </p:txBody>
       </p:sp>
@@ -3212,7 +2992,7 @@
           <a:p>
             <a:pPr lvl="0"/>
             <a:r>
-              <a:rPr lang="en-US" smtClean="0"/>
+              <a:rPr lang="en-US"/>
               <a:t>Click to edit Master text styles</a:t>
             </a:r>
           </a:p>
@@ -3268,38 +3048,37 @@
           <a:p>
             <a:pPr lvl="0"/>
             <a:r>
-              <a:rPr lang="en-US" smtClean="0"/>
+              <a:rPr lang="en-US"/>
               <a:t>Click to edit Master text styles</a:t>
             </a:r>
           </a:p>
           <a:p>
             <a:pPr lvl="1"/>
             <a:r>
-              <a:rPr lang="en-US" smtClean="0"/>
+              <a:rPr lang="en-US"/>
               <a:t>Second level</a:t>
             </a:r>
           </a:p>
           <a:p>
             <a:pPr lvl="2"/>
             <a:r>
-              <a:rPr lang="en-US" smtClean="0"/>
+              <a:rPr lang="en-US"/>
               <a:t>Third level</a:t>
             </a:r>
           </a:p>
           <a:p>
             <a:pPr lvl="3"/>
             <a:r>
-              <a:rPr lang="en-US" smtClean="0"/>
+              <a:rPr lang="en-US"/>
               <a:t>Fourth level</a:t>
             </a:r>
           </a:p>
           <a:p>
             <a:pPr lvl="4"/>
             <a:r>
-              <a:rPr lang="en-US" smtClean="0"/>
+              <a:rPr lang="en-US"/>
               <a:t>Fifth level</a:t>
             </a:r>
-            <a:endParaRPr lang="en-US"/>
           </a:p>
         </p:txBody>
       </p:sp>
@@ -3320,7 +3099,7 @@
           <a:p>
             <a:fld id="{5BCAD085-E8A6-8845-BD4E-CB4CCA059FC4}" type="datetimeFigureOut">
               <a:rPr lang="en-US" smtClean="0"/>
-              <a:t>1/27/13</a:t>
+              <a:t>6/22/2026</a:t>
             </a:fld>
             <a:endParaRPr lang="en-US"/>
           </a:p>
@@ -3414,10 +3193,9 @@
           <a:lstStyle/>
           <a:p>
             <a:r>
-              <a:rPr lang="en-US" smtClean="0"/>
+              <a:rPr lang="en-US"/>
               <a:t>Click to edit Master title style</a:t>
             </a:r>
-            <a:endParaRPr lang="en-US"/>
           </a:p>
         </p:txBody>
       </p:sp>
@@ -3438,7 +3216,7 @@
           <a:p>
             <a:fld id="{5BCAD085-E8A6-8845-BD4E-CB4CCA059FC4}" type="datetimeFigureOut">
               <a:rPr lang="en-US" smtClean="0"/>
-              <a:t>1/27/13</a:t>
+              <a:t>6/22/2026</a:t>
             </a:fld>
             <a:endParaRPr lang="en-US"/>
           </a:p>
@@ -3533,7 +3311,7 @@
           <a:p>
             <a:fld id="{5BCAD085-E8A6-8845-BD4E-CB4CCA059FC4}" type="datetimeFigureOut">
               <a:rPr lang="en-US" smtClean="0"/>
-              <a:t>1/27/13</a:t>
+              <a:t>6/22/2026</a:t>
             </a:fld>
             <a:endParaRPr lang="en-US"/>
           </a:p>
@@ -3636,10 +3414,9 @@
           </a:lstStyle>
           <a:p>
             <a:r>
-              <a:rPr lang="en-US" smtClean="0"/>
+              <a:rPr lang="en-US"/>
               <a:t>Click to edit Master title style</a:t>
             </a:r>
-            <a:endParaRPr lang="en-US"/>
           </a:p>
         </p:txBody>
       </p:sp>
@@ -3693,38 +3470,37 @@
           <a:p>
             <a:pPr lvl="0"/>
             <a:r>
-              <a:rPr lang="en-US" smtClean="0"/>
+              <a:rPr lang="en-US"/>
               <a:t>Click to edit Master text styles</a:t>
             </a:r>
           </a:p>
           <a:p>
             <a:pPr lvl="1"/>
             <a:r>
-              <a:rPr lang="en-US" smtClean="0"/>
+              <a:rPr lang="en-US"/>
               <a:t>Second level</a:t>
             </a:r>
           </a:p>
           <a:p>
             <a:pPr lvl="2"/>
             <a:r>
-              <a:rPr lang="en-US" smtClean="0"/>
+              <a:rPr lang="en-US"/>
               <a:t>Third level</a:t>
             </a:r>
           </a:p>
           <a:p>
             <a:pPr lvl="3"/>
             <a:r>
-              <a:rPr lang="en-US" smtClean="0"/>
+              <a:rPr lang="en-US"/>
               <a:t>Fourth level</a:t>
             </a:r>
           </a:p>
           <a:p>
             <a:pPr lvl="4"/>
             <a:r>
-              <a:rPr lang="en-US" smtClean="0"/>
+              <a:rPr lang="en-US"/>
               <a:t>Fifth level</a:t>
             </a:r>
-            <a:endParaRPr lang="en-US"/>
           </a:p>
         </p:txBody>
       </p:sp>
@@ -3787,7 +3563,7 @@
           <a:p>
             <a:pPr lvl="0"/>
             <a:r>
-              <a:rPr lang="en-US" smtClean="0"/>
+              <a:rPr lang="en-US"/>
               <a:t>Click to edit Master text styles</a:t>
             </a:r>
           </a:p>
@@ -3810,7 +3586,7 @@
           <a:p>
             <a:fld id="{5BCAD085-E8A6-8845-BD4E-CB4CCA059FC4}" type="datetimeFigureOut">
               <a:rPr lang="en-US" smtClean="0"/>
-              <a:t>1/27/13</a:t>
+              <a:t>6/22/2026</a:t>
             </a:fld>
             <a:endParaRPr lang="en-US"/>
           </a:p>
@@ -3913,10 +3689,9 @@
           </a:lstStyle>
           <a:p>
             <a:r>
-              <a:rPr lang="en-US" smtClean="0"/>
+              <a:rPr lang="en-US"/>
               <a:t>Click to edit Master title style</a:t>
             </a:r>
-            <a:endParaRPr lang="en-US"/>
           </a:p>
         </p:txBody>
       </p:sp>
@@ -4040,7 +3815,7 @@
           <a:p>
             <a:pPr lvl="0"/>
             <a:r>
-              <a:rPr lang="en-US" smtClean="0"/>
+              <a:rPr lang="en-US"/>
               <a:t>Click to edit Master text styles</a:t>
             </a:r>
           </a:p>
@@ -4063,7 +3838,7 @@
           <a:p>
             <a:fld id="{5BCAD085-E8A6-8845-BD4E-CB4CCA059FC4}" type="datetimeFigureOut">
               <a:rPr lang="en-US" smtClean="0"/>
-              <a:t>1/27/13</a:t>
+              <a:t>6/22/2026</a:t>
             </a:fld>
             <a:endParaRPr lang="en-US"/>
           </a:p>
@@ -4172,10 +3947,9 @@
           <a:lstStyle/>
           <a:p>
             <a:r>
-              <a:rPr lang="en-US" smtClean="0"/>
+              <a:rPr lang="en-US"/>
               <a:t>Click to edit Master title style</a:t>
             </a:r>
-            <a:endParaRPr lang="en-US"/>
           </a:p>
         </p:txBody>
       </p:sp>
@@ -4206,38 +3980,37 @@
           <a:p>
             <a:pPr lvl="0"/>
             <a:r>
-              <a:rPr lang="en-US" smtClean="0"/>
+              <a:rPr lang="en-US"/>
               <a:t>Click to edit Master text styles</a:t>
             </a:r>
           </a:p>
           <a:p>
             <a:pPr lvl="1"/>
             <a:r>
-              <a:rPr lang="en-US" smtClean="0"/>
+              <a:rPr lang="en-US"/>
               <a:t>Second level</a:t>
             </a:r>
           </a:p>
           <a:p>
             <a:pPr lvl="2"/>
             <a:r>
-              <a:rPr lang="en-US" smtClean="0"/>
+              <a:rPr lang="en-US"/>
               <a:t>Third level</a:t>
             </a:r>
           </a:p>
           <a:p>
             <a:pPr lvl="3"/>
             <a:r>
-              <a:rPr lang="en-US" smtClean="0"/>
+              <a:rPr lang="en-US"/>
               <a:t>Fourth level</a:t>
             </a:r>
           </a:p>
           <a:p>
             <a:pPr lvl="4"/>
             <a:r>
-              <a:rPr lang="en-US" smtClean="0"/>
+              <a:rPr lang="en-US"/>
               <a:t>Fifth level</a:t>
             </a:r>
-            <a:endParaRPr lang="en-US"/>
           </a:p>
         </p:txBody>
       </p:sp>
@@ -4276,7 +4049,7 @@
           <a:p>
             <a:fld id="{5BCAD085-E8A6-8845-BD4E-CB4CCA059FC4}" type="datetimeFigureOut">
               <a:rPr lang="en-US" smtClean="0"/>
-              <a:t>1/27/13</a:t>
+              <a:t>6/22/2026</a:t>
             </a:fld>
             <a:endParaRPr lang="en-US"/>
           </a:p>
@@ -4635,7 +4408,7 @@
 </file>
 
 <file path=ppt/slides/slide1.xml><?xml version="1.0" encoding="utf-8"?>
-<p:sld xmlns:a="http://schemas.openxmlformats.org/drawingml/2006/main" xmlns:p="http://schemas.openxmlformats.org/presentationml/2006/main" xmlns:r="http://schemas.openxmlformats.org/officeDocument/2006/relationships">
+<p:sld xmlns:a="http://schemas.openxmlformats.org/drawingml/2006/main" xmlns:r="http://schemas.openxmlformats.org/officeDocument/2006/relationships" xmlns:p="http://schemas.openxmlformats.org/presentationml/2006/main">
   <p:cSld>
     <p:bg>
       <p:bgPr>
@@ -4651,7 +4424,14 @@
         <p:cNvGrpSpPr/>
         <p:nvPr/>
       </p:nvGrpSpPr>
-      <p:grpSpPr/>
+      <p:grpSpPr>
+        <a:xfrm>
+          <a:off x="0" y="0"/>
+          <a:ext cx="0" cy="0"/>
+          <a:chOff x="0" y="0"/>
+          <a:chExt cx="0" cy="0"/>
+        </a:xfrm>
+      </p:grpSpPr>
       <p:sp>
         <p:nvSpPr>
           <p:cNvPr id="2" name="TextBox 1"/>
@@ -4696,7 +4476,7 @@
         <p:spPr>
           <a:xfrm>
             <a:off x="457200" y="2395728"/>
-            <a:ext cx="11274552" cy="804672"/>
+            <a:ext cx="11274552" cy="707886"/>
           </a:xfrm>
           <a:prstGeom prst="rect">
             <a:avLst/>
@@ -4711,15 +4491,19 @@
           <a:p>
             <a:pPr algn="ctr"/>
             <a:r>
-              <a:rPr sz="2000" b="0" i="1">
+              <a:rPr lang="en-US" sz="2000" i="1" dirty="0">
                 <a:solidFill>
                   <a:srgbClr val="90CDF4"/>
                 </a:solidFill>
-                <a:latin typeface="Calibri"/>
-              </a:rPr>
-              <a:t>"Does combining text and audio improve emotion classification
-beyond either modality alone?"</a:t>
-            </a:r>
+              </a:rPr>
+              <a:t>Can we predict the speaker’s emotion using a multimodal approach that combines both acoustic speech features and textual content?</a:t>
+            </a:r>
+            <a:endParaRPr sz="2000" b="0" i="1" dirty="0">
+              <a:solidFill>
+                <a:srgbClr val="90CDF4"/>
+              </a:solidFill>
+              <a:latin typeface="Calibri"/>
+            </a:endParaRPr>
           </a:p>
         </p:txBody>
       </p:sp>
@@ -4759,7 +4543,7 @@
           </a:fontRef>
         </p:style>
         <p:txBody>
-          <a:bodyPr rtlCol="0" anchor="ctr" wrap="square" lIns="109728" rIns="109728" tIns="73152" bIns="73152"/>
+          <a:bodyPr wrap="square" lIns="109728" tIns="73152" rIns="109728" bIns="73152" rtlCol="0" anchor="ctr"/>
           <a:lstStyle/>
           <a:p>
             <a:pPr algn="ctr"/>
@@ -4812,7 +4596,7 @@
           </a:fontRef>
         </p:style>
         <p:txBody>
-          <a:bodyPr rtlCol="0" anchor="ctr" wrap="square" lIns="109728" rIns="109728" tIns="73152" bIns="73152"/>
+          <a:bodyPr wrap="square" lIns="109728" tIns="73152" rIns="109728" bIns="73152" rtlCol="0" anchor="ctr"/>
           <a:lstStyle/>
           <a:p>
             <a:pPr algn="ctr"/>
@@ -4865,7 +4649,7 @@
           </a:fontRef>
         </p:style>
         <p:txBody>
-          <a:bodyPr rtlCol="0" anchor="ctr" wrap="square" lIns="109728" rIns="109728" tIns="73152" bIns="73152"/>
+          <a:bodyPr wrap="square" lIns="109728" tIns="73152" rIns="109728" bIns="73152" rtlCol="0" anchor="ctr"/>
           <a:lstStyle/>
           <a:p>
             <a:pPr algn="ctr"/>
@@ -5031,7 +4815,7 @@
 </file>
 
 <file path=ppt/slides/slide10.xml><?xml version="1.0" encoding="utf-8"?>
-<p:sld xmlns:a="http://schemas.openxmlformats.org/drawingml/2006/main" xmlns:p="http://schemas.openxmlformats.org/presentationml/2006/main" xmlns:r="http://schemas.openxmlformats.org/officeDocument/2006/relationships">
+<p:sld xmlns:a="http://schemas.openxmlformats.org/drawingml/2006/main" xmlns:r="http://schemas.openxmlformats.org/officeDocument/2006/relationships" xmlns:p="http://schemas.openxmlformats.org/presentationml/2006/main">
   <p:cSld>
     <p:bg>
       <p:bgPr>
@@ -5047,7 +4831,14 @@
         <p:cNvGrpSpPr/>
         <p:nvPr/>
       </p:nvGrpSpPr>
-      <p:grpSpPr/>
+      <p:grpSpPr>
+        <a:xfrm>
+          <a:off x="0" y="0"/>
+          <a:ext cx="0" cy="0"/>
+          <a:chOff x="0" y="0"/>
+          <a:chExt cx="0" cy="0"/>
+        </a:xfrm>
+      </p:grpSpPr>
       <p:sp>
         <p:nvSpPr>
           <p:cNvPr id="2" name="Rectangle 1"/>
@@ -5088,6 +4879,7 @@
           <a:lstStyle/>
           <a:p>
             <a:pPr algn="ctr"/>
+            <a:endParaRPr/>
           </a:p>
         </p:txBody>
       </p:sp>
@@ -5166,6 +4958,7 @@
           <a:lstStyle/>
           <a:p>
             <a:pPr algn="ctr"/>
+            <a:endParaRPr/>
           </a:p>
         </p:txBody>
       </p:sp>
@@ -5275,7 +5068,7 @@
           </a:fontRef>
         </p:style>
         <p:txBody>
-          <a:bodyPr rtlCol="0" anchor="t" wrap="square" lIns="137160" rIns="137160" tIns="109728" bIns="109728"/>
+          <a:bodyPr wrap="square" lIns="137160" tIns="109728" rIns="137160" bIns="109728" rtlCol="0" anchor="t"/>
           <a:lstStyle/>
           <a:p>
             <a:pPr algn="l"/>
@@ -5327,7 +5120,7 @@
           </a:fontRef>
         </p:style>
         <p:txBody>
-          <a:bodyPr rtlCol="0" anchor="t" wrap="square" lIns="137160" rIns="137160" tIns="109728" bIns="109728"/>
+          <a:bodyPr wrap="square" lIns="137160" tIns="109728" rIns="137160" bIns="109728" rtlCol="0" anchor="t"/>
           <a:lstStyle/>
           <a:p>
             <a:pPr algn="l"/>
@@ -5379,7 +5172,7 @@
           </a:fontRef>
         </p:style>
         <p:txBody>
-          <a:bodyPr rtlCol="0" anchor="t" wrap="square" lIns="137160" rIns="137160" tIns="109728" bIns="109728"/>
+          <a:bodyPr wrap="square" lIns="137160" tIns="109728" rIns="137160" bIns="109728" rtlCol="0" anchor="t"/>
           <a:lstStyle/>
           <a:p>
             <a:pPr algn="l"/>
@@ -5431,7 +5224,7 @@
           </a:fontRef>
         </p:style>
         <p:txBody>
-          <a:bodyPr rtlCol="0" anchor="t" wrap="square" lIns="137160" rIns="137160" tIns="109728" bIns="109728"/>
+          <a:bodyPr wrap="square" lIns="137160" tIns="109728" rIns="137160" bIns="109728" rtlCol="0" anchor="t"/>
           <a:lstStyle/>
           <a:p>
             <a:pPr algn="l"/>
@@ -5590,7 +5383,7 @@
           </a:fontRef>
         </p:style>
         <p:txBody>
-          <a:bodyPr rtlCol="0" anchor="ctr" wrap="square" lIns="109728" rIns="109728" tIns="73152" bIns="73152"/>
+          <a:bodyPr wrap="square" lIns="109728" tIns="73152" rIns="109728" bIns="73152" rtlCol="0" anchor="ctr"/>
           <a:lstStyle/>
           <a:p>
             <a:pPr algn="ctr"/>
@@ -5644,7 +5437,7 @@
           </a:fontRef>
         </p:style>
         <p:txBody>
-          <a:bodyPr rtlCol="0" anchor="ctr" wrap="square" lIns="109728" rIns="109728" tIns="73152" bIns="73152"/>
+          <a:bodyPr wrap="square" lIns="109728" tIns="73152" rIns="109728" bIns="73152" rtlCol="0" anchor="ctr"/>
           <a:lstStyle/>
           <a:p>
             <a:pPr algn="l"/>
@@ -5699,7 +5492,7 @@
           </a:fontRef>
         </p:style>
         <p:txBody>
-          <a:bodyPr rtlCol="0" anchor="ctr" wrap="square" lIns="109728" rIns="109728" tIns="73152" bIns="73152"/>
+          <a:bodyPr wrap="square" lIns="109728" tIns="73152" rIns="109728" bIns="73152" rtlCol="0" anchor="ctr"/>
           <a:lstStyle/>
           <a:p>
             <a:pPr algn="l"/>
@@ -5753,7 +5546,7 @@
           </a:fontRef>
         </p:style>
         <p:txBody>
-          <a:bodyPr rtlCol="0" anchor="ctr" wrap="square" lIns="109728" rIns="109728" tIns="73152" bIns="73152"/>
+          <a:bodyPr wrap="square" lIns="109728" tIns="73152" rIns="109728" bIns="73152" rtlCol="0" anchor="ctr"/>
           <a:lstStyle/>
           <a:p>
             <a:pPr algn="ctr"/>
@@ -5805,7 +5598,7 @@
           </a:fontRef>
         </p:style>
         <p:txBody>
-          <a:bodyPr rtlCol="0" anchor="ctr" wrap="square" lIns="109728" rIns="109728" tIns="73152" bIns="73152"/>
+          <a:bodyPr wrap="square" lIns="109728" tIns="73152" rIns="109728" bIns="73152" rtlCol="0" anchor="ctr"/>
           <a:lstStyle/>
           <a:p>
             <a:pPr algn="ctr"/>
@@ -5830,7 +5623,7 @@
 </file>
 
 <file path=ppt/slides/slide11.xml><?xml version="1.0" encoding="utf-8"?>
-<p:sld xmlns:a="http://schemas.openxmlformats.org/drawingml/2006/main" xmlns:p="http://schemas.openxmlformats.org/presentationml/2006/main" xmlns:r="http://schemas.openxmlformats.org/officeDocument/2006/relationships">
+<p:sld xmlns:a="http://schemas.openxmlformats.org/drawingml/2006/main" xmlns:r="http://schemas.openxmlformats.org/officeDocument/2006/relationships" xmlns:p="http://schemas.openxmlformats.org/presentationml/2006/main">
   <p:cSld>
     <p:bg>
       <p:bgPr>
@@ -5846,7 +5639,14 @@
         <p:cNvGrpSpPr/>
         <p:nvPr/>
       </p:nvGrpSpPr>
-      <p:grpSpPr/>
+      <p:grpSpPr>
+        <a:xfrm>
+          <a:off x="0" y="0"/>
+          <a:ext cx="0" cy="0"/>
+          <a:chOff x="0" y="0"/>
+          <a:chExt cx="0" cy="0"/>
+        </a:xfrm>
+      </p:grpSpPr>
       <p:sp>
         <p:nvSpPr>
           <p:cNvPr id="2" name="Rectangle 1"/>
@@ -5887,6 +5687,7 @@
           <a:lstStyle/>
           <a:p>
             <a:pPr algn="ctr"/>
+            <a:endParaRPr/>
           </a:p>
         </p:txBody>
       </p:sp>
@@ -5965,6 +5766,7 @@
           <a:lstStyle/>
           <a:p>
             <a:pPr algn="ctr"/>
+            <a:endParaRPr/>
           </a:p>
         </p:txBody>
       </p:sp>
@@ -6076,7 +5878,7 @@
           </a:fontRef>
         </p:style>
         <p:txBody>
-          <a:bodyPr rtlCol="0" anchor="ctr" wrap="square" lIns="109728" rIns="109728" tIns="73152" bIns="73152"/>
+          <a:bodyPr wrap="square" lIns="109728" tIns="73152" rIns="109728" bIns="73152" rtlCol="0" anchor="ctr"/>
           <a:lstStyle/>
           <a:p>
             <a:pPr algn="ctr"/>
@@ -6131,7 +5933,7 @@
           </a:fontRef>
         </p:style>
         <p:txBody>
-          <a:bodyPr rtlCol="0" anchor="ctr" wrap="square" lIns="109728" rIns="109728" tIns="73152" bIns="73152"/>
+          <a:bodyPr wrap="square" lIns="109728" tIns="73152" rIns="109728" bIns="73152" rtlCol="0" anchor="ctr"/>
           <a:lstStyle/>
           <a:p>
             <a:pPr algn="ctr"/>
@@ -6186,7 +5988,7 @@
           </a:fontRef>
         </p:style>
         <p:txBody>
-          <a:bodyPr rtlCol="0" anchor="ctr" wrap="square" lIns="109728" rIns="109728" tIns="73152" bIns="73152"/>
+          <a:bodyPr wrap="square" lIns="109728" tIns="73152" rIns="109728" bIns="73152" rtlCol="0" anchor="ctr"/>
           <a:lstStyle/>
           <a:p>
             <a:pPr algn="ctr"/>
@@ -6239,7 +6041,7 @@
           </a:fontRef>
         </p:style>
         <p:txBody>
-          <a:bodyPr rtlCol="0" anchor="ctr" wrap="square" lIns="109728" rIns="109728" tIns="73152" bIns="73152"/>
+          <a:bodyPr wrap="square" lIns="109728" tIns="73152" rIns="109728" bIns="73152" rtlCol="0" anchor="ctr"/>
           <a:lstStyle/>
           <a:p>
             <a:pPr algn="ctr"/>
@@ -6264,7 +6066,7 @@
           <p:nvPr/>
         </p:nvPicPr>
         <p:blipFill>
-          <a:blip r:embed="rId4"/>
+          <a:blip r:embed="rId3"/>
           <a:stretch>
             <a:fillRect/>
           </a:stretch>
@@ -6288,7 +6090,7 @@
 </file>
 
 <file path=ppt/slides/slide12.xml><?xml version="1.0" encoding="utf-8"?>
-<p:sld xmlns:a="http://schemas.openxmlformats.org/drawingml/2006/main" xmlns:p="http://schemas.openxmlformats.org/presentationml/2006/main" xmlns:r="http://schemas.openxmlformats.org/officeDocument/2006/relationships">
+<p:sld xmlns:a="http://schemas.openxmlformats.org/drawingml/2006/main" xmlns:r="http://schemas.openxmlformats.org/officeDocument/2006/relationships" xmlns:p="http://schemas.openxmlformats.org/presentationml/2006/main">
   <p:cSld>
     <p:bg>
       <p:bgPr>
@@ -6304,7 +6106,14 @@
         <p:cNvGrpSpPr/>
         <p:nvPr/>
       </p:nvGrpSpPr>
-      <p:grpSpPr/>
+      <p:grpSpPr>
+        <a:xfrm>
+          <a:off x="0" y="0"/>
+          <a:ext cx="0" cy="0"/>
+          <a:chOff x="0" y="0"/>
+          <a:chExt cx="0" cy="0"/>
+        </a:xfrm>
+      </p:grpSpPr>
       <p:sp>
         <p:nvSpPr>
           <p:cNvPr id="2" name="Rectangle 1"/>
@@ -6345,6 +6154,7 @@
           <a:lstStyle/>
           <a:p>
             <a:pPr algn="ctr"/>
+            <a:endParaRPr/>
           </a:p>
         </p:txBody>
       </p:sp>
@@ -6423,6 +6233,7 @@
           <a:lstStyle/>
           <a:p>
             <a:pPr algn="ctr"/>
+            <a:endParaRPr/>
           </a:p>
         </p:txBody>
       </p:sp>
@@ -6585,10 +6396,34 @@
                 <a:tableStyleId>{5C22544A-7EE6-4342-B048-85BDC9FD1C3A}</a:tableStyleId>
               </a:tblPr>
               <a:tblGrid>
-                <a:gridCol w="1234440"/>
-                <a:gridCol w="713232"/>
-                <a:gridCol w="914400"/>
-                <a:gridCol w="713232"/>
+                <a:gridCol w="1234440">
+                  <a:extLst>
+                    <a:ext uri="{9D8B030D-6E8A-4147-A177-3AD203B41FA5}">
+                      <a16:colId xmlns:a16="http://schemas.microsoft.com/office/drawing/2014/main" val="20000"/>
+                    </a:ext>
+                  </a:extLst>
+                </a:gridCol>
+                <a:gridCol w="713232">
+                  <a:extLst>
+                    <a:ext uri="{9D8B030D-6E8A-4147-A177-3AD203B41FA5}">
+                      <a16:colId xmlns:a16="http://schemas.microsoft.com/office/drawing/2014/main" val="20001"/>
+                    </a:ext>
+                  </a:extLst>
+                </a:gridCol>
+                <a:gridCol w="914400">
+                  <a:extLst>
+                    <a:ext uri="{9D8B030D-6E8A-4147-A177-3AD203B41FA5}">
+                      <a16:colId xmlns:a16="http://schemas.microsoft.com/office/drawing/2014/main" val="20002"/>
+                    </a:ext>
+                  </a:extLst>
+                </a:gridCol>
+                <a:gridCol w="713232">
+                  <a:extLst>
+                    <a:ext uri="{9D8B030D-6E8A-4147-A177-3AD203B41FA5}">
+                      <a16:colId xmlns:a16="http://schemas.microsoft.com/office/drawing/2014/main" val="20003"/>
+                    </a:ext>
+                  </a:extLst>
+                </a:gridCol>
               </a:tblGrid>
               <a:tr h="406908">
                 <a:tc>
@@ -6598,7 +6433,7 @@
                     <a:p>
                       <a:pPr algn="ctr"/>
                       <a:r>
-                        <a:rPr b="1" sz="1300">
+                        <a:rPr sz="1300" b="1">
                           <a:solidFill>
                             <a:srgbClr val="FFFFFF"/>
                           </a:solidFill>
@@ -6621,7 +6456,7 @@
                     <a:p>
                       <a:pPr algn="ctr"/>
                       <a:r>
-                        <a:rPr b="1" sz="1300">
+                        <a:rPr sz="1300" b="1">
                           <a:solidFill>
                             <a:srgbClr val="FFFFFF"/>
                           </a:solidFill>
@@ -6644,7 +6479,7 @@
                     <a:p>
                       <a:pPr algn="ctr"/>
                       <a:r>
-                        <a:rPr b="1" sz="1300">
+                        <a:rPr sz="1300" b="1">
                           <a:solidFill>
                             <a:srgbClr val="FFFFFF"/>
                           </a:solidFill>
@@ -6667,7 +6502,7 @@
                     <a:p>
                       <a:pPr algn="ctr"/>
                       <a:r>
-                        <a:rPr b="1" sz="1300">
+                        <a:rPr sz="1300" b="1">
                           <a:solidFill>
                             <a:srgbClr val="FFFFFF"/>
                           </a:solidFill>
@@ -6683,6 +6518,11 @@
                     </a:solidFill>
                   </a:tcPr>
                 </a:tc>
+                <a:extLst>
+                  <a:ext uri="{0D108BD9-81ED-4DB2-BD59-A6C34878D82A}">
+                    <a16:rowId xmlns:a16="http://schemas.microsoft.com/office/drawing/2014/main" val="10000"/>
+                  </a:ext>
+                </a:extLst>
               </a:tr>
               <a:tr h="406908">
                 <a:tc>
@@ -6777,6 +6617,11 @@
                     </a:solidFill>
                   </a:tcPr>
                 </a:tc>
+                <a:extLst>
+                  <a:ext uri="{0D108BD9-81ED-4DB2-BD59-A6C34878D82A}">
+                    <a16:rowId xmlns:a16="http://schemas.microsoft.com/office/drawing/2014/main" val="10001"/>
+                  </a:ext>
+                </a:extLst>
               </a:tr>
               <a:tr h="406908">
                 <a:tc>
@@ -6871,6 +6716,11 @@
                     </a:solidFill>
                   </a:tcPr>
                 </a:tc>
+                <a:extLst>
+                  <a:ext uri="{0D108BD9-81ED-4DB2-BD59-A6C34878D82A}">
+                    <a16:rowId xmlns:a16="http://schemas.microsoft.com/office/drawing/2014/main" val="10002"/>
+                  </a:ext>
+                </a:extLst>
               </a:tr>
               <a:tr h="406908">
                 <a:tc>
@@ -6965,6 +6815,11 @@
                     </a:solidFill>
                   </a:tcPr>
                 </a:tc>
+                <a:extLst>
+                  <a:ext uri="{0D108BD9-81ED-4DB2-BD59-A6C34878D82A}">
+                    <a16:rowId xmlns:a16="http://schemas.microsoft.com/office/drawing/2014/main" val="10003"/>
+                  </a:ext>
+                </a:extLst>
               </a:tr>
             </a:tbl>
           </a:graphicData>
@@ -7041,7 +6896,7 @@
           </a:fontRef>
         </p:style>
         <p:txBody>
-          <a:bodyPr rtlCol="0" anchor="ctr" wrap="square" lIns="109728" rIns="109728" tIns="73152" bIns="73152"/>
+          <a:bodyPr wrap="square" lIns="109728" tIns="73152" rIns="109728" bIns="73152" rtlCol="0" anchor="ctr"/>
           <a:lstStyle/>
           <a:p>
             <a:pPr algn="ctr"/>
@@ -7066,7 +6921,7 @@
           <p:nvPr/>
         </p:nvPicPr>
         <p:blipFill>
-          <a:blip r:embed="rId4"/>
+          <a:blip r:embed="rId3"/>
           <a:stretch>
             <a:fillRect/>
           </a:stretch>
@@ -7090,7 +6945,7 @@
 </file>
 
 <file path=ppt/slides/slide13.xml><?xml version="1.0" encoding="utf-8"?>
-<p:sld xmlns:a="http://schemas.openxmlformats.org/drawingml/2006/main" xmlns:p="http://schemas.openxmlformats.org/presentationml/2006/main" xmlns:r="http://schemas.openxmlformats.org/officeDocument/2006/relationships">
+<p:sld xmlns:a="http://schemas.openxmlformats.org/drawingml/2006/main" xmlns:r="http://schemas.openxmlformats.org/officeDocument/2006/relationships" xmlns:p="http://schemas.openxmlformats.org/presentationml/2006/main">
   <p:cSld>
     <p:bg>
       <p:bgPr>
@@ -7106,7 +6961,14 @@
         <p:cNvGrpSpPr/>
         <p:nvPr/>
       </p:nvGrpSpPr>
-      <p:grpSpPr/>
+      <p:grpSpPr>
+        <a:xfrm>
+          <a:off x="0" y="0"/>
+          <a:ext cx="0" cy="0"/>
+          <a:chOff x="0" y="0"/>
+          <a:chExt cx="0" cy="0"/>
+        </a:xfrm>
+      </p:grpSpPr>
       <p:sp>
         <p:nvSpPr>
           <p:cNvPr id="2" name="Rectangle 1"/>
@@ -7147,6 +7009,7 @@
           <a:lstStyle/>
           <a:p>
             <a:pPr algn="ctr"/>
+            <a:endParaRPr/>
           </a:p>
         </p:txBody>
       </p:sp>
@@ -7225,6 +7088,7 @@
           <a:lstStyle/>
           <a:p>
             <a:pPr algn="ctr"/>
+            <a:endParaRPr/>
           </a:p>
         </p:txBody>
       </p:sp>
@@ -7336,7 +7200,7 @@
           </a:fontRef>
         </p:style>
         <p:txBody>
-          <a:bodyPr rtlCol="0" anchor="t" wrap="square" lIns="137160" rIns="137160" tIns="109728" bIns="109728"/>
+          <a:bodyPr wrap="square" lIns="137160" tIns="109728" rIns="137160" bIns="109728" rtlCol="0" anchor="t"/>
           <a:lstStyle/>
           <a:p>
             <a:pPr algn="l"/>
@@ -7414,7 +7278,7 @@
           </a:fontRef>
         </p:style>
         <p:txBody>
-          <a:bodyPr rtlCol="0" anchor="t" wrap="square" lIns="137160" rIns="137160" tIns="109728" bIns="109728"/>
+          <a:bodyPr wrap="square" lIns="137160" tIns="109728" rIns="137160" bIns="109728" rtlCol="0" anchor="t"/>
           <a:lstStyle/>
           <a:p>
             <a:pPr algn="l"/>
@@ -7492,7 +7356,7 @@
           </a:fontRef>
         </p:style>
         <p:txBody>
-          <a:bodyPr rtlCol="0" anchor="t" wrap="square" lIns="137160" rIns="137160" tIns="109728" bIns="109728"/>
+          <a:bodyPr wrap="square" lIns="137160" tIns="109728" rIns="137160" bIns="109728" rtlCol="0" anchor="t"/>
           <a:lstStyle/>
           <a:p>
             <a:pPr algn="l"/>
@@ -7568,7 +7432,7 @@
           </a:fontRef>
         </p:style>
         <p:txBody>
-          <a:bodyPr rtlCol="0" anchor="ctr" wrap="square" lIns="109728" rIns="109728" tIns="73152" bIns="73152"/>
+          <a:bodyPr wrap="square" lIns="109728" tIns="73152" rIns="109728" bIns="73152" rtlCol="0" anchor="ctr"/>
           <a:lstStyle/>
           <a:p>
             <a:pPr algn="ctr"/>
@@ -7593,7 +7457,7 @@
           <p:nvPr/>
         </p:nvPicPr>
         <p:blipFill>
-          <a:blip r:embed="rId4"/>
+          <a:blip r:embed="rId3"/>
           <a:stretch>
             <a:fillRect/>
           </a:stretch>
@@ -7617,7 +7481,7 @@
 </file>
 
 <file path=ppt/slides/slide14.xml><?xml version="1.0" encoding="utf-8"?>
-<p:sld xmlns:a="http://schemas.openxmlformats.org/drawingml/2006/main" xmlns:p="http://schemas.openxmlformats.org/presentationml/2006/main" xmlns:r="http://schemas.openxmlformats.org/officeDocument/2006/relationships">
+<p:sld xmlns:a="http://schemas.openxmlformats.org/drawingml/2006/main" xmlns:r="http://schemas.openxmlformats.org/officeDocument/2006/relationships" xmlns:p="http://schemas.openxmlformats.org/presentationml/2006/main">
   <p:cSld>
     <p:bg>
       <p:bgPr>
@@ -7633,7 +7497,14 @@
         <p:cNvGrpSpPr/>
         <p:nvPr/>
       </p:nvGrpSpPr>
-      <p:grpSpPr/>
+      <p:grpSpPr>
+        <a:xfrm>
+          <a:off x="0" y="0"/>
+          <a:ext cx="0" cy="0"/>
+          <a:chOff x="0" y="0"/>
+          <a:chExt cx="0" cy="0"/>
+        </a:xfrm>
+      </p:grpSpPr>
       <p:sp>
         <p:nvSpPr>
           <p:cNvPr id="2" name="Rectangle 1"/>
@@ -7674,6 +7545,7 @@
           <a:lstStyle/>
           <a:p>
             <a:pPr algn="ctr"/>
+            <a:endParaRPr/>
           </a:p>
         </p:txBody>
       </p:sp>
@@ -7752,6 +7624,7 @@
           <a:lstStyle/>
           <a:p>
             <a:pPr algn="ctr"/>
+            <a:endParaRPr/>
           </a:p>
         </p:txBody>
       </p:sp>
@@ -7914,10 +7787,34 @@
                 <a:tableStyleId>{5C22544A-7EE6-4342-B048-85BDC9FD1C3A}</a:tableStyleId>
               </a:tblPr>
               <a:tblGrid>
-                <a:gridCol w="2926080"/>
-                <a:gridCol w="2377440"/>
-                <a:gridCol w="2560320"/>
-                <a:gridCol w="1645920"/>
+                <a:gridCol w="2926080">
+                  <a:extLst>
+                    <a:ext uri="{9D8B030D-6E8A-4147-A177-3AD203B41FA5}">
+                      <a16:colId xmlns:a16="http://schemas.microsoft.com/office/drawing/2014/main" val="20000"/>
+                    </a:ext>
+                  </a:extLst>
+                </a:gridCol>
+                <a:gridCol w="2377440">
+                  <a:extLst>
+                    <a:ext uri="{9D8B030D-6E8A-4147-A177-3AD203B41FA5}">
+                      <a16:colId xmlns:a16="http://schemas.microsoft.com/office/drawing/2014/main" val="20001"/>
+                    </a:ext>
+                  </a:extLst>
+                </a:gridCol>
+                <a:gridCol w="2560320">
+                  <a:extLst>
+                    <a:ext uri="{9D8B030D-6E8A-4147-A177-3AD203B41FA5}">
+                      <a16:colId xmlns:a16="http://schemas.microsoft.com/office/drawing/2014/main" val="20002"/>
+                    </a:ext>
+                  </a:extLst>
+                </a:gridCol>
+                <a:gridCol w="1645920">
+                  <a:extLst>
+                    <a:ext uri="{9D8B030D-6E8A-4147-A177-3AD203B41FA5}">
+                      <a16:colId xmlns:a16="http://schemas.microsoft.com/office/drawing/2014/main" val="20003"/>
+                    </a:ext>
+                  </a:extLst>
+                </a:gridCol>
               </a:tblGrid>
               <a:tr h="308610">
                 <a:tc>
@@ -7927,7 +7824,7 @@
                     <a:p>
                       <a:pPr algn="ctr"/>
                       <a:r>
-                        <a:rPr b="1" sz="1300">
+                        <a:rPr sz="1300" b="1">
                           <a:solidFill>
                             <a:srgbClr val="FFFFFF"/>
                           </a:solidFill>
@@ -7950,7 +7847,7 @@
                     <a:p>
                       <a:pPr algn="ctr"/>
                       <a:r>
-                        <a:rPr b="1" sz="1300">
+                        <a:rPr sz="1300" b="1">
                           <a:solidFill>
                             <a:srgbClr val="FFFFFF"/>
                           </a:solidFill>
@@ -7973,7 +7870,7 @@
                     <a:p>
                       <a:pPr algn="ctr"/>
                       <a:r>
-                        <a:rPr b="1" sz="1300">
+                        <a:rPr sz="1300" b="1">
                           <a:solidFill>
                             <a:srgbClr val="FFFFFF"/>
                           </a:solidFill>
@@ -7996,7 +7893,7 @@
                     <a:p>
                       <a:pPr algn="ctr"/>
                       <a:r>
-                        <a:rPr b="1" sz="1300">
+                        <a:rPr sz="1300" b="1">
                           <a:solidFill>
                             <a:srgbClr val="FFFFFF"/>
                           </a:solidFill>
@@ -8012,6 +7909,11 @@
                     </a:solidFill>
                   </a:tcPr>
                 </a:tc>
+                <a:extLst>
+                  <a:ext uri="{0D108BD9-81ED-4DB2-BD59-A6C34878D82A}">
+                    <a16:rowId xmlns:a16="http://schemas.microsoft.com/office/drawing/2014/main" val="10000"/>
+                  </a:ext>
+                </a:extLst>
               </a:tr>
               <a:tr h="308610">
                 <a:tc>
@@ -8106,6 +8008,11 @@
                     </a:solidFill>
                   </a:tcPr>
                 </a:tc>
+                <a:extLst>
+                  <a:ext uri="{0D108BD9-81ED-4DB2-BD59-A6C34878D82A}">
+                    <a16:rowId xmlns:a16="http://schemas.microsoft.com/office/drawing/2014/main" val="10001"/>
+                  </a:ext>
+                </a:extLst>
               </a:tr>
               <a:tr h="308610">
                 <a:tc>
@@ -8200,6 +8107,11 @@
                     </a:solidFill>
                   </a:tcPr>
                 </a:tc>
+                <a:extLst>
+                  <a:ext uri="{0D108BD9-81ED-4DB2-BD59-A6C34878D82A}">
+                    <a16:rowId xmlns:a16="http://schemas.microsoft.com/office/drawing/2014/main" val="10002"/>
+                  </a:ext>
+                </a:extLst>
               </a:tr>
               <a:tr h="308610">
                 <a:tc>
@@ -8294,6 +8206,11 @@
                     </a:solidFill>
                   </a:tcPr>
                 </a:tc>
+                <a:extLst>
+                  <a:ext uri="{0D108BD9-81ED-4DB2-BD59-A6C34878D82A}">
+                    <a16:rowId xmlns:a16="http://schemas.microsoft.com/office/drawing/2014/main" val="10003"/>
+                  </a:ext>
+                </a:extLst>
               </a:tr>
             </a:tbl>
           </a:graphicData>
@@ -8353,11 +8270,41 @@
                 <a:tableStyleId>{5C22544A-7EE6-4342-B048-85BDC9FD1C3A}</a:tableStyleId>
               </a:tblPr>
               <a:tblGrid>
-                <a:gridCol w="2834640"/>
-                <a:gridCol w="685800"/>
-                <a:gridCol w="1828800"/>
-                <a:gridCol w="1828800"/>
-                <a:gridCol w="2057400"/>
+                <a:gridCol w="2834640">
+                  <a:extLst>
+                    <a:ext uri="{9D8B030D-6E8A-4147-A177-3AD203B41FA5}">
+                      <a16:colId xmlns:a16="http://schemas.microsoft.com/office/drawing/2014/main" val="20000"/>
+                    </a:ext>
+                  </a:extLst>
+                </a:gridCol>
+                <a:gridCol w="685800">
+                  <a:extLst>
+                    <a:ext uri="{9D8B030D-6E8A-4147-A177-3AD203B41FA5}">
+                      <a16:colId xmlns:a16="http://schemas.microsoft.com/office/drawing/2014/main" val="20001"/>
+                    </a:ext>
+                  </a:extLst>
+                </a:gridCol>
+                <a:gridCol w="1828800">
+                  <a:extLst>
+                    <a:ext uri="{9D8B030D-6E8A-4147-A177-3AD203B41FA5}">
+                      <a16:colId xmlns:a16="http://schemas.microsoft.com/office/drawing/2014/main" val="20002"/>
+                    </a:ext>
+                  </a:extLst>
+                </a:gridCol>
+                <a:gridCol w="1828800">
+                  <a:extLst>
+                    <a:ext uri="{9D8B030D-6E8A-4147-A177-3AD203B41FA5}">
+                      <a16:colId xmlns:a16="http://schemas.microsoft.com/office/drawing/2014/main" val="20003"/>
+                    </a:ext>
+                  </a:extLst>
+                </a:gridCol>
+                <a:gridCol w="2057400">
+                  <a:extLst>
+                    <a:ext uri="{9D8B030D-6E8A-4147-A177-3AD203B41FA5}">
+                      <a16:colId xmlns:a16="http://schemas.microsoft.com/office/drawing/2014/main" val="20004"/>
+                    </a:ext>
+                  </a:extLst>
+                </a:gridCol>
               </a:tblGrid>
               <a:tr h="331470">
                 <a:tc>
@@ -8367,7 +8314,7 @@
                     <a:p>
                       <a:pPr algn="ctr"/>
                       <a:r>
-                        <a:rPr b="1" sz="1300">
+                        <a:rPr sz="1300" b="1">
                           <a:solidFill>
                             <a:srgbClr val="FFFFFF"/>
                           </a:solidFill>
@@ -8390,7 +8337,7 @@
                     <a:p>
                       <a:pPr algn="ctr"/>
                       <a:r>
-                        <a:rPr b="1" sz="1300">
+                        <a:rPr sz="1300" b="1">
                           <a:solidFill>
                             <a:srgbClr val="FFFFFF"/>
                           </a:solidFill>
@@ -8413,7 +8360,7 @@
                     <a:p>
                       <a:pPr algn="ctr"/>
                       <a:r>
-                        <a:rPr b="1" sz="1300">
+                        <a:rPr sz="1300" b="1">
                           <a:solidFill>
                             <a:srgbClr val="FFFFFF"/>
                           </a:solidFill>
@@ -8436,7 +8383,7 @@
                     <a:p>
                       <a:pPr algn="ctr"/>
                       <a:r>
-                        <a:rPr b="1" sz="1300">
+                        <a:rPr sz="1300" b="1">
                           <a:solidFill>
                             <a:srgbClr val="FFFFFF"/>
                           </a:solidFill>
@@ -8459,7 +8406,7 @@
                     <a:p>
                       <a:pPr algn="ctr"/>
                       <a:r>
-                        <a:rPr b="1" sz="1300">
+                        <a:rPr sz="1300" b="1">
                           <a:solidFill>
                             <a:srgbClr val="FFFFFF"/>
                           </a:solidFill>
@@ -8475,6 +8422,11 @@
                     </a:solidFill>
                   </a:tcPr>
                 </a:tc>
+                <a:extLst>
+                  <a:ext uri="{0D108BD9-81ED-4DB2-BD59-A6C34878D82A}">
+                    <a16:rowId xmlns:a16="http://schemas.microsoft.com/office/drawing/2014/main" val="10000"/>
+                  </a:ext>
+                </a:extLst>
               </a:tr>
               <a:tr h="331470">
                 <a:tc>
@@ -8592,6 +8544,11 @@
                     </a:solidFill>
                   </a:tcPr>
                 </a:tc>
+                <a:extLst>
+                  <a:ext uri="{0D108BD9-81ED-4DB2-BD59-A6C34878D82A}">
+                    <a16:rowId xmlns:a16="http://schemas.microsoft.com/office/drawing/2014/main" val="10001"/>
+                  </a:ext>
+                </a:extLst>
               </a:tr>
               <a:tr h="331470">
                 <a:tc>
@@ -8709,6 +8666,11 @@
                     </a:solidFill>
                   </a:tcPr>
                 </a:tc>
+                <a:extLst>
+                  <a:ext uri="{0D108BD9-81ED-4DB2-BD59-A6C34878D82A}">
+                    <a16:rowId xmlns:a16="http://schemas.microsoft.com/office/drawing/2014/main" val="10002"/>
+                  </a:ext>
+                </a:extLst>
               </a:tr>
               <a:tr h="331470">
                 <a:tc>
@@ -8826,6 +8788,11 @@
                     </a:solidFill>
                   </a:tcPr>
                 </a:tc>
+                <a:extLst>
+                  <a:ext uri="{0D108BD9-81ED-4DB2-BD59-A6C34878D82A}">
+                    <a16:rowId xmlns:a16="http://schemas.microsoft.com/office/drawing/2014/main" val="10003"/>
+                  </a:ext>
+                </a:extLst>
               </a:tr>
             </a:tbl>
           </a:graphicData>
@@ -8867,7 +8834,7 @@
           </a:fontRef>
         </p:style>
         <p:txBody>
-          <a:bodyPr rtlCol="0" anchor="ctr" wrap="square" lIns="109728" rIns="109728" tIns="73152" bIns="73152"/>
+          <a:bodyPr wrap="square" lIns="109728" tIns="73152" rIns="109728" bIns="73152" rtlCol="0" anchor="ctr"/>
           <a:lstStyle/>
           <a:p>
             <a:pPr algn="ctr"/>
@@ -8892,7 +8859,7 @@
 </file>
 
 <file path=ppt/slides/slide15.xml><?xml version="1.0" encoding="utf-8"?>
-<p:sld xmlns:a="http://schemas.openxmlformats.org/drawingml/2006/main" xmlns:p="http://schemas.openxmlformats.org/presentationml/2006/main" xmlns:r="http://schemas.openxmlformats.org/officeDocument/2006/relationships">
+<p:sld xmlns:a="http://schemas.openxmlformats.org/drawingml/2006/main" xmlns:r="http://schemas.openxmlformats.org/officeDocument/2006/relationships" xmlns:p="http://schemas.openxmlformats.org/presentationml/2006/main">
   <p:cSld>
     <p:bg>
       <p:bgPr>
@@ -8908,7 +8875,14 @@
         <p:cNvGrpSpPr/>
         <p:nvPr/>
       </p:nvGrpSpPr>
-      <p:grpSpPr/>
+      <p:grpSpPr>
+        <a:xfrm>
+          <a:off x="0" y="0"/>
+          <a:ext cx="0" cy="0"/>
+          <a:chOff x="0" y="0"/>
+          <a:chExt cx="0" cy="0"/>
+        </a:xfrm>
+      </p:grpSpPr>
       <p:sp>
         <p:nvSpPr>
           <p:cNvPr id="2" name="Rectangle 1"/>
@@ -8949,6 +8923,7 @@
           <a:lstStyle/>
           <a:p>
             <a:pPr algn="ctr"/>
+            <a:endParaRPr/>
           </a:p>
         </p:txBody>
       </p:sp>
@@ -9027,6 +9002,7 @@
           <a:lstStyle/>
           <a:p>
             <a:pPr algn="ctr"/>
+            <a:endParaRPr/>
           </a:p>
         </p:txBody>
       </p:sp>
@@ -9138,7 +9114,7 @@
           </a:fontRef>
         </p:style>
         <p:txBody>
-          <a:bodyPr rtlCol="0" anchor="ctr" wrap="square" lIns="109728" rIns="109728" tIns="73152" bIns="73152"/>
+          <a:bodyPr wrap="square" lIns="109728" tIns="73152" rIns="109728" bIns="73152" rtlCol="0" anchor="ctr"/>
           <a:lstStyle/>
           <a:p>
             <a:pPr algn="ctr"/>
@@ -9227,7 +9203,7 @@
           </a:fontRef>
         </p:style>
         <p:txBody>
-          <a:bodyPr rtlCol="0" anchor="ctr" wrap="square" lIns="109728" rIns="109728" tIns="73152" bIns="73152"/>
+          <a:bodyPr wrap="square" lIns="109728" tIns="73152" rIns="109728" bIns="73152" rtlCol="0" anchor="ctr"/>
           <a:lstStyle/>
           <a:p>
             <a:pPr algn="ctr"/>
@@ -9281,7 +9257,7 @@
           </a:fontRef>
         </p:style>
         <p:txBody>
-          <a:bodyPr rtlCol="0" anchor="t" wrap="square" lIns="137160" rIns="137160" tIns="109728" bIns="109728"/>
+          <a:bodyPr wrap="square" lIns="137160" tIns="109728" rIns="137160" bIns="109728" rtlCol="0" anchor="t"/>
           <a:lstStyle/>
           <a:p>
             <a:pPr algn="l"/>
@@ -9347,7 +9323,7 @@
           </a:fontRef>
         </p:style>
         <p:txBody>
-          <a:bodyPr rtlCol="0" anchor="t" wrap="square" lIns="137160" rIns="137160" tIns="109728" bIns="109728"/>
+          <a:bodyPr wrap="square" lIns="137160" tIns="109728" rIns="137160" bIns="109728" rtlCol="0" anchor="t"/>
           <a:lstStyle/>
           <a:p>
             <a:pPr algn="l"/>
@@ -9413,7 +9389,7 @@
           </a:fontRef>
         </p:style>
         <p:txBody>
-          <a:bodyPr rtlCol="0" anchor="t" wrap="square" lIns="137160" rIns="137160" tIns="109728" bIns="109728"/>
+          <a:bodyPr wrap="square" lIns="137160" tIns="109728" rIns="137160" bIns="109728" rtlCol="0" anchor="t"/>
           <a:lstStyle/>
           <a:p>
             <a:pPr algn="l"/>
@@ -9479,7 +9455,7 @@
           </a:fontRef>
         </p:style>
         <p:txBody>
-          <a:bodyPr rtlCol="0" anchor="t" wrap="square" lIns="137160" rIns="137160" tIns="109728" bIns="109728"/>
+          <a:bodyPr wrap="square" lIns="137160" tIns="109728" rIns="137160" bIns="109728" rtlCol="0" anchor="t"/>
           <a:lstStyle/>
           <a:p>
             <a:pPr algn="l"/>
@@ -9578,7 +9554,7 @@
           </a:fontRef>
         </p:style>
         <p:txBody>
-          <a:bodyPr rtlCol="0" anchor="ctr" wrap="square" lIns="109728" rIns="109728" tIns="73152" bIns="73152"/>
+          <a:bodyPr wrap="square" lIns="109728" tIns="73152" rIns="109728" bIns="73152" rtlCol="0" anchor="ctr"/>
           <a:lstStyle/>
           <a:p>
             <a:pPr algn="ctr"/>
@@ -9603,7 +9579,7 @@
 </file>
 
 <file path=ppt/slides/slide16.xml><?xml version="1.0" encoding="utf-8"?>
-<p:sld xmlns:a="http://schemas.openxmlformats.org/drawingml/2006/main" xmlns:p="http://schemas.openxmlformats.org/presentationml/2006/main" xmlns:r="http://schemas.openxmlformats.org/officeDocument/2006/relationships">
+<p:sld xmlns:a="http://schemas.openxmlformats.org/drawingml/2006/main" xmlns:r="http://schemas.openxmlformats.org/officeDocument/2006/relationships" xmlns:p="http://schemas.openxmlformats.org/presentationml/2006/main">
   <p:cSld>
     <p:bg>
       <p:bgPr>
@@ -9619,7 +9595,14 @@
         <p:cNvGrpSpPr/>
         <p:nvPr/>
       </p:nvGrpSpPr>
-      <p:grpSpPr/>
+      <p:grpSpPr>
+        <a:xfrm>
+          <a:off x="0" y="0"/>
+          <a:ext cx="0" cy="0"/>
+          <a:chOff x="0" y="0"/>
+          <a:chExt cx="0" cy="0"/>
+        </a:xfrm>
+      </p:grpSpPr>
       <p:sp>
         <p:nvSpPr>
           <p:cNvPr id="2" name="Rectangle 1"/>
@@ -9660,6 +9643,7 @@
           <a:lstStyle/>
           <a:p>
             <a:pPr algn="ctr"/>
+            <a:endParaRPr/>
           </a:p>
         </p:txBody>
       </p:sp>
@@ -9738,6 +9722,7 @@
           <a:lstStyle/>
           <a:p>
             <a:pPr algn="ctr"/>
+            <a:endParaRPr/>
           </a:p>
         </p:txBody>
       </p:sp>
@@ -9830,11 +9815,41 @@
                 <a:tableStyleId>{5C22544A-7EE6-4342-B048-85BDC9FD1C3A}</a:tableStyleId>
               </a:tblPr>
               <a:tblGrid>
-                <a:gridCol w="2926080"/>
-                <a:gridCol w="1920240"/>
-                <a:gridCol w="1828800"/>
-                <a:gridCol w="1920240"/>
-                <a:gridCol w="1737360"/>
+                <a:gridCol w="2926080">
+                  <a:extLst>
+                    <a:ext uri="{9D8B030D-6E8A-4147-A177-3AD203B41FA5}">
+                      <a16:colId xmlns:a16="http://schemas.microsoft.com/office/drawing/2014/main" val="20000"/>
+                    </a:ext>
+                  </a:extLst>
+                </a:gridCol>
+                <a:gridCol w="1920240">
+                  <a:extLst>
+                    <a:ext uri="{9D8B030D-6E8A-4147-A177-3AD203B41FA5}">
+                      <a16:colId xmlns:a16="http://schemas.microsoft.com/office/drawing/2014/main" val="20001"/>
+                    </a:ext>
+                  </a:extLst>
+                </a:gridCol>
+                <a:gridCol w="1828800">
+                  <a:extLst>
+                    <a:ext uri="{9D8B030D-6E8A-4147-A177-3AD203B41FA5}">
+                      <a16:colId xmlns:a16="http://schemas.microsoft.com/office/drawing/2014/main" val="20002"/>
+                    </a:ext>
+                  </a:extLst>
+                </a:gridCol>
+                <a:gridCol w="1920240">
+                  <a:extLst>
+                    <a:ext uri="{9D8B030D-6E8A-4147-A177-3AD203B41FA5}">
+                      <a16:colId xmlns:a16="http://schemas.microsoft.com/office/drawing/2014/main" val="20003"/>
+                    </a:ext>
+                  </a:extLst>
+                </a:gridCol>
+                <a:gridCol w="1737360">
+                  <a:extLst>
+                    <a:ext uri="{9D8B030D-6E8A-4147-A177-3AD203B41FA5}">
+                      <a16:colId xmlns:a16="http://schemas.microsoft.com/office/drawing/2014/main" val="20004"/>
+                    </a:ext>
+                  </a:extLst>
+                </a:gridCol>
               </a:tblGrid>
               <a:tr h="420624">
                 <a:tc>
@@ -9844,7 +9859,7 @@
                     <a:p>
                       <a:pPr algn="ctr"/>
                       <a:r>
-                        <a:rPr b="1" sz="1300">
+                        <a:rPr sz="1300" b="1">
                           <a:solidFill>
                             <a:srgbClr val="FFFFFF"/>
                           </a:solidFill>
@@ -9867,7 +9882,7 @@
                     <a:p>
                       <a:pPr algn="ctr"/>
                       <a:r>
-                        <a:rPr b="1" sz="1300">
+                        <a:rPr sz="1300" b="1">
                           <a:solidFill>
                             <a:srgbClr val="FFFFFF"/>
                           </a:solidFill>
@@ -9890,7 +9905,7 @@
                     <a:p>
                       <a:pPr algn="ctr"/>
                       <a:r>
-                        <a:rPr b="1" sz="1300">
+                        <a:rPr sz="1300" b="1">
                           <a:solidFill>
                             <a:srgbClr val="FFFFFF"/>
                           </a:solidFill>
@@ -9913,7 +9928,7 @@
                     <a:p>
                       <a:pPr algn="ctr"/>
                       <a:r>
-                        <a:rPr b="1" sz="1300">
+                        <a:rPr sz="1300" b="1">
                           <a:solidFill>
                             <a:srgbClr val="FFFFFF"/>
                           </a:solidFill>
@@ -9936,7 +9951,7 @@
                     <a:p>
                       <a:pPr algn="ctr"/>
                       <a:r>
-                        <a:rPr b="1" sz="1300">
+                        <a:rPr sz="1300" b="1">
                           <a:solidFill>
                             <a:srgbClr val="FFFFFF"/>
                           </a:solidFill>
@@ -9952,6 +9967,11 @@
                     </a:solidFill>
                   </a:tcPr>
                 </a:tc>
+                <a:extLst>
+                  <a:ext uri="{0D108BD9-81ED-4DB2-BD59-A6C34878D82A}">
+                    <a16:rowId xmlns:a16="http://schemas.microsoft.com/office/drawing/2014/main" val="10000"/>
+                  </a:ext>
+                </a:extLst>
               </a:tr>
               <a:tr h="420624">
                 <a:tc>
@@ -10069,6 +10089,11 @@
                     </a:solidFill>
                   </a:tcPr>
                 </a:tc>
+                <a:extLst>
+                  <a:ext uri="{0D108BD9-81ED-4DB2-BD59-A6C34878D82A}">
+                    <a16:rowId xmlns:a16="http://schemas.microsoft.com/office/drawing/2014/main" val="10001"/>
+                  </a:ext>
+                </a:extLst>
               </a:tr>
               <a:tr h="420624">
                 <a:tc>
@@ -10186,6 +10211,11 @@
                     </a:solidFill>
                   </a:tcPr>
                 </a:tc>
+                <a:extLst>
+                  <a:ext uri="{0D108BD9-81ED-4DB2-BD59-A6C34878D82A}">
+                    <a16:rowId xmlns:a16="http://schemas.microsoft.com/office/drawing/2014/main" val="10002"/>
+                  </a:ext>
+                </a:extLst>
               </a:tr>
               <a:tr h="420624">
                 <a:tc>
@@ -10303,6 +10333,11 @@
                     </a:solidFill>
                   </a:tcPr>
                 </a:tc>
+                <a:extLst>
+                  <a:ext uri="{0D108BD9-81ED-4DB2-BD59-A6C34878D82A}">
+                    <a16:rowId xmlns:a16="http://schemas.microsoft.com/office/drawing/2014/main" val="10003"/>
+                  </a:ext>
+                </a:extLst>
               </a:tr>
               <a:tr h="420624">
                 <a:tc>
@@ -10420,6 +10455,11 @@
                     </a:solidFill>
                   </a:tcPr>
                 </a:tc>
+                <a:extLst>
+                  <a:ext uri="{0D108BD9-81ED-4DB2-BD59-A6C34878D82A}">
+                    <a16:rowId xmlns:a16="http://schemas.microsoft.com/office/drawing/2014/main" val="10004"/>
+                  </a:ext>
+                </a:extLst>
               </a:tr>
               <a:tr h="420624">
                 <a:tc>
@@ -10537,6 +10577,11 @@
                     </a:solidFill>
                   </a:tcPr>
                 </a:tc>
+                <a:extLst>
+                  <a:ext uri="{0D108BD9-81ED-4DB2-BD59-A6C34878D82A}">
+                    <a16:rowId xmlns:a16="http://schemas.microsoft.com/office/drawing/2014/main" val="10005"/>
+                  </a:ext>
+                </a:extLst>
               </a:tr>
               <a:tr h="420624">
                 <a:tc>
@@ -10654,6 +10699,11 @@
                     </a:solidFill>
                   </a:tcPr>
                 </a:tc>
+                <a:extLst>
+                  <a:ext uri="{0D108BD9-81ED-4DB2-BD59-A6C34878D82A}">
+                    <a16:rowId xmlns:a16="http://schemas.microsoft.com/office/drawing/2014/main" val="10006"/>
+                  </a:ext>
+                </a:extLst>
               </a:tr>
               <a:tr h="420624">
                 <a:tc>
@@ -10771,6 +10821,11 @@
                     </a:solidFill>
                   </a:tcPr>
                 </a:tc>
+                <a:extLst>
+                  <a:ext uri="{0D108BD9-81ED-4DB2-BD59-A6C34878D82A}">
+                    <a16:rowId xmlns:a16="http://schemas.microsoft.com/office/drawing/2014/main" val="10007"/>
+                  </a:ext>
+                </a:extLst>
               </a:tr>
               <a:tr h="420624">
                 <a:tc>
@@ -10888,6 +10943,11 @@
                     </a:solidFill>
                   </a:tcPr>
                 </a:tc>
+                <a:extLst>
+                  <a:ext uri="{0D108BD9-81ED-4DB2-BD59-A6C34878D82A}">
+                    <a16:rowId xmlns:a16="http://schemas.microsoft.com/office/drawing/2014/main" val="10008"/>
+                  </a:ext>
+                </a:extLst>
               </a:tr>
               <a:tr h="420624">
                 <a:tc>
@@ -11005,6 +11065,11 @@
                     </a:solidFill>
                   </a:tcPr>
                 </a:tc>
+                <a:extLst>
+                  <a:ext uri="{0D108BD9-81ED-4DB2-BD59-A6C34878D82A}">
+                    <a16:rowId xmlns:a16="http://schemas.microsoft.com/office/drawing/2014/main" val="10009"/>
+                  </a:ext>
+                </a:extLst>
               </a:tr>
             </a:tbl>
           </a:graphicData>
@@ -11019,7 +11084,7 @@
 </file>
 
 <file path=ppt/slides/slide17.xml><?xml version="1.0" encoding="utf-8"?>
-<p:sld xmlns:a="http://schemas.openxmlformats.org/drawingml/2006/main" xmlns:p="http://schemas.openxmlformats.org/presentationml/2006/main" xmlns:r="http://schemas.openxmlformats.org/officeDocument/2006/relationships">
+<p:sld xmlns:a="http://schemas.openxmlformats.org/drawingml/2006/main" xmlns:r="http://schemas.openxmlformats.org/officeDocument/2006/relationships" xmlns:p="http://schemas.openxmlformats.org/presentationml/2006/main">
   <p:cSld>
     <p:bg>
       <p:bgPr>
@@ -11035,7 +11100,14 @@
         <p:cNvGrpSpPr/>
         <p:nvPr/>
       </p:nvGrpSpPr>
-      <p:grpSpPr/>
+      <p:grpSpPr>
+        <a:xfrm>
+          <a:off x="0" y="0"/>
+          <a:ext cx="0" cy="0"/>
+          <a:chOff x="0" y="0"/>
+          <a:chExt cx="0" cy="0"/>
+        </a:xfrm>
+      </p:grpSpPr>
       <p:sp>
         <p:nvSpPr>
           <p:cNvPr id="2" name="Rectangle 1"/>
@@ -11076,6 +11148,7 @@
           <a:lstStyle/>
           <a:p>
             <a:pPr algn="ctr"/>
+            <a:endParaRPr/>
           </a:p>
         </p:txBody>
       </p:sp>
@@ -11154,6 +11227,7 @@
           <a:lstStyle/>
           <a:p>
             <a:pPr algn="ctr"/>
+            <a:endParaRPr/>
           </a:p>
         </p:txBody>
       </p:sp>
@@ -11246,9 +11320,27 @@
                 <a:tableStyleId>{5C22544A-7EE6-4342-B048-85BDC9FD1C3A}</a:tableStyleId>
               </a:tblPr>
               <a:tblGrid>
-                <a:gridCol w="2743200"/>
-                <a:gridCol w="3749039"/>
-                <a:gridCol w="3931920"/>
+                <a:gridCol w="2743200">
+                  <a:extLst>
+                    <a:ext uri="{9D8B030D-6E8A-4147-A177-3AD203B41FA5}">
+                      <a16:colId xmlns:a16="http://schemas.microsoft.com/office/drawing/2014/main" val="20000"/>
+                    </a:ext>
+                  </a:extLst>
+                </a:gridCol>
+                <a:gridCol w="3749039">
+                  <a:extLst>
+                    <a:ext uri="{9D8B030D-6E8A-4147-A177-3AD203B41FA5}">
+                      <a16:colId xmlns:a16="http://schemas.microsoft.com/office/drawing/2014/main" val="20001"/>
+                    </a:ext>
+                  </a:extLst>
+                </a:gridCol>
+                <a:gridCol w="3931920">
+                  <a:extLst>
+                    <a:ext uri="{9D8B030D-6E8A-4147-A177-3AD203B41FA5}">
+                      <a16:colId xmlns:a16="http://schemas.microsoft.com/office/drawing/2014/main" val="20002"/>
+                    </a:ext>
+                  </a:extLst>
+                </a:gridCol>
               </a:tblGrid>
               <a:tr h="434340">
                 <a:tc>
@@ -11258,7 +11350,7 @@
                     <a:p>
                       <a:pPr algn="ctr"/>
                       <a:r>
-                        <a:rPr b="1" sz="1300">
+                        <a:rPr sz="1300" b="1">
                           <a:solidFill>
                             <a:srgbClr val="FFFFFF"/>
                           </a:solidFill>
@@ -11281,7 +11373,7 @@
                     <a:p>
                       <a:pPr algn="ctr"/>
                       <a:r>
-                        <a:rPr b="1" sz="1300">
+                        <a:rPr sz="1300" b="1">
                           <a:solidFill>
                             <a:srgbClr val="FFFFFF"/>
                           </a:solidFill>
@@ -11304,7 +11396,7 @@
                     <a:p>
                       <a:pPr algn="ctr"/>
                       <a:r>
-                        <a:rPr b="1" sz="1300">
+                        <a:rPr sz="1300" b="1">
                           <a:solidFill>
                             <a:srgbClr val="FFFFFF"/>
                           </a:solidFill>
@@ -11320,6 +11412,11 @@
                     </a:solidFill>
                   </a:tcPr>
                 </a:tc>
+                <a:extLst>
+                  <a:ext uri="{0D108BD9-81ED-4DB2-BD59-A6C34878D82A}">
+                    <a16:rowId xmlns:a16="http://schemas.microsoft.com/office/drawing/2014/main" val="10000"/>
+                  </a:ext>
+                </a:extLst>
               </a:tr>
               <a:tr h="434340">
                 <a:tc>
@@ -11391,6 +11488,11 @@
                     </a:solidFill>
                   </a:tcPr>
                 </a:tc>
+                <a:extLst>
+                  <a:ext uri="{0D108BD9-81ED-4DB2-BD59-A6C34878D82A}">
+                    <a16:rowId xmlns:a16="http://schemas.microsoft.com/office/drawing/2014/main" val="10001"/>
+                  </a:ext>
+                </a:extLst>
               </a:tr>
               <a:tr h="434340">
                 <a:tc>
@@ -11462,6 +11564,11 @@
                     </a:solidFill>
                   </a:tcPr>
                 </a:tc>
+                <a:extLst>
+                  <a:ext uri="{0D108BD9-81ED-4DB2-BD59-A6C34878D82A}">
+                    <a16:rowId xmlns:a16="http://schemas.microsoft.com/office/drawing/2014/main" val="10002"/>
+                  </a:ext>
+                </a:extLst>
               </a:tr>
               <a:tr h="434340">
                 <a:tc>
@@ -11533,6 +11640,11 @@
                     </a:solidFill>
                   </a:tcPr>
                 </a:tc>
+                <a:extLst>
+                  <a:ext uri="{0D108BD9-81ED-4DB2-BD59-A6C34878D82A}">
+                    <a16:rowId xmlns:a16="http://schemas.microsoft.com/office/drawing/2014/main" val="10003"/>
+                  </a:ext>
+                </a:extLst>
               </a:tr>
               <a:tr h="434340">
                 <a:tc>
@@ -11604,6 +11716,11 @@
                     </a:solidFill>
                   </a:tcPr>
                 </a:tc>
+                <a:extLst>
+                  <a:ext uri="{0D108BD9-81ED-4DB2-BD59-A6C34878D82A}">
+                    <a16:rowId xmlns:a16="http://schemas.microsoft.com/office/drawing/2014/main" val="10004"/>
+                  </a:ext>
+                </a:extLst>
               </a:tr>
               <a:tr h="434340">
                 <a:tc>
@@ -11675,6 +11792,11 @@
                     </a:solidFill>
                   </a:tcPr>
                 </a:tc>
+                <a:extLst>
+                  <a:ext uri="{0D108BD9-81ED-4DB2-BD59-A6C34878D82A}">
+                    <a16:rowId xmlns:a16="http://schemas.microsoft.com/office/drawing/2014/main" val="10005"/>
+                  </a:ext>
+                </a:extLst>
               </a:tr>
               <a:tr h="434340">
                 <a:tc>
@@ -11746,6 +11868,11 @@
                     </a:solidFill>
                   </a:tcPr>
                 </a:tc>
+                <a:extLst>
+                  <a:ext uri="{0D108BD9-81ED-4DB2-BD59-A6C34878D82A}">
+                    <a16:rowId xmlns:a16="http://schemas.microsoft.com/office/drawing/2014/main" val="10006"/>
+                  </a:ext>
+                </a:extLst>
               </a:tr>
               <a:tr h="434340">
                 <a:tc>
@@ -11817,6 +11944,11 @@
                     </a:solidFill>
                   </a:tcPr>
                 </a:tc>
+                <a:extLst>
+                  <a:ext uri="{0D108BD9-81ED-4DB2-BD59-A6C34878D82A}">
+                    <a16:rowId xmlns:a16="http://schemas.microsoft.com/office/drawing/2014/main" val="10007"/>
+                  </a:ext>
+                </a:extLst>
               </a:tr>
               <a:tr h="434340">
                 <a:tc>
@@ -11888,6 +12020,11 @@
                     </a:solidFill>
                   </a:tcPr>
                 </a:tc>
+                <a:extLst>
+                  <a:ext uri="{0D108BD9-81ED-4DB2-BD59-A6C34878D82A}">
+                    <a16:rowId xmlns:a16="http://schemas.microsoft.com/office/drawing/2014/main" val="10008"/>
+                  </a:ext>
+                </a:extLst>
               </a:tr>
               <a:tr h="434340">
                 <a:tc>
@@ -11959,6 +12096,11 @@
                     </a:solidFill>
                   </a:tcPr>
                 </a:tc>
+                <a:extLst>
+                  <a:ext uri="{0D108BD9-81ED-4DB2-BD59-A6C34878D82A}">
+                    <a16:rowId xmlns:a16="http://schemas.microsoft.com/office/drawing/2014/main" val="10009"/>
+                  </a:ext>
+                </a:extLst>
               </a:tr>
             </a:tbl>
           </a:graphicData>
@@ -11973,7 +12115,7 @@
 </file>
 
 <file path=ppt/slides/slide2.xml><?xml version="1.0" encoding="utf-8"?>
-<p:sld xmlns:a="http://schemas.openxmlformats.org/drawingml/2006/main" xmlns:p="http://schemas.openxmlformats.org/presentationml/2006/main" xmlns:r="http://schemas.openxmlformats.org/officeDocument/2006/relationships">
+<p:sld xmlns:a="http://schemas.openxmlformats.org/drawingml/2006/main" xmlns:r="http://schemas.openxmlformats.org/officeDocument/2006/relationships" xmlns:p="http://schemas.openxmlformats.org/presentationml/2006/main">
   <p:cSld>
     <p:bg>
       <p:bgPr>
@@ -11989,7 +12131,14 @@
         <p:cNvGrpSpPr/>
         <p:nvPr/>
       </p:nvGrpSpPr>
-      <p:grpSpPr/>
+      <p:grpSpPr>
+        <a:xfrm>
+          <a:off x="0" y="0"/>
+          <a:ext cx="0" cy="0"/>
+          <a:chOff x="0" y="0"/>
+          <a:chExt cx="0" cy="0"/>
+        </a:xfrm>
+      </p:grpSpPr>
       <p:sp>
         <p:nvSpPr>
           <p:cNvPr id="2" name="Rectangle 1"/>
@@ -12030,6 +12179,7 @@
           <a:lstStyle/>
           <a:p>
             <a:pPr algn="ctr"/>
+            <a:endParaRPr/>
           </a:p>
         </p:txBody>
       </p:sp>
@@ -12108,6 +12258,7 @@
           <a:lstStyle/>
           <a:p>
             <a:pPr algn="ctr"/>
+            <a:endParaRPr/>
           </a:p>
         </p:txBody>
       </p:sp>
@@ -12219,7 +12370,7 @@
           </a:fontRef>
         </p:style>
         <p:txBody>
-          <a:bodyPr rtlCol="0" anchor="t" wrap="square" lIns="137160" rIns="137160" tIns="109728" bIns="109728"/>
+          <a:bodyPr wrap="square" lIns="137160" tIns="109728" rIns="137160" bIns="109728" rtlCol="0" anchor="t"/>
           <a:lstStyle/>
           <a:p>
             <a:pPr algn="l"/>
@@ -12247,15 +12398,12 @@
           </a:p>
           <a:p>
             <a:pPr algn="l"/>
-            <a:r>
-              <a:rPr sz="800" b="0">
-                <a:solidFill>
-                  <a:srgbClr val="1A202C"/>
-                </a:solidFill>
-                <a:latin typeface="Calibri"/>
-              </a:rPr>
-              <a:t/>
-            </a:r>
+            <a:endParaRPr sz="1500" b="0">
+              <a:solidFill>
+                <a:srgbClr val="1A202C"/>
+              </a:solidFill>
+              <a:latin typeface="Calibri"/>
+            </a:endParaRPr>
           </a:p>
           <a:p>
             <a:pPr algn="l"/>
@@ -12309,7 +12457,7 @@
           </a:fontRef>
         </p:style>
         <p:txBody>
-          <a:bodyPr rtlCol="0" anchor="t" wrap="square" lIns="137160" rIns="137160" tIns="109728" bIns="109728"/>
+          <a:bodyPr wrap="square" lIns="137160" tIns="109728" rIns="137160" bIns="109728" rtlCol="0" anchor="t"/>
           <a:lstStyle/>
           <a:p>
             <a:pPr algn="l"/>
@@ -12337,15 +12485,12 @@
           </a:p>
           <a:p>
             <a:pPr algn="l"/>
-            <a:r>
-              <a:rPr sz="800" b="0">
-                <a:solidFill>
-                  <a:srgbClr val="1A202C"/>
-                </a:solidFill>
-                <a:latin typeface="Calibri"/>
-              </a:rPr>
-              <a:t/>
-            </a:r>
+            <a:endParaRPr sz="1500" b="0">
+              <a:solidFill>
+                <a:srgbClr val="1A202C"/>
+              </a:solidFill>
+              <a:latin typeface="Calibri"/>
+            </a:endParaRPr>
           </a:p>
           <a:p>
             <a:pPr algn="l"/>
@@ -12397,7 +12542,7 @@
           </a:fontRef>
         </p:style>
         <p:txBody>
-          <a:bodyPr rtlCol="0" anchor="ctr" wrap="square" lIns="109728" rIns="109728" tIns="73152" bIns="73152"/>
+          <a:bodyPr wrap="square" lIns="109728" tIns="73152" rIns="109728" bIns="73152" rtlCol="0" anchor="ctr"/>
           <a:lstStyle/>
           <a:p>
             <a:pPr algn="ctr"/>
@@ -12451,7 +12596,7 @@
           </a:fontRef>
         </p:style>
         <p:txBody>
-          <a:bodyPr rtlCol="0" anchor="ctr" wrap="square" lIns="109728" rIns="109728" tIns="73152" bIns="73152"/>
+          <a:bodyPr wrap="square" lIns="109728" tIns="73152" rIns="109728" bIns="73152" rtlCol="0" anchor="ctr"/>
           <a:lstStyle/>
           <a:p>
             <a:pPr algn="l"/>
@@ -12503,7 +12648,7 @@
           </a:fontRef>
         </p:style>
         <p:txBody>
-          <a:bodyPr rtlCol="0" anchor="ctr" wrap="square" lIns="109728" rIns="109728" tIns="73152" bIns="73152"/>
+          <a:bodyPr wrap="square" lIns="109728" tIns="73152" rIns="109728" bIns="73152" rtlCol="0" anchor="ctr"/>
           <a:lstStyle/>
           <a:p>
             <a:pPr algn="ctr"/>
@@ -12528,7 +12673,7 @@
 </file>
 
 <file path=ppt/slides/slide3.xml><?xml version="1.0" encoding="utf-8"?>
-<p:sld xmlns:a="http://schemas.openxmlformats.org/drawingml/2006/main" xmlns:p="http://schemas.openxmlformats.org/presentationml/2006/main" xmlns:r="http://schemas.openxmlformats.org/officeDocument/2006/relationships">
+<p:sld xmlns:a="http://schemas.openxmlformats.org/drawingml/2006/main" xmlns:r="http://schemas.openxmlformats.org/officeDocument/2006/relationships" xmlns:p="http://schemas.openxmlformats.org/presentationml/2006/main">
   <p:cSld>
     <p:bg>
       <p:bgPr>
@@ -12544,7 +12689,14 @@
         <p:cNvGrpSpPr/>
         <p:nvPr/>
       </p:nvGrpSpPr>
-      <p:grpSpPr/>
+      <p:grpSpPr>
+        <a:xfrm>
+          <a:off x="0" y="0"/>
+          <a:ext cx="0" cy="0"/>
+          <a:chOff x="0" y="0"/>
+          <a:chExt cx="0" cy="0"/>
+        </a:xfrm>
+      </p:grpSpPr>
       <p:sp>
         <p:nvSpPr>
           <p:cNvPr id="2" name="Rectangle 1"/>
@@ -12585,6 +12737,7 @@
           <a:lstStyle/>
           <a:p>
             <a:pPr algn="ctr"/>
+            <a:endParaRPr/>
           </a:p>
         </p:txBody>
       </p:sp>
@@ -12663,6 +12816,7 @@
           <a:lstStyle/>
           <a:p>
             <a:pPr algn="ctr"/>
+            <a:endParaRPr/>
           </a:p>
         </p:txBody>
       </p:sp>
@@ -12774,7 +12928,7 @@
           </a:fontRef>
         </p:style>
         <p:txBody>
-          <a:bodyPr rtlCol="0" anchor="t" wrap="square" lIns="137160" rIns="137160" tIns="109728" bIns="109728"/>
+          <a:bodyPr wrap="square" lIns="137160" tIns="109728" rIns="137160" bIns="109728" rtlCol="0" anchor="t"/>
           <a:lstStyle/>
           <a:p>
             <a:pPr algn="l"/>
@@ -12790,14 +12944,23 @@
           </a:p>
           <a:p>
             <a:pPr algn="l"/>
-            <a:r>
-              <a:rPr sz="600" b="0">
+            <a:endParaRPr sz="1400" b="1">
+              <a:solidFill>
+                <a:srgbClr val="1E3659"/>
+              </a:solidFill>
+              <a:latin typeface="Calibri"/>
+            </a:endParaRPr>
+          </a:p>
+          <a:p>
+            <a:pPr algn="l"/>
+            <a:r>
+              <a:rPr sz="1600" b="1">
                 <a:solidFill>
                   <a:srgbClr val="1A202C"/>
                 </a:solidFill>
                 <a:latin typeface="Calibri"/>
               </a:rPr>
-              <a:t/>
+              <a:t>10,039   utterances</a:t>
             </a:r>
           </a:p>
           <a:p>
@@ -12809,7 +12972,7 @@
                 </a:solidFill>
                 <a:latin typeface="Calibri"/>
               </a:rPr>
-              <a:t>10,039   utterances</a:t>
+              <a:t>10           speakers (5F + 5M)</a:t>
             </a:r>
           </a:p>
           <a:p>
@@ -12821,7 +12984,7 @@
                 </a:solidFill>
                 <a:latin typeface="Calibri"/>
               </a:rPr>
-              <a:t>10           speakers (5F + 5M)</a:t>
+              <a:t>5             dyadic sessions</a:t>
             </a:r>
           </a:p>
           <a:p>
@@ -12833,32 +12996,17 @@
                 </a:solidFill>
                 <a:latin typeface="Calibri"/>
               </a:rPr>
-              <a:t>5             dyadic sessions</a:t>
+              <a:t>10           original emotion labels</a:t>
             </a:r>
           </a:p>
           <a:p>
             <a:pPr algn="l"/>
-            <a:r>
-              <a:rPr sz="1600" b="1">
-                <a:solidFill>
-                  <a:srgbClr val="1A202C"/>
-                </a:solidFill>
-                <a:latin typeface="Calibri"/>
-              </a:rPr>
-              <a:t>10           original emotion labels</a:t>
-            </a:r>
-          </a:p>
-          <a:p>
-            <a:pPr algn="l"/>
-            <a:r>
-              <a:rPr sz="600" b="0">
-                <a:solidFill>
-                  <a:srgbClr val="1A202C"/>
-                </a:solidFill>
-                <a:latin typeface="Calibri"/>
-              </a:rPr>
-              <a:t/>
-            </a:r>
+            <a:endParaRPr sz="1600" b="1">
+              <a:solidFill>
+                <a:srgbClr val="1A202C"/>
+              </a:solidFill>
+              <a:latin typeface="Calibri"/>
+            </a:endParaRPr>
           </a:p>
           <a:p>
             <a:pPr algn="l"/>
@@ -12924,7 +13072,7 @@
           </a:fontRef>
         </p:style>
         <p:txBody>
-          <a:bodyPr rtlCol="0" anchor="t" wrap="square" lIns="137160" rIns="137160" tIns="109728" bIns="109728"/>
+          <a:bodyPr wrap="square" lIns="137160" tIns="109728" rIns="137160" bIns="109728" rtlCol="0" anchor="t"/>
           <a:lstStyle/>
           <a:p>
             <a:pPr algn="l"/>
@@ -12940,26 +13088,56 @@
           </a:p>
           <a:p>
             <a:pPr algn="l"/>
-            <a:r>
-              <a:rPr sz="800" b="0">
+            <a:endParaRPr sz="1400" b="1">
+              <a:solidFill>
+                <a:srgbClr val="1E3659"/>
+              </a:solidFill>
+              <a:latin typeface="Calibri"/>
+            </a:endParaRPr>
+          </a:p>
+          <a:p>
+            <a:pPr algn="l"/>
+            <a:r>
+              <a:rPr sz="1400" b="1">
+                <a:solidFill>
+                  <a:srgbClr val="2B6CB0"/>
+                </a:solidFill>
+                <a:latin typeface="Calibri"/>
+              </a:rPr>
+              <a:t>Text transcript</a:t>
+            </a:r>
+          </a:p>
+          <a:p>
+            <a:pPr algn="l"/>
+            <a:r>
+              <a:rPr sz="1300" b="0">
                 <a:solidFill>
                   <a:srgbClr val="1A202C"/>
                 </a:solidFill>
                 <a:latin typeface="Calibri"/>
               </a:rPr>
-              <a:t/>
+              <a:t>"How could you say that to me"</a:t>
             </a:r>
           </a:p>
           <a:p>
             <a:pPr algn="l"/>
+            <a:endParaRPr sz="1300" b="0">
+              <a:solidFill>
+                <a:srgbClr val="1A202C"/>
+              </a:solidFill>
+              <a:latin typeface="Calibri"/>
+            </a:endParaRPr>
+          </a:p>
+          <a:p>
+            <a:pPr algn="l"/>
             <a:r>
               <a:rPr sz="1400" b="1">
                 <a:solidFill>
-                  <a:srgbClr val="2B6CB0"/>
-                </a:solidFill>
-                <a:latin typeface="Calibri"/>
-              </a:rPr>
-              <a:t>Text transcript</a:t>
+                  <a:srgbClr val="6B46C1"/>
+                </a:solidFill>
+                <a:latin typeface="Calibri"/>
+              </a:rPr>
+              <a:t>Raw audio file</a:t>
             </a:r>
           </a:p>
           <a:p>
@@ -12971,56 +13149,17 @@
                 </a:solidFill>
                 <a:latin typeface="Calibri"/>
               </a:rPr>
-              <a:t>"How could you say that to me"</a:t>
+              <a:t>16 kHz waveform, up to 8.5 seconds</a:t>
             </a:r>
           </a:p>
           <a:p>
             <a:pPr algn="l"/>
-            <a:r>
-              <a:rPr sz="800" b="0">
-                <a:solidFill>
-                  <a:srgbClr val="1A202C"/>
-                </a:solidFill>
-                <a:latin typeface="Calibri"/>
-              </a:rPr>
-              <a:t/>
-            </a:r>
-          </a:p>
-          <a:p>
-            <a:pPr algn="l"/>
-            <a:r>
-              <a:rPr sz="1400" b="1">
-                <a:solidFill>
-                  <a:srgbClr val="6B46C1"/>
-                </a:solidFill>
-                <a:latin typeface="Calibri"/>
-              </a:rPr>
-              <a:t>Raw audio file</a:t>
-            </a:r>
-          </a:p>
-          <a:p>
-            <a:pPr algn="l"/>
-            <a:r>
-              <a:rPr sz="1300" b="0">
-                <a:solidFill>
-                  <a:srgbClr val="1A202C"/>
-                </a:solidFill>
-                <a:latin typeface="Calibri"/>
-              </a:rPr>
-              <a:t>16 kHz waveform, up to 8.5 seconds</a:t>
-            </a:r>
-          </a:p>
-          <a:p>
-            <a:pPr algn="l"/>
-            <a:r>
-              <a:rPr sz="800" b="0">
-                <a:solidFill>
-                  <a:srgbClr val="1A202C"/>
-                </a:solidFill>
-                <a:latin typeface="Calibri"/>
-              </a:rPr>
-              <a:t/>
-            </a:r>
+            <a:endParaRPr sz="1300" b="0">
+              <a:solidFill>
+                <a:srgbClr val="1A202C"/>
+              </a:solidFill>
+              <a:latin typeface="Calibri"/>
+            </a:endParaRPr>
           </a:p>
           <a:p>
             <a:pPr algn="l"/>
@@ -13084,7 +13223,7 @@
           </a:fontRef>
         </p:style>
         <p:txBody>
-          <a:bodyPr rtlCol="0" anchor="ctr" wrap="square" lIns="109728" rIns="109728" tIns="73152" bIns="73152"/>
+          <a:bodyPr wrap="square" lIns="109728" tIns="73152" rIns="109728" bIns="73152" rtlCol="0" anchor="ctr"/>
           <a:lstStyle/>
           <a:p>
             <a:pPr algn="ctr"/>
@@ -13109,7 +13248,7 @@
 </file>
 
 <file path=ppt/slides/slide4.xml><?xml version="1.0" encoding="utf-8"?>
-<p:sld xmlns:a="http://schemas.openxmlformats.org/drawingml/2006/main" xmlns:p="http://schemas.openxmlformats.org/presentationml/2006/main" xmlns:r="http://schemas.openxmlformats.org/officeDocument/2006/relationships">
+<p:sld xmlns:a="http://schemas.openxmlformats.org/drawingml/2006/main" xmlns:r="http://schemas.openxmlformats.org/officeDocument/2006/relationships" xmlns:p="http://schemas.openxmlformats.org/presentationml/2006/main">
   <p:cSld>
     <p:bg>
       <p:bgPr>
@@ -13125,7 +13264,14 @@
         <p:cNvGrpSpPr/>
         <p:nvPr/>
       </p:nvGrpSpPr>
-      <p:grpSpPr/>
+      <p:grpSpPr>
+        <a:xfrm>
+          <a:off x="0" y="0"/>
+          <a:ext cx="0" cy="0"/>
+          <a:chOff x="0" y="0"/>
+          <a:chExt cx="0" cy="0"/>
+        </a:xfrm>
+      </p:grpSpPr>
       <p:sp>
         <p:nvSpPr>
           <p:cNvPr id="2" name="Rectangle 1"/>
@@ -13166,6 +13312,7 @@
           <a:lstStyle/>
           <a:p>
             <a:pPr algn="ctr"/>
+            <a:endParaRPr/>
           </a:p>
         </p:txBody>
       </p:sp>
@@ -13244,6 +13391,7 @@
           <a:lstStyle/>
           <a:p>
             <a:pPr algn="ctr"/>
+            <a:endParaRPr/>
           </a:p>
         </p:txBody>
       </p:sp>
@@ -13353,7 +13501,7 @@
           </a:fontRef>
         </p:style>
         <p:txBody>
-          <a:bodyPr rtlCol="0" anchor="ctr" wrap="square" lIns="137160" rIns="137160" tIns="109728" bIns="109728"/>
+          <a:bodyPr wrap="square" lIns="137160" tIns="109728" rIns="137160" bIns="109728" rtlCol="0" anchor="ctr"/>
           <a:lstStyle/>
           <a:p>
             <a:pPr algn="l"/>
@@ -13417,7 +13565,7 @@
           </a:fontRef>
         </p:style>
         <p:txBody>
-          <a:bodyPr rtlCol="0" anchor="ctr" wrap="square" lIns="137160" rIns="137160" tIns="109728" bIns="109728"/>
+          <a:bodyPr wrap="square" lIns="137160" tIns="109728" rIns="137160" bIns="109728" rtlCol="0" anchor="ctr"/>
           <a:lstStyle/>
           <a:p>
             <a:pPr algn="l"/>
@@ -13481,7 +13629,7 @@
           </a:fontRef>
         </p:style>
         <p:txBody>
-          <a:bodyPr rtlCol="0" anchor="ctr" wrap="square" lIns="137160" rIns="137160" tIns="109728" bIns="109728"/>
+          <a:bodyPr wrap="square" lIns="137160" tIns="109728" rIns="137160" bIns="109728" rtlCol="0" anchor="ctr"/>
           <a:lstStyle/>
           <a:p>
             <a:pPr algn="l"/>
@@ -13518,7 +13666,7 @@
           <p:nvPr/>
         </p:nvPicPr>
         <p:blipFill>
-          <a:blip r:embed="rId2"/>
+          <a:blip r:embed="rId3"/>
           <a:stretch>
             <a:fillRect/>
           </a:stretch>
@@ -13569,7 +13717,7 @@
           </a:fontRef>
         </p:style>
         <p:txBody>
-          <a:bodyPr rtlCol="0" anchor="ctr" wrap="square" lIns="109728" rIns="109728" tIns="73152" bIns="73152"/>
+          <a:bodyPr wrap="square" lIns="109728" tIns="73152" rIns="109728" bIns="73152" rtlCol="0" anchor="ctr"/>
           <a:lstStyle/>
           <a:p>
             <a:pPr algn="ctr"/>
@@ -13594,7 +13742,7 @@
 </file>
 
 <file path=ppt/slides/slide5.xml><?xml version="1.0" encoding="utf-8"?>
-<p:sld xmlns:a="http://schemas.openxmlformats.org/drawingml/2006/main" xmlns:p="http://schemas.openxmlformats.org/presentationml/2006/main" xmlns:r="http://schemas.openxmlformats.org/officeDocument/2006/relationships">
+<p:sld xmlns:a="http://schemas.openxmlformats.org/drawingml/2006/main" xmlns:r="http://schemas.openxmlformats.org/officeDocument/2006/relationships" xmlns:p="http://schemas.openxmlformats.org/presentationml/2006/main">
   <p:cSld>
     <p:bg>
       <p:bgPr>
@@ -13610,7 +13758,14 @@
         <p:cNvGrpSpPr/>
         <p:nvPr/>
       </p:nvGrpSpPr>
-      <p:grpSpPr/>
+      <p:grpSpPr>
+        <a:xfrm>
+          <a:off x="0" y="0"/>
+          <a:ext cx="0" cy="0"/>
+          <a:chOff x="0" y="0"/>
+          <a:chExt cx="0" cy="0"/>
+        </a:xfrm>
+      </p:grpSpPr>
       <p:sp>
         <p:nvSpPr>
           <p:cNvPr id="2" name="Rectangle 1"/>
@@ -13651,6 +13806,7 @@
           <a:lstStyle/>
           <a:p>
             <a:pPr algn="ctr"/>
+            <a:endParaRPr/>
           </a:p>
         </p:txBody>
       </p:sp>
@@ -13729,6 +13885,7 @@
           <a:lstStyle/>
           <a:p>
             <a:pPr algn="ctr"/>
+            <a:endParaRPr/>
           </a:p>
         </p:txBody>
       </p:sp>
@@ -13811,7 +13968,7 @@
           <p:nvPr/>
         </p:nvPicPr>
         <p:blipFill>
-          <a:blip r:embed="rId2"/>
+          <a:blip r:embed="rId3"/>
           <a:stretch>
             <a:fillRect/>
           </a:stretch>
@@ -13864,7 +14021,7 @@
           </a:fontRef>
         </p:style>
         <p:txBody>
-          <a:bodyPr rtlCol="0" anchor="ctr" wrap="square" lIns="109728" rIns="109728" tIns="73152" bIns="73152"/>
+          <a:bodyPr wrap="square" lIns="109728" tIns="73152" rIns="109728" bIns="73152" rtlCol="0" anchor="ctr"/>
           <a:lstStyle/>
           <a:p>
             <a:pPr algn="l"/>
@@ -13918,7 +14075,7 @@
           </a:fontRef>
         </p:style>
         <p:txBody>
-          <a:bodyPr rtlCol="0" anchor="ctr" wrap="square" lIns="109728" rIns="109728" tIns="73152" bIns="73152"/>
+          <a:bodyPr wrap="square" lIns="109728" tIns="73152" rIns="109728" bIns="73152" rtlCol="0" anchor="ctr"/>
           <a:lstStyle/>
           <a:p>
             <a:pPr algn="l"/>
@@ -13970,7 +14127,7 @@
           </a:fontRef>
         </p:style>
         <p:txBody>
-          <a:bodyPr rtlCol="0" anchor="ctr" wrap="square" lIns="109728" rIns="109728" tIns="73152" bIns="73152"/>
+          <a:bodyPr wrap="square" lIns="109728" tIns="73152" rIns="109728" bIns="73152" rtlCol="0" anchor="ctr"/>
           <a:lstStyle/>
           <a:p>
             <a:pPr algn="ctr"/>
@@ -13995,7 +14152,7 @@
 </file>
 
 <file path=ppt/slides/slide6.xml><?xml version="1.0" encoding="utf-8"?>
-<p:sld xmlns:a="http://schemas.openxmlformats.org/drawingml/2006/main" xmlns:p="http://schemas.openxmlformats.org/presentationml/2006/main" xmlns:r="http://schemas.openxmlformats.org/officeDocument/2006/relationships">
+<p:sld xmlns:a="http://schemas.openxmlformats.org/drawingml/2006/main" xmlns:r="http://schemas.openxmlformats.org/officeDocument/2006/relationships" xmlns:p="http://schemas.openxmlformats.org/presentationml/2006/main">
   <p:cSld>
     <p:bg>
       <p:bgPr>
@@ -14011,7 +14168,14 @@
         <p:cNvGrpSpPr/>
         <p:nvPr/>
       </p:nvGrpSpPr>
-      <p:grpSpPr/>
+      <p:grpSpPr>
+        <a:xfrm>
+          <a:off x="0" y="0"/>
+          <a:ext cx="0" cy="0"/>
+          <a:chOff x="0" y="0"/>
+          <a:chExt cx="0" cy="0"/>
+        </a:xfrm>
+      </p:grpSpPr>
       <p:sp>
         <p:nvSpPr>
           <p:cNvPr id="2" name="Rectangle 1"/>
@@ -14052,6 +14216,7 @@
           <a:lstStyle/>
           <a:p>
             <a:pPr algn="ctr"/>
+            <a:endParaRPr/>
           </a:p>
         </p:txBody>
       </p:sp>
@@ -14130,6 +14295,7 @@
           <a:lstStyle/>
           <a:p>
             <a:pPr algn="ctr"/>
+            <a:endParaRPr/>
           </a:p>
         </p:txBody>
       </p:sp>
@@ -14241,7 +14407,7 @@
           </a:fontRef>
         </p:style>
         <p:txBody>
-          <a:bodyPr rtlCol="0" anchor="t" wrap="square" lIns="137160" rIns="137160" tIns="109728" bIns="109728"/>
+          <a:bodyPr wrap="square" lIns="137160" tIns="109728" rIns="137160" bIns="109728" rtlCol="0" anchor="t"/>
           <a:lstStyle/>
           <a:p>
             <a:pPr algn="l"/>
@@ -14257,18 +14423,36 @@
           </a:p>
           <a:p>
             <a:pPr algn="l"/>
-            <a:r>
-              <a:rPr sz="600" b="0">
+            <a:endParaRPr sz="1400" b="1">
+              <a:solidFill>
+                <a:srgbClr val="1E3659"/>
+              </a:solidFill>
+              <a:latin typeface="Calibri"/>
+            </a:endParaRPr>
+          </a:p>
+          <a:p>
+            <a:pPr algn="l"/>
+            <a:r>
+              <a:rPr sz="1400" b="0">
                 <a:solidFill>
                   <a:srgbClr val="1A202C"/>
                 </a:solidFill>
                 <a:latin typeface="Calibri"/>
               </a:rPr>
-              <a:t/>
+              <a:t>No missing values - no cleaning needed</a:t>
             </a:r>
           </a:p>
           <a:p>
             <a:pPr algn="l"/>
+            <a:endParaRPr sz="1400" b="0">
+              <a:solidFill>
+                <a:srgbClr val="1A202C"/>
+              </a:solidFill>
+              <a:latin typeface="Calibri"/>
+            </a:endParaRPr>
+          </a:p>
+          <a:p>
+            <a:pPr algn="l"/>
             <a:r>
               <a:rPr sz="1400" b="0">
                 <a:solidFill>
@@ -14276,23 +14460,53 @@
                 </a:solidFill>
                 <a:latin typeface="Calibri"/>
               </a:rPr>
-              <a:t>No missing values - no cleaning needed</a:t>
+              <a:t>Label grouping:  10 original classes → 3</a:t>
             </a:r>
           </a:p>
           <a:p>
             <a:pPr algn="l"/>
             <a:r>
-              <a:rPr sz="400" b="0">
+              <a:rPr sz="1200" b="0">
+                <a:solidFill>
+                  <a:srgbClr val="4A5568"/>
+                </a:solidFill>
+                <a:latin typeface="Calibri"/>
+              </a:rPr>
+              <a:t>(Negative / Positive / Neutral)</a:t>
+            </a:r>
+          </a:p>
+          <a:p>
+            <a:pPr algn="l"/>
+            <a:endParaRPr sz="1200" b="0">
+              <a:solidFill>
+                <a:srgbClr val="4A5568"/>
+              </a:solidFill>
+              <a:latin typeface="Calibri"/>
+            </a:endParaRPr>
+          </a:p>
+          <a:p>
+            <a:pPr algn="l"/>
+            <a:r>
+              <a:rPr sz="1400" b="0">
                 <a:solidFill>
                   <a:srgbClr val="1A202C"/>
                 </a:solidFill>
                 <a:latin typeface="Calibri"/>
               </a:rPr>
-              <a:t/>
+              <a:t>Text:  RoBERTa tokenizer  (max 128 tokens)</a:t>
             </a:r>
           </a:p>
           <a:p>
             <a:pPr algn="l"/>
+            <a:endParaRPr sz="1400" b="0">
+              <a:solidFill>
+                <a:srgbClr val="1A202C"/>
+              </a:solidFill>
+              <a:latin typeface="Calibri"/>
+            </a:endParaRPr>
+          </a:p>
+          <a:p>
+            <a:pPr algn="l"/>
             <a:r>
               <a:rPr sz="1400" b="0">
                 <a:solidFill>
@@ -14300,80 +14514,17 @@
                 </a:solidFill>
                 <a:latin typeface="Calibri"/>
               </a:rPr>
-              <a:t>Label grouping:  10 original classes → 3</a:t>
+              <a:t>Audio:  load raw waveform, pad/truncate to 8.5 s at 16 kHz</a:t>
             </a:r>
           </a:p>
           <a:p>
             <a:pPr algn="l"/>
-            <a:r>
-              <a:rPr sz="1200" b="0">
-                <a:solidFill>
-                  <a:srgbClr val="4A5568"/>
-                </a:solidFill>
-                <a:latin typeface="Calibri"/>
-              </a:rPr>
-              <a:t>(Negative / Positive / Neutral)</a:t>
-            </a:r>
-          </a:p>
-          <a:p>
-            <a:pPr algn="l"/>
-            <a:r>
-              <a:rPr sz="400" b="0">
-                <a:solidFill>
-                  <a:srgbClr val="1A202C"/>
-                </a:solidFill>
-                <a:latin typeface="Calibri"/>
-              </a:rPr>
-              <a:t/>
-            </a:r>
-          </a:p>
-          <a:p>
-            <a:pPr algn="l"/>
-            <a:r>
-              <a:rPr sz="1400" b="0">
-                <a:solidFill>
-                  <a:srgbClr val="1A202C"/>
-                </a:solidFill>
-                <a:latin typeface="Calibri"/>
-              </a:rPr>
-              <a:t>Text:  RoBERTa tokenizer  (max 128 tokens)</a:t>
-            </a:r>
-          </a:p>
-          <a:p>
-            <a:pPr algn="l"/>
-            <a:r>
-              <a:rPr sz="400" b="0">
-                <a:solidFill>
-                  <a:srgbClr val="1A202C"/>
-                </a:solidFill>
-                <a:latin typeface="Calibri"/>
-              </a:rPr>
-              <a:t/>
-            </a:r>
-          </a:p>
-          <a:p>
-            <a:pPr algn="l"/>
-            <a:r>
-              <a:rPr sz="1400" b="0">
-                <a:solidFill>
-                  <a:srgbClr val="1A202C"/>
-                </a:solidFill>
-                <a:latin typeface="Calibri"/>
-              </a:rPr>
-              <a:t>Audio:  load raw waveform, pad/truncate to 8.5 s at 16 kHz</a:t>
-            </a:r>
-          </a:p>
-          <a:p>
-            <a:pPr algn="l"/>
-            <a:r>
-              <a:rPr sz="400" b="0">
-                <a:solidFill>
-                  <a:srgbClr val="1A202C"/>
-                </a:solidFill>
-                <a:latin typeface="Calibri"/>
-              </a:rPr>
-              <a:t/>
-            </a:r>
+            <a:endParaRPr sz="1400" b="0">
+              <a:solidFill>
+                <a:srgbClr val="1A202C"/>
+              </a:solidFill>
+              <a:latin typeface="Calibri"/>
+            </a:endParaRPr>
           </a:p>
           <a:p>
             <a:pPr algn="l"/>
@@ -14460,7 +14611,7 @@
           </a:fontRef>
         </p:style>
         <p:txBody>
-          <a:bodyPr rtlCol="0" anchor="ctr" wrap="square" lIns="137160" rIns="137160" tIns="109728" bIns="109728"/>
+          <a:bodyPr wrap="square" lIns="137160" tIns="109728" rIns="137160" bIns="109728" rtlCol="0" anchor="ctr"/>
           <a:lstStyle/>
           <a:p>
             <a:pPr algn="l"/>
@@ -14524,7 +14675,7 @@
           </a:fontRef>
         </p:style>
         <p:txBody>
-          <a:bodyPr rtlCol="0" anchor="ctr" wrap="square" lIns="137160" rIns="137160" tIns="109728" bIns="109728"/>
+          <a:bodyPr wrap="square" lIns="137160" tIns="109728" rIns="137160" bIns="109728" rtlCol="0" anchor="ctr"/>
           <a:lstStyle/>
           <a:p>
             <a:pPr algn="l"/>
@@ -14576,24 +14727,24 @@
           </a:fontRef>
         </p:style>
         <p:txBody>
-          <a:bodyPr rtlCol="0" anchor="ctr" wrap="square" lIns="137160" rIns="137160" tIns="109728" bIns="109728"/>
+          <a:bodyPr wrap="square" lIns="137160" tIns="109728" rIns="137160" bIns="109728" rtlCol="0" anchor="ctr"/>
           <a:lstStyle/>
           <a:p>
             <a:pPr algn="l"/>
             <a:r>
-              <a:rPr sz="1500" b="1">
+              <a:rPr sz="1500" b="1" dirty="0">
                 <a:solidFill>
                   <a:srgbClr val="FFFFFF"/>
                 </a:solidFill>
                 <a:latin typeface="Calibri"/>
               </a:rPr>
-              <a:t>TEST  - Session 5  ✦</a:t>
+              <a:t>TEST  - Session 5  </a:t>
             </a:r>
           </a:p>
           <a:p>
             <a:pPr algn="l"/>
             <a:r>
-              <a:rPr sz="1200" b="0">
+              <a:rPr sz="1200" b="0" dirty="0">
                 <a:solidFill>
                   <a:srgbClr val="FFFFFF"/>
                 </a:solidFill>
@@ -14642,7 +14793,7 @@
           </a:fontRef>
         </p:style>
         <p:txBody>
-          <a:bodyPr rtlCol="0" anchor="ctr" wrap="square" lIns="109728" rIns="109728" tIns="73152" bIns="73152"/>
+          <a:bodyPr wrap="square" lIns="109728" tIns="73152" rIns="109728" bIns="73152" rtlCol="0" anchor="ctr"/>
           <a:lstStyle/>
           <a:p>
             <a:pPr algn="ctr"/>
@@ -14695,7 +14846,7 @@
           </a:fontRef>
         </p:style>
         <p:txBody>
-          <a:bodyPr rtlCol="0" anchor="ctr" wrap="square" lIns="109728" rIns="109728" tIns="73152" bIns="73152"/>
+          <a:bodyPr wrap="square" lIns="109728" tIns="73152" rIns="109728" bIns="73152" rtlCol="0" anchor="ctr"/>
           <a:lstStyle/>
           <a:p>
             <a:pPr algn="ctr"/>
@@ -14720,7 +14871,7 @@
 </file>
 
 <file path=ppt/slides/slide7.xml><?xml version="1.0" encoding="utf-8"?>
-<p:sld xmlns:a="http://schemas.openxmlformats.org/drawingml/2006/main" xmlns:p="http://schemas.openxmlformats.org/presentationml/2006/main" xmlns:r="http://schemas.openxmlformats.org/officeDocument/2006/relationships">
+<p:sld xmlns:a="http://schemas.openxmlformats.org/drawingml/2006/main" xmlns:r="http://schemas.openxmlformats.org/officeDocument/2006/relationships" xmlns:p="http://schemas.openxmlformats.org/presentationml/2006/main">
   <p:cSld>
     <p:bg>
       <p:bgPr>
@@ -14736,7 +14887,14 @@
         <p:cNvGrpSpPr/>
         <p:nvPr/>
       </p:nvGrpSpPr>
-      <p:grpSpPr/>
+      <p:grpSpPr>
+        <a:xfrm>
+          <a:off x="0" y="0"/>
+          <a:ext cx="0" cy="0"/>
+          <a:chOff x="0" y="0"/>
+          <a:chExt cx="0" cy="0"/>
+        </a:xfrm>
+      </p:grpSpPr>
       <p:sp>
         <p:nvSpPr>
           <p:cNvPr id="2" name="Rectangle 1"/>
@@ -14777,6 +14935,7 @@
           <a:lstStyle/>
           <a:p>
             <a:pPr algn="ctr"/>
+            <a:endParaRPr/>
           </a:p>
         </p:txBody>
       </p:sp>
@@ -14855,6 +15014,7 @@
           <a:lstStyle/>
           <a:p>
             <a:pPr algn="ctr"/>
+            <a:endParaRPr/>
           </a:p>
         </p:txBody>
       </p:sp>
@@ -14966,7 +15126,7 @@
           </a:fontRef>
         </p:style>
         <p:txBody>
-          <a:bodyPr rtlCol="0" anchor="t" wrap="square" lIns="137160" rIns="137160" tIns="109728" bIns="109728"/>
+          <a:bodyPr wrap="square" lIns="137160" tIns="109728" rIns="137160" bIns="109728" rtlCol="0" anchor="t"/>
           <a:lstStyle/>
           <a:p>
             <a:pPr algn="l"/>
@@ -14982,18 +15142,36 @@
           </a:p>
           <a:p>
             <a:pPr algn="l"/>
-            <a:r>
-              <a:rPr sz="600" b="0">
+            <a:endParaRPr sz="1400" b="1">
+              <a:solidFill>
+                <a:srgbClr val="1E3659"/>
+              </a:solidFill>
+              <a:latin typeface="Calibri"/>
+            </a:endParaRPr>
+          </a:p>
+          <a:p>
+            <a:pPr algn="l"/>
+            <a:r>
+              <a:rPr sz="1400" b="0">
                 <a:solidFill>
                   <a:srgbClr val="1A202C"/>
                 </a:solidFill>
                 <a:latin typeface="Calibri"/>
               </a:rPr>
-              <a:t/>
+              <a:t>Architecture:  roberta-base, 12 transformer layers, 125M parameters</a:t>
             </a:r>
           </a:p>
           <a:p>
             <a:pPr algn="l"/>
+            <a:endParaRPr sz="1400" b="0">
+              <a:solidFill>
+                <a:srgbClr val="1A202C"/>
+              </a:solidFill>
+              <a:latin typeface="Calibri"/>
+            </a:endParaRPr>
+          </a:p>
+          <a:p>
+            <a:pPr algn="l"/>
             <a:r>
               <a:rPr sz="1400" b="0">
                 <a:solidFill>
@@ -15001,23 +15179,41 @@
                 </a:solidFill>
                 <a:latin typeface="Calibri"/>
               </a:rPr>
-              <a:t>Architecture:  roberta-base, 12 transformer layers, 125M parameters</a:t>
+              <a:t>Pre-training:  MLM on 160 GB text - already understands that 'infuriating' is negative</a:t>
             </a:r>
           </a:p>
           <a:p>
             <a:pPr algn="l"/>
-            <a:r>
-              <a:rPr sz="400" b="0">
+            <a:endParaRPr sz="1400" b="0">
+              <a:solidFill>
+                <a:srgbClr val="1A202C"/>
+              </a:solidFill>
+              <a:latin typeface="Calibri"/>
+            </a:endParaRPr>
+          </a:p>
+          <a:p>
+            <a:pPr algn="l"/>
+            <a:r>
+              <a:rPr sz="1400" b="0">
                 <a:solidFill>
                   <a:srgbClr val="1A202C"/>
                 </a:solidFill>
                 <a:latin typeface="Calibri"/>
               </a:rPr>
-              <a:t/>
+              <a:t>Fine-tuning:  LR = 2×10⁻⁵, batch = 32, class-weighted cross-entropy</a:t>
             </a:r>
           </a:p>
           <a:p>
             <a:pPr algn="l"/>
+            <a:endParaRPr sz="1400" b="0">
+              <a:solidFill>
+                <a:srgbClr val="1A202C"/>
+              </a:solidFill>
+              <a:latin typeface="Calibri"/>
+            </a:endParaRPr>
+          </a:p>
+          <a:p>
+            <a:pPr algn="l"/>
             <a:r>
               <a:rPr sz="1400" b="0">
                 <a:solidFill>
@@ -15025,92 +15221,38 @@
                 </a:solidFill>
                 <a:latin typeface="Calibri"/>
               </a:rPr>
-              <a:t>Pre-training:  MLM on 160 GB text - already understands that 'infuriating' is negative</a:t>
+              <a:t>Input:  text transcript  →  tokenizer  →  [CLS] vector  →  linear head</a:t>
             </a:r>
           </a:p>
           <a:p>
             <a:pPr algn="l"/>
-            <a:r>
-              <a:rPr sz="400" b="0">
+            <a:endParaRPr sz="1400" b="0">
+              <a:solidFill>
+                <a:srgbClr val="1A202C"/>
+              </a:solidFill>
+              <a:latin typeface="Calibri"/>
+            </a:endParaRPr>
+          </a:p>
+          <a:p>
+            <a:pPr algn="l"/>
+            <a:r>
+              <a:rPr sz="1400" b="0">
                 <a:solidFill>
                   <a:srgbClr val="1A202C"/>
                 </a:solidFill>
                 <a:latin typeface="Calibri"/>
               </a:rPr>
-              <a:t/>
+              <a:t>Best checkpoint:  epoch 7 of 10  (early stopping on val Macro F1)</a:t>
             </a:r>
           </a:p>
           <a:p>
             <a:pPr algn="l"/>
-            <a:r>
-              <a:rPr sz="1400" b="0">
-                <a:solidFill>
-                  <a:srgbClr val="1A202C"/>
-                </a:solidFill>
-                <a:latin typeface="Calibri"/>
-              </a:rPr>
-              <a:t>Fine-tuning:  LR = 2×10⁻⁵, batch = 32, class-weighted cross-entropy</a:t>
-            </a:r>
-          </a:p>
-          <a:p>
-            <a:pPr algn="l"/>
-            <a:r>
-              <a:rPr sz="400" b="0">
-                <a:solidFill>
-                  <a:srgbClr val="1A202C"/>
-                </a:solidFill>
-                <a:latin typeface="Calibri"/>
-              </a:rPr>
-              <a:t/>
-            </a:r>
-          </a:p>
-          <a:p>
-            <a:pPr algn="l"/>
-            <a:r>
-              <a:rPr sz="1400" b="0">
-                <a:solidFill>
-                  <a:srgbClr val="1A202C"/>
-                </a:solidFill>
-                <a:latin typeface="Calibri"/>
-              </a:rPr>
-              <a:t>Input:  text transcript  →  tokenizer  →  [CLS] vector  →  linear head</a:t>
-            </a:r>
-          </a:p>
-          <a:p>
-            <a:pPr algn="l"/>
-            <a:r>
-              <a:rPr sz="400" b="0">
-                <a:solidFill>
-                  <a:srgbClr val="1A202C"/>
-                </a:solidFill>
-                <a:latin typeface="Calibri"/>
-              </a:rPr>
-              <a:t/>
-            </a:r>
-          </a:p>
-          <a:p>
-            <a:pPr algn="l"/>
-            <a:r>
-              <a:rPr sz="1400" b="0">
-                <a:solidFill>
-                  <a:srgbClr val="1A202C"/>
-                </a:solidFill>
-                <a:latin typeface="Calibri"/>
-              </a:rPr>
-              <a:t>Best checkpoint:  epoch 7 of 10  (early stopping on val Macro F1)</a:t>
-            </a:r>
-          </a:p>
-          <a:p>
-            <a:pPr algn="l"/>
-            <a:r>
-              <a:rPr sz="600" b="0">
-                <a:solidFill>
-                  <a:srgbClr val="1A202C"/>
-                </a:solidFill>
-                <a:latin typeface="Calibri"/>
-              </a:rPr>
-              <a:t/>
-            </a:r>
+            <a:endParaRPr sz="1400" b="0">
+              <a:solidFill>
+                <a:srgbClr val="1A202C"/>
+              </a:solidFill>
+              <a:latin typeface="Calibri"/>
+            </a:endParaRPr>
           </a:p>
           <a:p>
             <a:pPr algn="l"/>
@@ -15162,7 +15304,7 @@
           </a:fontRef>
         </p:style>
         <p:txBody>
-          <a:bodyPr rtlCol="0" anchor="ctr" wrap="square" lIns="109728" rIns="109728" tIns="73152" bIns="73152"/>
+          <a:bodyPr wrap="square" lIns="109728" tIns="73152" rIns="109728" bIns="73152" rtlCol="0" anchor="ctr"/>
           <a:lstStyle/>
           <a:p>
             <a:pPr algn="ctr"/>
@@ -15187,7 +15329,7 @@
           <p:nvPr/>
         </p:nvPicPr>
         <p:blipFill>
-          <a:blip r:embed="rId4"/>
+          <a:blip r:embed="rId3"/>
           <a:stretch>
             <a:fillRect/>
           </a:stretch>
@@ -15211,7 +15353,7 @@
 </file>
 
 <file path=ppt/slides/slide8.xml><?xml version="1.0" encoding="utf-8"?>
-<p:sld xmlns:a="http://schemas.openxmlformats.org/drawingml/2006/main" xmlns:p="http://schemas.openxmlformats.org/presentationml/2006/main" xmlns:r="http://schemas.openxmlformats.org/officeDocument/2006/relationships">
+<p:sld xmlns:a="http://schemas.openxmlformats.org/drawingml/2006/main" xmlns:r="http://schemas.openxmlformats.org/officeDocument/2006/relationships" xmlns:p="http://schemas.openxmlformats.org/presentationml/2006/main">
   <p:cSld>
     <p:bg>
       <p:bgPr>
@@ -15227,7 +15369,14 @@
         <p:cNvGrpSpPr/>
         <p:nvPr/>
       </p:nvGrpSpPr>
-      <p:grpSpPr/>
+      <p:grpSpPr>
+        <a:xfrm>
+          <a:off x="0" y="0"/>
+          <a:ext cx="0" cy="0"/>
+          <a:chOff x="0" y="0"/>
+          <a:chExt cx="0" cy="0"/>
+        </a:xfrm>
+      </p:grpSpPr>
       <p:sp>
         <p:nvSpPr>
           <p:cNvPr id="2" name="Rectangle 1"/>
@@ -15268,6 +15417,7 @@
           <a:lstStyle/>
           <a:p>
             <a:pPr algn="ctr"/>
+            <a:endParaRPr/>
           </a:p>
         </p:txBody>
       </p:sp>
@@ -15346,6 +15496,7 @@
           <a:lstStyle/>
           <a:p>
             <a:pPr algn="ctr"/>
+            <a:endParaRPr/>
           </a:p>
         </p:txBody>
       </p:sp>
@@ -15457,7 +15608,7 @@
           </a:fontRef>
         </p:style>
         <p:txBody>
-          <a:bodyPr rtlCol="0" anchor="t" wrap="square" lIns="137160" rIns="137160" tIns="109728" bIns="109728"/>
+          <a:bodyPr wrap="square" lIns="137160" tIns="109728" rIns="137160" bIns="109728" rtlCol="0" anchor="t"/>
           <a:lstStyle/>
           <a:p>
             <a:pPr algn="l"/>
@@ -15473,18 +15624,36 @@
           </a:p>
           <a:p>
             <a:pPr algn="l"/>
-            <a:r>
-              <a:rPr sz="600" b="0">
+            <a:endParaRPr sz="1400" b="1">
+              <a:solidFill>
+                <a:srgbClr val="1E3659"/>
+              </a:solidFill>
+              <a:latin typeface="Calibri"/>
+            </a:endParaRPr>
+          </a:p>
+          <a:p>
+            <a:pPr algn="l"/>
+            <a:r>
+              <a:rPr sz="1400" b="0">
                 <a:solidFill>
                   <a:srgbClr val="1A202C"/>
                 </a:solidFill>
                 <a:latin typeface="Calibri"/>
               </a:rPr>
-              <a:t/>
+              <a:t>Architecture:  wav2vec2-base, 12 transformer layers, 94M parameters</a:t>
             </a:r>
           </a:p>
           <a:p>
             <a:pPr algn="l"/>
+            <a:endParaRPr sz="1400" b="0">
+              <a:solidFill>
+                <a:srgbClr val="1A202C"/>
+              </a:solidFill>
+              <a:latin typeface="Calibri"/>
+            </a:endParaRPr>
+          </a:p>
+          <a:p>
+            <a:pPr algn="l"/>
             <a:r>
               <a:rPr sz="1400" b="0">
                 <a:solidFill>
@@ -15492,23 +15661,41 @@
                 </a:solidFill>
                 <a:latin typeface="Calibri"/>
               </a:rPr>
-              <a:t>Architecture:  wav2vec2-base, 12 transformer layers, 94M parameters</a:t>
+              <a:t>Pre-training:  masked audio prediction on 960h unlabeled speech</a:t>
             </a:r>
           </a:p>
           <a:p>
             <a:pPr algn="l"/>
-            <a:r>
-              <a:rPr sz="400" b="0">
+            <a:endParaRPr sz="1400" b="0">
+              <a:solidFill>
+                <a:srgbClr val="1A202C"/>
+              </a:solidFill>
+              <a:latin typeface="Calibri"/>
+            </a:endParaRPr>
+          </a:p>
+          <a:p>
+            <a:pPr algn="l"/>
+            <a:r>
+              <a:rPr sz="1400" b="0">
                 <a:solidFill>
                   <a:srgbClr val="1A202C"/>
                 </a:solidFill>
                 <a:latin typeface="Calibri"/>
               </a:rPr>
-              <a:t/>
+              <a:t>Input:  raw 16kHz waveform (max 8.5 s = 136,000 samples)  →  conv encoder (frozen)  →  transformer  →  mean pool  →  linear head</a:t>
             </a:r>
           </a:p>
           <a:p>
             <a:pPr algn="l"/>
+            <a:endParaRPr sz="1400" b="0">
+              <a:solidFill>
+                <a:srgbClr val="1A202C"/>
+              </a:solidFill>
+              <a:latin typeface="Calibri"/>
+            </a:endParaRPr>
+          </a:p>
+          <a:p>
+            <a:pPr algn="l"/>
             <a:r>
               <a:rPr sz="1400" b="0">
                 <a:solidFill>
@@ -15516,68 +15703,17 @@
                 </a:solidFill>
                 <a:latin typeface="Calibri"/>
               </a:rPr>
-              <a:t>Pre-training:  masked audio prediction on 960h unlabeled speech</a:t>
+              <a:t>Fine-tuning:  LR = 2×10⁻⁵, batch = 8, conv encoder kept frozen</a:t>
             </a:r>
           </a:p>
           <a:p>
             <a:pPr algn="l"/>
-            <a:r>
-              <a:rPr sz="400" b="0">
-                <a:solidFill>
-                  <a:srgbClr val="1A202C"/>
-                </a:solidFill>
-                <a:latin typeface="Calibri"/>
-              </a:rPr>
-              <a:t/>
-            </a:r>
-          </a:p>
-          <a:p>
-            <a:pPr algn="l"/>
-            <a:r>
-              <a:rPr sz="1400" b="0">
-                <a:solidFill>
-                  <a:srgbClr val="1A202C"/>
-                </a:solidFill>
-                <a:latin typeface="Calibri"/>
-              </a:rPr>
-              <a:t>Input:  raw 16kHz waveform (max 8.5 s = 136,000 samples)  →  conv encoder (frozen)  →  transformer  →  mean pool  →  linear head</a:t>
-            </a:r>
-          </a:p>
-          <a:p>
-            <a:pPr algn="l"/>
-            <a:r>
-              <a:rPr sz="400" b="0">
-                <a:solidFill>
-                  <a:srgbClr val="1A202C"/>
-                </a:solidFill>
-                <a:latin typeface="Calibri"/>
-              </a:rPr>
-              <a:t/>
-            </a:r>
-          </a:p>
-          <a:p>
-            <a:pPr algn="l"/>
-            <a:r>
-              <a:rPr sz="1400" b="0">
-                <a:solidFill>
-                  <a:srgbClr val="1A202C"/>
-                </a:solidFill>
-                <a:latin typeface="Calibri"/>
-              </a:rPr>
-              <a:t>Fine-tuning:  LR = 2×10⁻⁵, batch = 8, conv encoder kept frozen</a:t>
-            </a:r>
-          </a:p>
-          <a:p>
-            <a:pPr algn="l"/>
-            <a:r>
-              <a:rPr sz="600" b="0">
-                <a:solidFill>
-                  <a:srgbClr val="1A202C"/>
-                </a:solidFill>
-                <a:latin typeface="Calibri"/>
-              </a:rPr>
-              <a:t/>
-            </a:r>
+            <a:endParaRPr sz="1400" b="0">
+              <a:solidFill>
+                <a:srgbClr val="1A202C"/>
+              </a:solidFill>
+              <a:latin typeface="Calibri"/>
+            </a:endParaRPr>
           </a:p>
           <a:p>
             <a:pPr algn="l"/>
@@ -15629,7 +15765,7 @@
           </a:fontRef>
         </p:style>
         <p:txBody>
-          <a:bodyPr rtlCol="0" anchor="ctr" wrap="square" lIns="109728" rIns="109728" tIns="73152" bIns="73152"/>
+          <a:bodyPr wrap="square" lIns="109728" tIns="73152" rIns="109728" bIns="73152" rtlCol="0" anchor="ctr"/>
           <a:lstStyle/>
           <a:p>
             <a:pPr algn="ctr"/>
@@ -15654,7 +15790,7 @@
           <p:nvPr/>
         </p:nvPicPr>
         <p:blipFill>
-          <a:blip r:embed="rId4"/>
+          <a:blip r:embed="rId3"/>
           <a:stretch>
             <a:fillRect/>
           </a:stretch>
@@ -15678,7 +15814,7 @@
 </file>
 
 <file path=ppt/slides/slide9.xml><?xml version="1.0" encoding="utf-8"?>
-<p:sld xmlns:a="http://schemas.openxmlformats.org/drawingml/2006/main" xmlns:p="http://schemas.openxmlformats.org/presentationml/2006/main" xmlns:r="http://schemas.openxmlformats.org/officeDocument/2006/relationships">
+<p:sld xmlns:a="http://schemas.openxmlformats.org/drawingml/2006/main" xmlns:r="http://schemas.openxmlformats.org/officeDocument/2006/relationships" xmlns:p="http://schemas.openxmlformats.org/presentationml/2006/main">
   <p:cSld>
     <p:bg>
       <p:bgPr>
@@ -15694,7 +15830,14 @@
         <p:cNvGrpSpPr/>
         <p:nvPr/>
       </p:nvGrpSpPr>
-      <p:grpSpPr/>
+      <p:grpSpPr>
+        <a:xfrm>
+          <a:off x="0" y="0"/>
+          <a:ext cx="0" cy="0"/>
+          <a:chOff x="0" y="0"/>
+          <a:chExt cx="0" cy="0"/>
+        </a:xfrm>
+      </p:grpSpPr>
       <p:sp>
         <p:nvSpPr>
           <p:cNvPr id="2" name="Rectangle 1"/>
@@ -15735,6 +15878,7 @@
           <a:lstStyle/>
           <a:p>
             <a:pPr algn="ctr"/>
+            <a:endParaRPr/>
           </a:p>
         </p:txBody>
       </p:sp>
@@ -15813,6 +15957,7 @@
           <a:lstStyle/>
           <a:p>
             <a:pPr algn="ctr"/>
+            <a:endParaRPr/>
           </a:p>
         </p:txBody>
       </p:sp>
@@ -15924,7 +16069,7 @@
           </a:fontRef>
         </p:style>
         <p:txBody>
-          <a:bodyPr rtlCol="0" anchor="t" wrap="square" lIns="137160" rIns="137160" tIns="109728" bIns="109728"/>
+          <a:bodyPr wrap="square" lIns="137160" tIns="109728" rIns="137160" bIns="109728" rtlCol="0" anchor="t"/>
           <a:lstStyle/>
           <a:p>
             <a:pPr algn="l"/>
@@ -16002,7 +16147,7 @@
           </a:fontRef>
         </p:style>
         <p:txBody>
-          <a:bodyPr rtlCol="0" anchor="t" wrap="square" lIns="137160" rIns="137160" tIns="109728" bIns="109728"/>
+          <a:bodyPr wrap="square" lIns="137160" tIns="109728" rIns="137160" bIns="109728" rtlCol="0" anchor="t"/>
           <a:lstStyle/>
           <a:p>
             <a:pPr algn="l"/>
@@ -16080,24 +16225,24 @@
           </a:fontRef>
         </p:style>
         <p:txBody>
-          <a:bodyPr rtlCol="0" anchor="t" wrap="square" lIns="137160" rIns="137160" tIns="109728" bIns="109728"/>
+          <a:bodyPr wrap="square" lIns="137160" tIns="109728" rIns="137160" bIns="109728" rtlCol="0" anchor="t"/>
           <a:lstStyle/>
           <a:p>
             <a:pPr algn="l"/>
             <a:r>
-              <a:rPr sz="1400" b="1">
+              <a:rPr sz="1400" b="1" dirty="0">
                 <a:solidFill>
                   <a:srgbClr val="276749"/>
                 </a:solidFill>
                 <a:latin typeface="Calibri"/>
               </a:rPr>
-              <a:t>Both ✓ - high confidence</a:t>
+              <a:t>Both ✓ high confidence</a:t>
             </a:r>
           </a:p>
           <a:p>
             <a:pPr algn="l"/>
             <a:r>
-              <a:rPr sz="1300" b="0">
+              <a:rPr sz="1300" b="0" dirty="0">
                 <a:solidFill>
                   <a:srgbClr val="1A202C"/>
                 </a:solidFill>
@@ -16109,7 +16254,7 @@
           <a:p>
             <a:pPr algn="l"/>
             <a:r>
-              <a:rPr sz="1300" b="0">
+              <a:rPr sz="1300" b="0" dirty="0">
                 <a:solidFill>
                   <a:srgbClr val="4A5568"/>
                 </a:solidFill>
@@ -16158,24 +16303,24 @@
           </a:fontRef>
         </p:style>
         <p:txBody>
-          <a:bodyPr rtlCol="0" anchor="t" wrap="square" lIns="137160" rIns="137160" tIns="109728" bIns="109728"/>
+          <a:bodyPr wrap="square" lIns="137160" tIns="109728" rIns="137160" bIns="109728" rtlCol="0" anchor="t"/>
           <a:lstStyle/>
           <a:p>
             <a:pPr algn="l"/>
             <a:r>
-              <a:rPr sz="1400" b="1">
+              <a:rPr sz="1400" b="1" dirty="0">
                 <a:solidFill>
                   <a:srgbClr val="718096"/>
                 </a:solidFill>
                 <a:latin typeface="Calibri"/>
               </a:rPr>
-              <a:t>Both ✗ - genuinely ambiguous</a:t>
+              <a:t>Both ✗ genuinely ambiguous</a:t>
             </a:r>
           </a:p>
           <a:p>
             <a:pPr algn="l"/>
             <a:r>
-              <a:rPr sz="1300" b="0">
+              <a:rPr sz="1300" b="0" dirty="0">
                 <a:solidFill>
                   <a:srgbClr val="1A202C"/>
                 </a:solidFill>
@@ -16187,7 +16332,7 @@
           <a:p>
             <a:pPr algn="l"/>
             <a:r>
-              <a:rPr sz="1300" b="0">
+              <a:rPr sz="1300" b="0" dirty="0">
                 <a:solidFill>
                   <a:srgbClr val="4A5568"/>
                 </a:solidFill>
@@ -16234,7 +16379,7 @@
           </a:fontRef>
         </p:style>
         <p:txBody>
-          <a:bodyPr rtlCol="0" anchor="ctr" wrap="square" lIns="109728" rIns="109728" tIns="73152" bIns="73152"/>
+          <a:bodyPr wrap="square" lIns="109728" tIns="73152" rIns="109728" bIns="73152" rtlCol="0" anchor="ctr"/>
           <a:lstStyle/>
           <a:p>
             <a:pPr algn="ctr"/>
@@ -16579,7 +16724,7 @@
 </file>
 
 <file path=ppt/theme/theme2.xml><?xml version="1.0" encoding="utf-8"?>
-<a:theme xmlns:a="http://schemas.openxmlformats.org/drawingml/2006/main" name="Office Theme">
+<a:theme xmlns:a="http://schemas.openxmlformats.org/drawingml/2006/main" name="ערכת נושא Office">
   <a:themeElements>
     <a:clrScheme name="Office">
       <a:dk1>
@@ -16589,44 +16734,44 @@
         <a:sysClr val="window" lastClr="FFFFFF"/>
       </a:lt1>
       <a:dk2>
-        <a:srgbClr val="1F497D"/>
+        <a:srgbClr val="0E2841"/>
       </a:dk2>
       <a:lt2>
-        <a:srgbClr val="EEECE1"/>
+        <a:srgbClr val="E8E8E8"/>
       </a:lt2>
       <a:accent1>
-        <a:srgbClr val="4F81BD"/>
+        <a:srgbClr val="156082"/>
       </a:accent1>
       <a:accent2>
-        <a:srgbClr val="C0504D"/>
+        <a:srgbClr val="E97132"/>
       </a:accent2>
       <a:accent3>
-        <a:srgbClr val="9BBB59"/>
+        <a:srgbClr val="196B24"/>
       </a:accent3>
       <a:accent4>
-        <a:srgbClr val="8064A2"/>
+        <a:srgbClr val="0F9ED5"/>
       </a:accent4>
       <a:accent5>
-        <a:srgbClr val="4BACC6"/>
+        <a:srgbClr val="A02B93"/>
       </a:accent5>
       <a:accent6>
-        <a:srgbClr val="F79646"/>
+        <a:srgbClr val="4EA72E"/>
       </a:accent6>
       <a:hlink>
-        <a:srgbClr val="0000FF"/>
+        <a:srgbClr val="467886"/>
       </a:hlink>
       <a:folHlink>
-        <a:srgbClr val="800080"/>
+        <a:srgbClr val="96607D"/>
       </a:folHlink>
     </a:clrScheme>
     <a:fontScheme name="Office">
       <a:majorFont>
-        <a:latin typeface="Calibri"/>
+        <a:latin typeface="Aptos Display" panose="02110004020202020204"/>
         <a:ea typeface=""/>
         <a:cs typeface=""/>
-        <a:font script="Jpan" typeface="ＭＳ Ｐゴシック"/>
+        <a:font script="Jpan" typeface="游ゴシック Light"/>
         <a:font script="Hang" typeface="맑은 고딕"/>
-        <a:font script="Hans" typeface="宋体"/>
+        <a:font script="Hans" typeface="等线 Light"/>
         <a:font script="Hant" typeface="新細明體"/>
         <a:font script="Arab" typeface="Times New Roman"/>
         <a:font script="Hebr" typeface="Times New Roman"/>
@@ -16654,14 +16799,31 @@
         <a:font script="Viet" typeface="Times New Roman"/>
         <a:font script="Uigh" typeface="Microsoft Uighur"/>
         <a:font script="Geor" typeface="Sylfaen"/>
+        <a:font script="Armn" typeface="Arial"/>
+        <a:font script="Bugi" typeface="Leelawadee UI"/>
+        <a:font script="Bopo" typeface="Microsoft JhengHei"/>
+        <a:font script="Java" typeface="Javanese Text"/>
+        <a:font script="Lisu" typeface="Segoe UI"/>
+        <a:font script="Mymr" typeface="Myanmar Text"/>
+        <a:font script="Nkoo" typeface="Ebrima"/>
+        <a:font script="Olck" typeface="Nirmala UI"/>
+        <a:font script="Osma" typeface="Ebrima"/>
+        <a:font script="Phag" typeface="Phagspa"/>
+        <a:font script="Syrn" typeface="Estrangelo Edessa"/>
+        <a:font script="Syrj" typeface="Estrangelo Edessa"/>
+        <a:font script="Syre" typeface="Estrangelo Edessa"/>
+        <a:font script="Sora" typeface="Nirmala UI"/>
+        <a:font script="Tale" typeface="Microsoft Tai Le"/>
+        <a:font script="Talu" typeface="Microsoft New Tai Lue"/>
+        <a:font script="Tfng" typeface="Ebrima"/>
       </a:majorFont>
       <a:minorFont>
-        <a:latin typeface="Calibri"/>
+        <a:latin typeface="Aptos" panose="02110004020202020204"/>
         <a:ea typeface=""/>
         <a:cs typeface=""/>
-        <a:font script="Jpan" typeface="ＭＳ Ｐゴシック"/>
+        <a:font script="Jpan" typeface="游ゴシック"/>
         <a:font script="Hang" typeface="맑은 고딕"/>
-        <a:font script="Hans" typeface="宋体"/>
+        <a:font script="Hans" typeface="等线"/>
         <a:font script="Hant" typeface="新細明體"/>
         <a:font script="Arab" typeface="Arial"/>
         <a:font script="Hebr" typeface="Arial"/>
@@ -16689,6 +16851,23 @@
         <a:font script="Viet" typeface="Arial"/>
         <a:font script="Uigh" typeface="Microsoft Uighur"/>
         <a:font script="Geor" typeface="Sylfaen"/>
+        <a:font script="Armn" typeface="Arial"/>
+        <a:font script="Bugi" typeface="Leelawadee UI"/>
+        <a:font script="Bopo" typeface="Microsoft JhengHei"/>
+        <a:font script="Java" typeface="Javanese Text"/>
+        <a:font script="Lisu" typeface="Segoe UI"/>
+        <a:font script="Mymr" typeface="Myanmar Text"/>
+        <a:font script="Nkoo" typeface="Ebrima"/>
+        <a:font script="Olck" typeface="Nirmala UI"/>
+        <a:font script="Osma" typeface="Ebrima"/>
+        <a:font script="Phag" typeface="Phagspa"/>
+        <a:font script="Syrn" typeface="Estrangelo Edessa"/>
+        <a:font script="Syrj" typeface="Estrangelo Edessa"/>
+        <a:font script="Syre" typeface="Estrangelo Edessa"/>
+        <a:font script="Sora" typeface="Nirmala UI"/>
+        <a:font script="Tale" typeface="Microsoft Tai Le"/>
+        <a:font script="Talu" typeface="Microsoft New Tai Lue"/>
+        <a:font script="Tfng" typeface="Ebrima"/>
       </a:minorFont>
     </a:fontScheme>
     <a:fmtScheme name="Office">
@@ -16700,180 +16879,136 @@
           <a:gsLst>
             <a:gs pos="0">
               <a:schemeClr val="phClr">
-                <a:tint val="50000"/>
-                <a:satMod val="300000"/>
+                <a:lumMod val="110000"/>
+                <a:satMod val="105000"/>
+                <a:tint val="67000"/>
               </a:schemeClr>
             </a:gs>
-            <a:gs pos="35000">
+            <a:gs pos="50000">
               <a:schemeClr val="phClr">
-                <a:tint val="37000"/>
-                <a:satMod val="300000"/>
+                <a:lumMod val="105000"/>
+                <a:satMod val="103000"/>
+                <a:tint val="73000"/>
               </a:schemeClr>
             </a:gs>
             <a:gs pos="100000">
               <a:schemeClr val="phClr">
-                <a:tint val="15000"/>
-                <a:satMod val="350000"/>
+                <a:lumMod val="105000"/>
+                <a:satMod val="109000"/>
+                <a:tint val="81000"/>
               </a:schemeClr>
             </a:gs>
           </a:gsLst>
-          <a:lin ang="16200000" scaled="1"/>
+          <a:lin ang="5400000" scaled="0"/>
         </a:gradFill>
         <a:gradFill rotWithShape="1">
           <a:gsLst>
             <a:gs pos="0">
               <a:schemeClr val="phClr">
-                <a:tint val="100000"/>
+                <a:satMod val="103000"/>
+                <a:lumMod val="102000"/>
+                <a:tint val="94000"/>
+              </a:schemeClr>
+            </a:gs>
+            <a:gs pos="50000">
+              <a:schemeClr val="phClr">
+                <a:satMod val="110000"/>
+                <a:lumMod val="100000"/>
                 <a:shade val="100000"/>
-                <a:satMod val="130000"/>
               </a:schemeClr>
             </a:gs>
             <a:gs pos="100000">
               <a:schemeClr val="phClr">
-                <a:tint val="50000"/>
-                <a:shade val="100000"/>
-                <a:satMod val="350000"/>
+                <a:lumMod val="99000"/>
+                <a:satMod val="120000"/>
+                <a:shade val="78000"/>
               </a:schemeClr>
             </a:gs>
           </a:gsLst>
-          <a:lin ang="16200000" scaled="0"/>
+          <a:lin ang="5400000" scaled="0"/>
         </a:gradFill>
       </a:fillStyleLst>
       <a:lnStyleLst>
-        <a:ln w="9525" cap="flat" cmpd="sng" algn="ctr">
+        <a:ln w="12700" cap="flat" cmpd="sng" algn="ctr">
           <a:solidFill>
-            <a:schemeClr val="phClr">
-              <a:shade val="95000"/>
-              <a:satMod val="105000"/>
-            </a:schemeClr>
+            <a:schemeClr val="phClr"/>
           </a:solidFill>
           <a:prstDash val="solid"/>
+          <a:miter lim="800000"/>
+        </a:ln>
+        <a:ln w="19050" cap="flat" cmpd="sng" algn="ctr">
+          <a:solidFill>
+            <a:schemeClr val="phClr"/>
+          </a:solidFill>
+          <a:prstDash val="solid"/>
+          <a:miter lim="800000"/>
         </a:ln>
         <a:ln w="25400" cap="flat" cmpd="sng" algn="ctr">
           <a:solidFill>
             <a:schemeClr val="phClr"/>
           </a:solidFill>
           <a:prstDash val="solid"/>
-        </a:ln>
-        <a:ln w="38100" cap="flat" cmpd="sng" algn="ctr">
-          <a:solidFill>
-            <a:schemeClr val="phClr"/>
-          </a:solidFill>
-          <a:prstDash val="solid"/>
+          <a:miter lim="800000"/>
         </a:ln>
       </a:lnStyleLst>
       <a:effectStyleLst>
         <a:effectStyle>
+          <a:effectLst/>
+        </a:effectStyle>
+        <a:effectStyle>
+          <a:effectLst/>
+        </a:effectStyle>
+        <a:effectStyle>
           <a:effectLst>
-            <a:outerShdw blurRad="40000" dist="20000" dir="5400000" rotWithShape="0">
+            <a:outerShdw blurRad="57150" dist="19050" dir="5400000" algn="ctr" rotWithShape="0">
               <a:srgbClr val="000000">
-                <a:alpha val="38000"/>
+                <a:alpha val="63000"/>
               </a:srgbClr>
             </a:outerShdw>
           </a:effectLst>
-        </a:effectStyle>
-        <a:effectStyle>
-          <a:effectLst>
-            <a:outerShdw blurRad="40000" dist="23000" dir="5400000" rotWithShape="0">
-              <a:srgbClr val="000000">
-                <a:alpha val="35000"/>
-              </a:srgbClr>
-            </a:outerShdw>
-          </a:effectLst>
-        </a:effectStyle>
-        <a:effectStyle>
-          <a:effectLst>
-            <a:outerShdw blurRad="40000" dist="23000" dir="5400000" rotWithShape="0">
-              <a:srgbClr val="000000">
-                <a:alpha val="35000"/>
-              </a:srgbClr>
-            </a:outerShdw>
-          </a:effectLst>
-          <a:scene3d>
-            <a:camera prst="orthographicFront">
-              <a:rot lat="0" lon="0" rev="0"/>
-            </a:camera>
-            <a:lightRig rig="threePt" dir="t">
-              <a:rot lat="0" lon="0" rev="1200000"/>
-            </a:lightRig>
-          </a:scene3d>
-          <a:sp3d>
-            <a:bevelT w="63500" h="25400"/>
-          </a:sp3d>
         </a:effectStyle>
       </a:effectStyleLst>
       <a:bgFillStyleLst>
         <a:solidFill>
           <a:schemeClr val="phClr"/>
         </a:solidFill>
+        <a:solidFill>
+          <a:schemeClr val="phClr">
+            <a:tint val="95000"/>
+            <a:satMod val="170000"/>
+          </a:schemeClr>
+        </a:solidFill>
         <a:gradFill rotWithShape="1">
           <a:gsLst>
             <a:gs pos="0">
               <a:schemeClr val="phClr">
-                <a:tint val="40000"/>
-                <a:satMod val="350000"/>
+                <a:tint val="93000"/>
+                <a:satMod val="150000"/>
+                <a:shade val="98000"/>
+                <a:lumMod val="102000"/>
               </a:schemeClr>
             </a:gs>
-            <a:gs pos="40000">
+            <a:gs pos="50000">
               <a:schemeClr val="phClr">
-                <a:tint val="45000"/>
-                <a:shade val="99000"/>
-                <a:satMod val="350000"/>
+                <a:tint val="98000"/>
+                <a:satMod val="130000"/>
+                <a:shade val="90000"/>
+                <a:lumMod val="103000"/>
               </a:schemeClr>
             </a:gs>
             <a:gs pos="100000">
               <a:schemeClr val="phClr">
-                <a:shade val="20000"/>
-                <a:satMod val="255000"/>
+                <a:shade val="63000"/>
+                <a:satMod val="120000"/>
               </a:schemeClr>
             </a:gs>
           </a:gsLst>
-          <a:path path="circle">
-            <a:fillToRect l="50000" t="-80000" r="50000" b="180000"/>
-          </a:path>
-        </a:gradFill>
-        <a:gradFill rotWithShape="1">
-          <a:gsLst>
-            <a:gs pos="0">
-              <a:schemeClr val="phClr">
-                <a:tint val="80000"/>
-                <a:satMod val="300000"/>
-              </a:schemeClr>
-            </a:gs>
-            <a:gs pos="100000">
-              <a:schemeClr val="phClr">
-                <a:shade val="30000"/>
-                <a:satMod val="200000"/>
-              </a:schemeClr>
-            </a:gs>
-          </a:gsLst>
-          <a:path path="circle">
-            <a:fillToRect l="50000" t="50000" r="50000" b="50000"/>
-          </a:path>
+          <a:lin ang="5400000" scaled="0"/>
         </a:gradFill>
       </a:bgFillStyleLst>
     </a:fmtScheme>
   </a:themeElements>
   <a:objectDefaults>
-    <a:spDef>
-      <a:spPr/>
-      <a:bodyPr/>
-      <a:lstStyle/>
-      <a:style>
-        <a:lnRef idx="1">
-          <a:schemeClr val="accent1"/>
-        </a:lnRef>
-        <a:fillRef idx="3">
-          <a:schemeClr val="accent1"/>
-        </a:fillRef>
-        <a:effectRef idx="2">
-          <a:schemeClr val="accent1"/>
-        </a:effectRef>
-        <a:fontRef idx="minor">
-          <a:schemeClr val="lt1"/>
-        </a:fontRef>
-      </a:style>
-    </a:spDef>
     <a:lnDef>
       <a:spPr/>
       <a:bodyPr/>
@@ -16895,5 +17030,10 @@
     </a:lnDef>
   </a:objectDefaults>
   <a:extraClrSchemeLst/>
+  <a:extLst>
+    <a:ext uri="{05A4C25C-085E-4340-85A3-A5531E510DB2}">
+      <thm15:themeFamily xmlns:thm15="http://schemas.microsoft.com/office/thememl/2012/main" name="Office Theme" id="{2E142A2C-CD16-42D6-873A-C26D2A0506FA}" vid="{1BDDFF52-6CD6-40A5-AB3C-68EB2F1E4D0A}"/>
+    </a:ext>
+  </a:extLst>
 </a:theme>
 </file>